--- a/presentations/HybridsConsiderations.pptx
+++ b/presentations/HybridsConsiderations.pptx
@@ -1,40 +1,27 @@
 
 <file path=ppt/presentation.xml><?xml version="1.0" encoding="utf-8"?>
-<p:presentation xmlns:a="http://schemas.openxmlformats.org/drawingml/2006/main" xmlns:r="http://schemas.openxmlformats.org/officeDocument/2006/relationships" xmlns:p="http://schemas.openxmlformats.org/presentationml/2006/main" showSpecialPlsOnTitleSld="0" strictFirstAndLastChars="0" embedTrueTypeFonts="1" saveSubsetFonts="1" autoCompressPictures="0">
+<p:presentation xmlns:a="http://schemas.openxmlformats.org/drawingml/2006/main" xmlns:r="http://schemas.openxmlformats.org/officeDocument/2006/relationships" xmlns:p="http://schemas.openxmlformats.org/presentationml/2006/main" showSpecialPlsOnTitleSld="0" strictFirstAndLastChars="0" saveSubsetFonts="1" autoCompressPictures="0">
   <p:sldMasterIdLst>
     <p:sldMasterId id="2147483648" r:id="rId1"/>
   </p:sldMasterIdLst>
   <p:notesMasterIdLst>
-    <p:notesMasterId r:id="rId12"/>
+    <p:notesMasterId r:id="rId13"/>
   </p:notesMasterIdLst>
   <p:sldIdLst>
-    <p:sldId id="256" r:id="rId2"/>
-    <p:sldId id="291" r:id="rId3"/>
-    <p:sldId id="292" r:id="rId4"/>
+    <p:sldId id="291" r:id="rId2"/>
+    <p:sldId id="292" r:id="rId3"/>
+    <p:sldId id="301" r:id="rId4"/>
     <p:sldId id="293" r:id="rId5"/>
     <p:sldId id="294" r:id="rId6"/>
     <p:sldId id="295" r:id="rId7"/>
     <p:sldId id="296" r:id="rId8"/>
     <p:sldId id="297" r:id="rId9"/>
-    <p:sldId id="298" r:id="rId10"/>
-    <p:sldId id="299" r:id="rId11"/>
+    <p:sldId id="300" r:id="rId10"/>
+    <p:sldId id="298" r:id="rId11"/>
+    <p:sldId id="299" r:id="rId12"/>
   </p:sldIdLst>
   <p:sldSz cx="12192000" cy="6858000"/>
   <p:notesSz cx="6858000" cy="9144000"/>
-  <p:embeddedFontLst>
-    <p:embeddedFont>
-      <p:font typeface="Gill Sans" panose="020B0502020104020203" pitchFamily="34" charset="-79"/>
-      <p:regular r:id="rId13"/>
-      <p:bold r:id="rId14"/>
-    </p:embeddedFont>
-    <p:embeddedFont>
-      <p:font typeface="Verdana" panose="020B0604030504040204" pitchFamily="34" charset="0"/>
-      <p:regular r:id="rId15"/>
-      <p:bold r:id="rId16"/>
-      <p:italic r:id="rId17"/>
-      <p:boldItalic r:id="rId18"/>
-    </p:embeddedFont>
-  </p:embeddedFontLst>
   <p:defaultTextStyle>
     <a:defPPr marR="0" lvl="0" algn="l" rtl="0">
       <a:lnSpc>
@@ -265,8 +252,11 @@
     </a:lvl9pPr>
   </p:defaultTextStyle>
   <p:extLst>
+    <p:ext uri="{EFAFB233-063F-42B5-8137-9DF3F51BA10A}">
+      <p15:sldGuideLst xmlns:p15="http://schemas.microsoft.com/office/powerpoint/2012/main"/>
+    </p:ext>
     <p:ext uri="GoogleSlidesCustomDataVersion2">
-      <go:slidesCustomData xmlns:go="http://customooxmlschemas.google.com/" xmlns:ahyp="http://schemas.microsoft.com/office/drawing/2018/hyperlinkcolor" xmlns:p15="http://schemas.microsoft.com/office/powerpoint/2012/main" xmlns:p14="http://schemas.microsoft.com/office/powerpoint/2010/main" xmlns:com="http://schemas.openxmlformats.org/drawingml/2006/compatibility" xmlns:pvml="urn:schemas-microsoft-com:office:powerpoint" xmlns:v="urn:schemas-microsoft-com:vml" xmlns:o="urn:schemas-microsoft-com:office:office" xmlns:dgm="http://schemas.openxmlformats.org/drawingml/2006/diagram" xmlns:c="http://schemas.openxmlformats.org/drawingml/2006/chart" xmlns:mv="urn:schemas-microsoft-com:mac:vml" xmlns:mc="http://schemas.openxmlformats.org/markup-compatibility/2006" xmlns="" r:id="rId64" roundtripDataSignature="AMtx7mghQE9sZMfmL64FPsteMvJdIyGMEw=="/>
+      <go:slidesCustomData xmlns="" xmlns:mc="http://schemas.openxmlformats.org/markup-compatibility/2006" xmlns:mv="urn:schemas-microsoft-com:mac:vml" xmlns:c="http://schemas.openxmlformats.org/drawingml/2006/chart" xmlns:dgm="http://schemas.openxmlformats.org/drawingml/2006/diagram" xmlns:o="urn:schemas-microsoft-com:office:office" xmlns:v="urn:schemas-microsoft-com:vml" xmlns:pvml="urn:schemas-microsoft-com:office:powerpoint" xmlns:com="http://schemas.openxmlformats.org/drawingml/2006/compatibility" xmlns:p14="http://schemas.microsoft.com/office/powerpoint/2010/main" xmlns:p15="http://schemas.microsoft.com/office/powerpoint/2012/main" xmlns:ahyp="http://schemas.microsoft.com/office/drawing/2018/hyperlinkcolor" xmlns:go="http://customooxmlschemas.google.com/" r:id="rId64" roundtripDataSignature="AMtx7mghQE9sZMfmL64FPsteMvJdIyGMEw=="/>
     </p:ext>
   </p:extLst>
 </p:presentation>
@@ -1470,7 +1460,7 @@
   <p:cSld>
     <p:spTree>
       <p:nvGrpSpPr>
-        <p:cNvPr id="1" name="Shape 347"/>
+        <p:cNvPr id="1" name="Shape 620"/>
         <p:cNvGrpSpPr/>
         <p:nvPr/>
       </p:nvGrpSpPr>
@@ -1484,7 +1474,45 @@
       </p:grpSpPr>
       <p:sp>
         <p:nvSpPr>
-          <p:cNvPr id="348" name="Google Shape;348;p1:notes"/>
+          <p:cNvPr id="621" name="Google Shape;621;g3daf0311381_0_96:notes"/>
+          <p:cNvSpPr txBox="1">
+            <a:spLocks noGrp="1"/>
+          </p:cNvSpPr>
+          <p:nvPr>
+            <p:ph type="body" idx="1"/>
+          </p:nvPr>
+        </p:nvSpPr>
+        <p:spPr>
+          <a:xfrm>
+            <a:off x="685800" y="4400550"/>
+            <a:ext cx="5486400" cy="3600600"/>
+          </a:xfrm>
+          <a:prstGeom prst="rect">
+            <a:avLst/>
+          </a:prstGeom>
+        </p:spPr>
+        <p:txBody>
+          <a:bodyPr spcFirstLastPara="1" wrap="square" lIns="91425" tIns="45700" rIns="91425" bIns="45700" anchor="t" anchorCtr="0">
+            <a:noAutofit/>
+          </a:bodyPr>
+          <a:lstStyle/>
+          <a:p>
+            <a:pPr marL="0" lvl="0" indent="0" algn="l" rtl="0">
+              <a:spcBef>
+                <a:spcPts val="0"/>
+              </a:spcBef>
+              <a:spcAft>
+                <a:spcPts val="0"/>
+              </a:spcAft>
+              <a:buNone/>
+            </a:pPr>
+            <a:endParaRPr/>
+          </a:p>
+        </p:txBody>
+      </p:sp>
+      <p:sp>
+        <p:nvSpPr>
+          <p:cNvPr id="622" name="Google Shape;622;g3daf0311381_0_96:notes"/>
           <p:cNvSpPr>
             <a:spLocks noGrp="1" noRot="1" noChangeAspect="1"/>
           </p:cNvSpPr>
@@ -1521,21 +1549,36 @@
               </a:path>
             </a:pathLst>
           </a:custGeom>
-          <a:noFill/>
-          <a:ln w="12700" cap="flat" cmpd="sng">
-            <a:solidFill>
-              <a:srgbClr val="000000"/>
-            </a:solidFill>
-            <a:prstDash val="solid"/>
-            <a:round/>
-            <a:headEnd type="none" w="sm" len="sm"/>
-            <a:tailEnd type="none" w="sm" len="sm"/>
-          </a:ln>
         </p:spPr>
       </p:sp>
+    </p:spTree>
+  </p:cSld>
+  <p:clrMapOvr>
+    <a:masterClrMapping/>
+  </p:clrMapOvr>
+</p:notes>
+</file>
+
+<file path=ppt/notesSlides/notesSlide10.xml><?xml version="1.0" encoding="utf-8"?>
+<p:notes xmlns:a="http://schemas.openxmlformats.org/drawingml/2006/main" xmlns:r="http://schemas.openxmlformats.org/officeDocument/2006/relationships" xmlns:p="http://schemas.openxmlformats.org/presentationml/2006/main" showMasterSp="0" showMasterPhAnim="0">
+  <p:cSld>
+    <p:spTree>
+      <p:nvGrpSpPr>
+        <p:cNvPr id="1" name="Shape 687"/>
+        <p:cNvGrpSpPr/>
+        <p:nvPr/>
+      </p:nvGrpSpPr>
+      <p:grpSpPr>
+        <a:xfrm>
+          <a:off x="0" y="0"/>
+          <a:ext cx="0" cy="0"/>
+          <a:chOff x="0" y="0"/>
+          <a:chExt cx="0" cy="0"/>
+        </a:xfrm>
+      </p:grpSpPr>
       <p:sp>
         <p:nvSpPr>
-          <p:cNvPr id="349" name="Google Shape;349;p1:notes"/>
+          <p:cNvPr id="688" name="Google Shape;688;g3daf0311381_0_114:notes"/>
           <p:cNvSpPr txBox="1">
             <a:spLocks noGrp="1"/>
           </p:cNvSpPr>
@@ -1546,15 +1589,11 @@
         <p:spPr>
           <a:xfrm>
             <a:off x="685800" y="4400550"/>
-            <a:ext cx="5486400" cy="3600450"/>
+            <a:ext cx="5486400" cy="3600600"/>
           </a:xfrm>
           <a:prstGeom prst="rect">
             <a:avLst/>
           </a:prstGeom>
-          <a:noFill/>
-          <a:ln>
-            <a:noFill/>
-          </a:ln>
         </p:spPr>
         <p:txBody>
           <a:bodyPr spcFirstLastPara="1" wrap="square" lIns="91425" tIns="45700" rIns="91425" bIns="45700" anchor="t" anchorCtr="0">
@@ -1577,49 +1616,44 @@
       </p:sp>
       <p:sp>
         <p:nvSpPr>
-          <p:cNvPr id="350" name="Google Shape;350;p1:notes"/>
-          <p:cNvSpPr txBox="1">
-            <a:spLocks noGrp="1"/>
+          <p:cNvPr id="689" name="Google Shape;689;g3daf0311381_0_114:notes"/>
+          <p:cNvSpPr>
+            <a:spLocks noGrp="1" noRot="1" noChangeAspect="1"/>
           </p:cNvSpPr>
           <p:nvPr>
-            <p:ph type="sldNum" idx="12"/>
+            <p:ph type="sldImg" idx="2"/>
           </p:nvPr>
         </p:nvSpPr>
         <p:spPr>
           <a:xfrm>
-            <a:off x="3884613" y="8685213"/>
-            <a:ext cx="2971800" cy="458787"/>
+            <a:off x="685800" y="1143000"/>
+            <a:ext cx="5486400" cy="3086100"/>
           </a:xfrm>
-          <a:prstGeom prst="rect">
+          <a:custGeom>
             <a:avLst/>
-          </a:prstGeom>
-          <a:noFill/>
-          <a:ln>
-            <a:noFill/>
-          </a:ln>
+            <a:gdLst/>
+            <a:ahLst/>
+            <a:cxnLst/>
+            <a:rect l="l" t="t" r="r" b="b"/>
+            <a:pathLst>
+              <a:path w="120000" h="120000" extrusionOk="0">
+                <a:moveTo>
+                  <a:pt x="0" y="0"/>
+                </a:moveTo>
+                <a:lnTo>
+                  <a:pt x="120000" y="0"/>
+                </a:lnTo>
+                <a:lnTo>
+                  <a:pt x="120000" y="120000"/>
+                </a:lnTo>
+                <a:lnTo>
+                  <a:pt x="0" y="120000"/>
+                </a:lnTo>
+                <a:close/>
+              </a:path>
+            </a:pathLst>
+          </a:custGeom>
         </p:spPr>
-        <p:txBody>
-          <a:bodyPr spcFirstLastPara="1" wrap="square" lIns="91425" tIns="45700" rIns="91425" bIns="45700" anchor="b" anchorCtr="0">
-            <a:noAutofit/>
-          </a:bodyPr>
-          <a:lstStyle/>
-          <a:p>
-            <a:pPr marL="0" lvl="0" indent="0" algn="r" rtl="0">
-              <a:spcBef>
-                <a:spcPts val="0"/>
-              </a:spcBef>
-              <a:spcAft>
-                <a:spcPts val="0"/>
-              </a:spcAft>
-              <a:buNone/>
-            </a:pPr>
-            <a:fld id="{00000000-1234-1234-1234-123412341234}" type="slidenum">
-              <a:rPr lang="en-US"/>
-              <a:t>1</a:t>
-            </a:fld>
-            <a:endParaRPr/>
-          </a:p>
-        </p:txBody>
       </p:sp>
     </p:spTree>
   </p:cSld>
@@ -1629,7 +1663,7 @@
 </p:notes>
 </file>
 
-<file path=ppt/notesSlides/notesSlide10.xml><?xml version="1.0" encoding="utf-8"?>
+<file path=ppt/notesSlides/notesSlide11.xml><?xml version="1.0" encoding="utf-8"?>
 <p:notes xmlns:a="http://schemas.openxmlformats.org/drawingml/2006/main" xmlns:r="http://schemas.openxmlformats.org/officeDocument/2006/relationships" xmlns:p="http://schemas.openxmlformats.org/presentationml/2006/main" showMasterSp="0" showMasterPhAnim="0">
   <p:cSld>
     <p:spTree>
@@ -1738,7 +1772,7 @@
   <p:cSld>
     <p:spTree>
       <p:nvGrpSpPr>
-        <p:cNvPr id="1" name="Shape 620"/>
+        <p:cNvPr id="1" name="Shape 627"/>
         <p:cNvGrpSpPr/>
         <p:nvPr/>
       </p:nvGrpSpPr>
@@ -1752,7 +1786,7 @@
       </p:grpSpPr>
       <p:sp>
         <p:nvSpPr>
-          <p:cNvPr id="621" name="Google Shape;621;g3daf0311381_0_96:notes"/>
+          <p:cNvPr id="628" name="Google Shape;628;g3daf0311381_0_102:notes"/>
           <p:cNvSpPr txBox="1">
             <a:spLocks noGrp="1"/>
           </p:cNvSpPr>
@@ -1790,7 +1824,7 @@
       </p:sp>
       <p:sp>
         <p:nvSpPr>
-          <p:cNvPr id="622" name="Google Shape;622;g3daf0311381_0_96:notes"/>
+          <p:cNvPr id="629" name="Google Shape;629;g3daf0311381_0_102:notes"/>
           <p:cNvSpPr>
             <a:spLocks noGrp="1" noRot="1" noChangeAspect="1"/>
           </p:cNvSpPr>
@@ -1842,7 +1876,13 @@
   <p:cSld>
     <p:spTree>
       <p:nvGrpSpPr>
-        <p:cNvPr id="1" name="Shape 627"/>
+        <p:cNvPr id="1" name="Shape 620">
+          <a:extLst>
+            <a:ext uri="{FF2B5EF4-FFF2-40B4-BE49-F238E27FC236}">
+              <a16:creationId xmlns:a16="http://schemas.microsoft.com/office/drawing/2014/main" id="{1E06B96F-C789-059B-8F69-3E41E2C8E320}"/>
+            </a:ext>
+          </a:extLst>
+        </p:cNvPr>
         <p:cNvGrpSpPr/>
         <p:nvPr/>
       </p:nvGrpSpPr>
@@ -1856,7 +1896,13 @@
       </p:grpSpPr>
       <p:sp>
         <p:nvSpPr>
-          <p:cNvPr id="628" name="Google Shape;628;g3daf0311381_0_102:notes"/>
+          <p:cNvPr id="621" name="Google Shape;621;g3daf0311381_0_96:notes">
+            <a:extLst>
+              <a:ext uri="{FF2B5EF4-FFF2-40B4-BE49-F238E27FC236}">
+                <a16:creationId xmlns:a16="http://schemas.microsoft.com/office/drawing/2014/main" id="{05F7768A-484A-FD59-A569-1A76AFC225C4}"/>
+              </a:ext>
+            </a:extLst>
+          </p:cNvPr>
           <p:cNvSpPr txBox="1">
             <a:spLocks noGrp="1"/>
           </p:cNvSpPr>
@@ -1894,7 +1940,13 @@
       </p:sp>
       <p:sp>
         <p:nvSpPr>
-          <p:cNvPr id="629" name="Google Shape;629;g3daf0311381_0_102:notes"/>
+          <p:cNvPr id="622" name="Google Shape;622;g3daf0311381_0_96:notes">
+            <a:extLst>
+              <a:ext uri="{FF2B5EF4-FFF2-40B4-BE49-F238E27FC236}">
+                <a16:creationId xmlns:a16="http://schemas.microsoft.com/office/drawing/2014/main" id="{F4AC376B-BD15-0697-8636-8DD43EB57D70}"/>
+              </a:ext>
+            </a:extLst>
+          </p:cNvPr>
           <p:cNvSpPr>
             <a:spLocks noGrp="1" noRot="1" noChangeAspect="1"/>
           </p:cNvSpPr>
@@ -1934,6 +1986,11 @@
         </p:spPr>
       </p:sp>
     </p:spTree>
+    <p:extLst>
+      <p:ext uri="{BB962C8B-B14F-4D97-AF65-F5344CB8AC3E}">
+        <p14:creationId xmlns:p14="http://schemas.microsoft.com/office/powerpoint/2010/main" val="1512632170"/>
+      </p:ext>
+    </p:extLst>
   </p:cSld>
   <p:clrMapOvr>
     <a:masterClrMapping/>
@@ -2466,7 +2523,13 @@
   <p:cSld>
     <p:spTree>
       <p:nvGrpSpPr>
-        <p:cNvPr id="1" name="Shape 687"/>
+        <p:cNvPr id="1" name="Shape 620">
+          <a:extLst>
+            <a:ext uri="{FF2B5EF4-FFF2-40B4-BE49-F238E27FC236}">
+              <a16:creationId xmlns:a16="http://schemas.microsoft.com/office/drawing/2014/main" id="{EF07878E-BDD4-CBE7-3306-85C5E4442D41}"/>
+            </a:ext>
+          </a:extLst>
+        </p:cNvPr>
         <p:cNvGrpSpPr/>
         <p:nvPr/>
       </p:nvGrpSpPr>
@@ -2480,7 +2543,13 @@
       </p:grpSpPr>
       <p:sp>
         <p:nvSpPr>
-          <p:cNvPr id="688" name="Google Shape;688;g3daf0311381_0_114:notes"/>
+          <p:cNvPr id="621" name="Google Shape;621;g3daf0311381_0_96:notes">
+            <a:extLst>
+              <a:ext uri="{FF2B5EF4-FFF2-40B4-BE49-F238E27FC236}">
+                <a16:creationId xmlns:a16="http://schemas.microsoft.com/office/drawing/2014/main" id="{22695447-6FE6-745D-0539-D27CBABFF933}"/>
+              </a:ext>
+            </a:extLst>
+          </p:cNvPr>
           <p:cNvSpPr txBox="1">
             <a:spLocks noGrp="1"/>
           </p:cNvSpPr>
@@ -2518,7 +2587,13 @@
       </p:sp>
       <p:sp>
         <p:nvSpPr>
-          <p:cNvPr id="689" name="Google Shape;689;g3daf0311381_0_114:notes"/>
+          <p:cNvPr id="622" name="Google Shape;622;g3daf0311381_0_96:notes">
+            <a:extLst>
+              <a:ext uri="{FF2B5EF4-FFF2-40B4-BE49-F238E27FC236}">
+                <a16:creationId xmlns:a16="http://schemas.microsoft.com/office/drawing/2014/main" id="{F6D747C7-D4B4-C5A9-AE84-F2CBDA529B13}"/>
+              </a:ext>
+            </a:extLst>
+          </p:cNvPr>
           <p:cNvSpPr>
             <a:spLocks noGrp="1" noRot="1" noChangeAspect="1"/>
           </p:cNvSpPr>
@@ -2558,6 +2633,11 @@
         </p:spPr>
       </p:sp>
     </p:spTree>
+    <p:extLst>
+      <p:ext uri="{BB962C8B-B14F-4D97-AF65-F5344CB8AC3E}">
+        <p14:creationId xmlns:p14="http://schemas.microsoft.com/office/powerpoint/2010/main" val="1646156579"/>
+      </p:ext>
+    </p:extLst>
   </p:cSld>
   <p:clrMapOvr>
     <a:masterClrMapping/>
@@ -2566,11 +2646,11 @@
 </file>
 
 <file path=ppt/slideLayouts/slideLayout1.xml><?xml version="1.0" encoding="utf-8"?>
-<p:sldLayout xmlns:a="http://schemas.openxmlformats.org/drawingml/2006/main" xmlns:r="http://schemas.openxmlformats.org/officeDocument/2006/relationships" xmlns:p="http://schemas.openxmlformats.org/presentationml/2006/main" matchingName="1_Title Slide">
-  <p:cSld name="1_Title Slide">
+<p:sldLayout xmlns:a="http://schemas.openxmlformats.org/drawingml/2006/main" xmlns:r="http://schemas.openxmlformats.org/officeDocument/2006/relationships" xmlns:p="http://schemas.openxmlformats.org/presentationml/2006/main" matchingName="1_Two Content">
+  <p:cSld name="1_Two Content">
     <p:spTree>
       <p:nvGrpSpPr>
-        <p:cNvPr id="1" name="Shape 19"/>
+        <p:cNvPr id="1" name="Shape 27"/>
         <p:cNvGrpSpPr/>
         <p:nvPr/>
       </p:nvGrpSpPr>
@@ -2584,66 +2664,18 @@
       </p:grpSpPr>
       <p:sp>
         <p:nvSpPr>
-          <p:cNvPr id="20" name="Google Shape;20;p4"/>
-          <p:cNvSpPr/>
-          <p:nvPr/>
-        </p:nvSpPr>
-        <p:spPr>
-          <a:xfrm>
-            <a:off x="597455" y="3085765"/>
-            <a:ext cx="10986811" cy="3304800"/>
-          </a:xfrm>
-          <a:prstGeom prst="rect">
-            <a:avLst/>
-          </a:prstGeom>
-          <a:solidFill>
-            <a:schemeClr val="accent1"/>
-          </a:solidFill>
-          <a:ln>
-            <a:noFill/>
-          </a:ln>
-        </p:spPr>
-        <p:txBody>
-          <a:bodyPr spcFirstLastPara="1" wrap="square" lIns="91425" tIns="45700" rIns="91425" bIns="45700" anchor="t" anchorCtr="0">
-            <a:noAutofit/>
-          </a:bodyPr>
-          <a:lstStyle/>
-          <a:p>
-            <a:pPr marL="0" marR="0" lvl="0" indent="0" algn="l" rtl="0">
-              <a:spcBef>
-                <a:spcPts val="0"/>
-              </a:spcBef>
-              <a:spcAft>
-                <a:spcPts val="0"/>
-              </a:spcAft>
-              <a:buNone/>
-            </a:pPr>
-            <a:endParaRPr sz="1800">
-              <a:solidFill>
-                <a:schemeClr val="lt1"/>
-              </a:solidFill>
-              <a:latin typeface="Gill Sans"/>
-              <a:ea typeface="Gill Sans"/>
-              <a:cs typeface="Gill Sans"/>
-              <a:sym typeface="Gill Sans"/>
-            </a:endParaRPr>
-          </a:p>
-        </p:txBody>
-      </p:sp>
-      <p:sp>
-        <p:nvSpPr>
-          <p:cNvPr id="21" name="Google Shape;21;p4"/>
+          <p:cNvPr id="28" name="Google Shape;28;p5"/>
           <p:cNvSpPr txBox="1">
             <a:spLocks noGrp="1"/>
           </p:cNvSpPr>
           <p:nvPr>
-            <p:ph type="ctrTitle"/>
+            <p:ph type="body" idx="1"/>
           </p:nvPr>
         </p:nvSpPr>
         <p:spPr>
           <a:xfrm>
-            <a:off x="774923" y="990600"/>
-            <a:ext cx="10653003" cy="1504844"/>
+            <a:off x="774924" y="1523260"/>
+            <a:ext cx="5199369" cy="4337790"/>
           </a:xfrm>
           <a:prstGeom prst="rect">
             <a:avLst/>
@@ -2654,119 +2686,107 @@
           </a:ln>
         </p:spPr>
         <p:txBody>
-          <a:bodyPr spcFirstLastPara="1" wrap="square" lIns="91425" tIns="45700" rIns="91425" bIns="45700" anchor="b" anchorCtr="0">
+          <a:bodyPr spcFirstLastPara="1" wrap="square" lIns="91425" tIns="45700" rIns="91425" bIns="45700" anchor="ctr" anchorCtr="0">
             <a:normAutofit/>
           </a:bodyPr>
           <a:lstStyle>
-            <a:lvl1pPr lvl="0" algn="l">
-              <a:spcBef>
-                <a:spcPts val="0"/>
-              </a:spcBef>
-              <a:spcAft>
-                <a:spcPts val="0"/>
-              </a:spcAft>
-              <a:buClr>
-                <a:schemeClr val="accent1"/>
-              </a:buClr>
-              <a:buSzPts val="3600"/>
-              <a:buFont typeface="Arial"/>
-              <a:buNone/>
-              <a:defRPr sz="3600">
-                <a:solidFill>
-                  <a:schemeClr val="accent1"/>
-                </a:solidFill>
-                <a:latin typeface="Arial"/>
-                <a:ea typeface="Arial"/>
-                <a:cs typeface="Arial"/>
-                <a:sym typeface="Arial"/>
-              </a:defRPr>
+            <a:lvl1pPr marL="457200" lvl="0" indent="-228600" algn="l">
+              <a:spcBef>
+                <a:spcPts val="360"/>
+              </a:spcBef>
+              <a:spcAft>
+                <a:spcPts val="0"/>
+              </a:spcAft>
+              <a:buSzPts val="1656"/>
+              <a:buNone/>
+              <a:defRPr/>
             </a:lvl1pPr>
-            <a:lvl2pPr lvl="1" algn="l">
-              <a:spcBef>
-                <a:spcPts val="0"/>
-              </a:spcBef>
-              <a:spcAft>
-                <a:spcPts val="0"/>
-              </a:spcAft>
-              <a:buSzPts val="1400"/>
-              <a:buNone/>
+            <a:lvl2pPr marL="914400" lvl="1" indent="-333756" algn="l">
+              <a:spcBef>
+                <a:spcPts val="600"/>
+              </a:spcBef>
+              <a:spcAft>
+                <a:spcPts val="0"/>
+              </a:spcAft>
+              <a:buSzPts val="1656"/>
+              <a:buChar char="◼"/>
               <a:defRPr/>
             </a:lvl2pPr>
-            <a:lvl3pPr lvl="2" algn="l">
-              <a:spcBef>
-                <a:spcPts val="0"/>
-              </a:spcBef>
-              <a:spcAft>
-                <a:spcPts val="0"/>
-              </a:spcAft>
-              <a:buSzPts val="1400"/>
-              <a:buNone/>
+            <a:lvl3pPr marL="1371600" lvl="2" indent="-333756" algn="l">
+              <a:spcBef>
+                <a:spcPts val="600"/>
+              </a:spcBef>
+              <a:spcAft>
+                <a:spcPts val="0"/>
+              </a:spcAft>
+              <a:buSzPts val="1656"/>
+              <a:buChar char="◼"/>
               <a:defRPr/>
             </a:lvl3pPr>
-            <a:lvl4pPr lvl="3" algn="l">
-              <a:spcBef>
-                <a:spcPts val="0"/>
-              </a:spcBef>
-              <a:spcAft>
-                <a:spcPts val="0"/>
-              </a:spcAft>
-              <a:buSzPts val="1400"/>
-              <a:buNone/>
+            <a:lvl4pPr marL="1828800" lvl="3" indent="-333756" algn="l">
+              <a:spcBef>
+                <a:spcPts val="600"/>
+              </a:spcBef>
+              <a:spcAft>
+                <a:spcPts val="0"/>
+              </a:spcAft>
+              <a:buSzPts val="1656"/>
+              <a:buChar char="◼"/>
               <a:defRPr/>
             </a:lvl4pPr>
-            <a:lvl5pPr lvl="4" algn="l">
-              <a:spcBef>
-                <a:spcPts val="0"/>
-              </a:spcBef>
-              <a:spcAft>
-                <a:spcPts val="0"/>
-              </a:spcAft>
-              <a:buSzPts val="1400"/>
-              <a:buNone/>
+            <a:lvl5pPr marL="2286000" lvl="4" indent="-333756" algn="l">
+              <a:spcBef>
+                <a:spcPts val="600"/>
+              </a:spcBef>
+              <a:spcAft>
+                <a:spcPts val="0"/>
+              </a:spcAft>
+              <a:buSzPts val="1656"/>
+              <a:buChar char="◼"/>
               <a:defRPr/>
             </a:lvl5pPr>
-            <a:lvl6pPr lvl="5" algn="l">
-              <a:spcBef>
-                <a:spcPts val="0"/>
-              </a:spcBef>
-              <a:spcAft>
-                <a:spcPts val="0"/>
-              </a:spcAft>
-              <a:buSzPts val="1400"/>
-              <a:buNone/>
+            <a:lvl6pPr marL="2743200" lvl="5" indent="-333756" algn="l">
+              <a:spcBef>
+                <a:spcPts val="600"/>
+              </a:spcBef>
+              <a:spcAft>
+                <a:spcPts val="0"/>
+              </a:spcAft>
+              <a:buSzPts val="1656"/>
+              <a:buChar char="◼"/>
               <a:defRPr/>
             </a:lvl6pPr>
-            <a:lvl7pPr lvl="6" algn="l">
-              <a:spcBef>
-                <a:spcPts val="0"/>
-              </a:spcBef>
-              <a:spcAft>
-                <a:spcPts val="0"/>
-              </a:spcAft>
-              <a:buSzPts val="1400"/>
-              <a:buNone/>
+            <a:lvl7pPr marL="3200400" lvl="6" indent="-333756" algn="l">
+              <a:spcBef>
+                <a:spcPts val="600"/>
+              </a:spcBef>
+              <a:spcAft>
+                <a:spcPts val="0"/>
+              </a:spcAft>
+              <a:buSzPts val="1656"/>
+              <a:buChar char="◼"/>
               <a:defRPr/>
             </a:lvl7pPr>
-            <a:lvl8pPr lvl="7" algn="l">
-              <a:spcBef>
-                <a:spcPts val="0"/>
-              </a:spcBef>
-              <a:spcAft>
-                <a:spcPts val="0"/>
-              </a:spcAft>
-              <a:buSzPts val="1400"/>
-              <a:buNone/>
+            <a:lvl8pPr marL="3657600" lvl="7" indent="-333756" algn="l">
+              <a:spcBef>
+                <a:spcPts val="600"/>
+              </a:spcBef>
+              <a:spcAft>
+                <a:spcPts val="0"/>
+              </a:spcAft>
+              <a:buSzPts val="1656"/>
+              <a:buChar char="◼"/>
               <a:defRPr/>
             </a:lvl8pPr>
-            <a:lvl9pPr lvl="8" algn="l">
-              <a:spcBef>
-                <a:spcPts val="0"/>
-              </a:spcBef>
-              <a:spcAft>
-                <a:spcPts val="0"/>
-              </a:spcAft>
-              <a:buSzPts val="1400"/>
-              <a:buNone/>
+            <a:lvl9pPr marL="4114800" lvl="8" indent="-333756" algn="l">
+              <a:spcBef>
+                <a:spcPts val="600"/>
+              </a:spcBef>
+              <a:spcAft>
+                <a:spcPts val="600"/>
+              </a:spcAft>
+              <a:buSzPts val="1656"/>
+              <a:buChar char="◼"/>
               <a:defRPr/>
             </a:lvl9pPr>
           </a:lstStyle>
@@ -2777,18 +2797,18 @@
       </p:sp>
       <p:sp>
         <p:nvSpPr>
-          <p:cNvPr id="22" name="Google Shape;22;p4"/>
+          <p:cNvPr id="29" name="Google Shape;29;p5"/>
           <p:cNvSpPr txBox="1">
             <a:spLocks noGrp="1"/>
           </p:cNvSpPr>
           <p:nvPr>
-            <p:ph type="subTitle" idx="1"/>
+            <p:ph type="body" idx="2"/>
           </p:nvPr>
         </p:nvSpPr>
         <p:spPr>
           <a:xfrm>
-            <a:off x="774923" y="2495445"/>
-            <a:ext cx="10653003" cy="590321"/>
+            <a:off x="6217709" y="1523260"/>
+            <a:ext cx="5210216" cy="4337791"/>
           </a:xfrm>
           <a:prstGeom prst="rect">
             <a:avLst/>
@@ -2799,144 +2819,108 @@
           </a:ln>
         </p:spPr>
         <p:txBody>
-          <a:bodyPr spcFirstLastPara="1" wrap="square" lIns="91425" tIns="45700" rIns="91425" bIns="45700" anchor="t" anchorCtr="0">
+          <a:bodyPr spcFirstLastPara="1" wrap="square" lIns="91425" tIns="45700" rIns="91425" bIns="45700" anchor="ctr" anchorCtr="0">
             <a:normAutofit/>
           </a:bodyPr>
           <a:lstStyle>
-            <a:lvl1pPr lvl="0" algn="l">
-              <a:spcBef>
-                <a:spcPts val="320"/>
-              </a:spcBef>
-              <a:spcAft>
-                <a:spcPts val="0"/>
-              </a:spcAft>
-              <a:buSzPts val="1472"/>
-              <a:buNone/>
-              <a:defRPr sz="1600" cap="none">
-                <a:solidFill>
-                  <a:schemeClr val="accent2"/>
-                </a:solidFill>
-              </a:defRPr>
+            <a:lvl1pPr marL="457200" lvl="0" indent="-228600" algn="l">
+              <a:spcBef>
+                <a:spcPts val="360"/>
+              </a:spcBef>
+              <a:spcAft>
+                <a:spcPts val="0"/>
+              </a:spcAft>
+              <a:buSzPts val="1656"/>
+              <a:buNone/>
+              <a:defRPr/>
             </a:lvl1pPr>
-            <a:lvl2pPr lvl="1" algn="ctr">
+            <a:lvl2pPr marL="914400" lvl="1" indent="-333756" algn="l">
               <a:spcBef>
                 <a:spcPts val="600"/>
               </a:spcBef>
               <a:spcAft>
                 <a:spcPts val="0"/>
               </a:spcAft>
-              <a:buSzPts val="1472"/>
-              <a:buNone/>
-              <a:defRPr>
-                <a:solidFill>
-                  <a:srgbClr val="888888"/>
-                </a:solidFill>
-              </a:defRPr>
+              <a:buSzPts val="1656"/>
+              <a:buChar char="◼"/>
+              <a:defRPr/>
             </a:lvl2pPr>
-            <a:lvl3pPr lvl="2" algn="ctr">
+            <a:lvl3pPr marL="1371600" lvl="2" indent="-333756" algn="l">
               <a:spcBef>
                 <a:spcPts val="600"/>
               </a:spcBef>
               <a:spcAft>
                 <a:spcPts val="0"/>
               </a:spcAft>
-              <a:buSzPts val="1288"/>
-              <a:buNone/>
-              <a:defRPr>
-                <a:solidFill>
-                  <a:srgbClr val="888888"/>
-                </a:solidFill>
-              </a:defRPr>
+              <a:buSzPts val="1656"/>
+              <a:buChar char="◼"/>
+              <a:defRPr/>
             </a:lvl3pPr>
-            <a:lvl4pPr lvl="3" algn="ctr">
+            <a:lvl4pPr marL="1828800" lvl="3" indent="-333756" algn="l">
               <a:spcBef>
                 <a:spcPts val="600"/>
               </a:spcBef>
               <a:spcAft>
                 <a:spcPts val="0"/>
               </a:spcAft>
-              <a:buSzPts val="1104"/>
-              <a:buNone/>
-              <a:defRPr>
-                <a:solidFill>
-                  <a:srgbClr val="888888"/>
-                </a:solidFill>
-              </a:defRPr>
+              <a:buSzPts val="1656"/>
+              <a:buChar char="◼"/>
+              <a:defRPr/>
             </a:lvl4pPr>
-            <a:lvl5pPr lvl="4" algn="ctr">
+            <a:lvl5pPr marL="2286000" lvl="4" indent="-333756" algn="l">
               <a:spcBef>
                 <a:spcPts val="600"/>
               </a:spcBef>
               <a:spcAft>
                 <a:spcPts val="0"/>
               </a:spcAft>
-              <a:buSzPts val="1104"/>
-              <a:buNone/>
-              <a:defRPr>
-                <a:solidFill>
-                  <a:srgbClr val="888888"/>
-                </a:solidFill>
-              </a:defRPr>
+              <a:buSzPts val="1656"/>
+              <a:buChar char="◼"/>
+              <a:defRPr/>
             </a:lvl5pPr>
-            <a:lvl6pPr lvl="5" algn="ctr">
+            <a:lvl6pPr marL="2743200" lvl="5" indent="-333756" algn="l">
               <a:spcBef>
                 <a:spcPts val="600"/>
               </a:spcBef>
               <a:spcAft>
                 <a:spcPts val="0"/>
               </a:spcAft>
-              <a:buSzPts val="1104"/>
-              <a:buNone/>
-              <a:defRPr>
-                <a:solidFill>
-                  <a:srgbClr val="888888"/>
-                </a:solidFill>
-              </a:defRPr>
+              <a:buSzPts val="1656"/>
+              <a:buChar char="◼"/>
+              <a:defRPr/>
             </a:lvl6pPr>
-            <a:lvl7pPr lvl="6" algn="ctr">
+            <a:lvl7pPr marL="3200400" lvl="6" indent="-333756" algn="l">
               <a:spcBef>
                 <a:spcPts val="600"/>
               </a:spcBef>
               <a:spcAft>
                 <a:spcPts val="0"/>
               </a:spcAft>
-              <a:buSzPts val="1104"/>
-              <a:buNone/>
-              <a:defRPr>
-                <a:solidFill>
-                  <a:srgbClr val="888888"/>
-                </a:solidFill>
-              </a:defRPr>
+              <a:buSzPts val="1656"/>
+              <a:buChar char="◼"/>
+              <a:defRPr/>
             </a:lvl7pPr>
-            <a:lvl8pPr lvl="7" algn="ctr">
+            <a:lvl8pPr marL="3657600" lvl="7" indent="-333756" algn="l">
               <a:spcBef>
                 <a:spcPts val="600"/>
               </a:spcBef>
               <a:spcAft>
                 <a:spcPts val="0"/>
               </a:spcAft>
-              <a:buSzPts val="1104"/>
-              <a:buNone/>
-              <a:defRPr>
-                <a:solidFill>
-                  <a:srgbClr val="888888"/>
-                </a:solidFill>
-              </a:defRPr>
+              <a:buSzPts val="1656"/>
+              <a:buChar char="◼"/>
+              <a:defRPr/>
             </a:lvl8pPr>
-            <a:lvl9pPr lvl="8" algn="ctr">
+            <a:lvl9pPr marL="4114800" lvl="8" indent="-333756" algn="l">
               <a:spcBef>
                 <a:spcPts val="600"/>
               </a:spcBef>
               <a:spcAft>
                 <a:spcPts val="600"/>
               </a:spcAft>
-              <a:buSzPts val="1104"/>
-              <a:buNone/>
-              <a:defRPr>
-                <a:solidFill>
-                  <a:srgbClr val="888888"/>
-                </a:solidFill>
-              </a:defRPr>
+              <a:buSzPts val="1656"/>
+              <a:buChar char="◼"/>
+              <a:defRPr/>
             </a:lvl9pPr>
           </a:lstStyle>
           <a:p>
@@ -2946,7 +2930,7 @@
       </p:sp>
       <p:sp>
         <p:nvSpPr>
-          <p:cNvPr id="23" name="Google Shape;23;p4"/>
+          <p:cNvPr id="30" name="Google Shape;30;p5"/>
           <p:cNvSpPr txBox="1">
             <a:spLocks noGrp="1"/>
           </p:cNvSpPr>
@@ -2981,11 +2965,7 @@
               </a:spcAft>
               <a:buSzPts val="1400"/>
               <a:buNone/>
-              <a:defRPr>
-                <a:solidFill>
-                  <a:srgbClr val="2D58AC"/>
-                </a:solidFill>
-              </a:defRPr>
+              <a:defRPr/>
             </a:lvl1pPr>
             <a:lvl2pPr lvl="1" algn="l">
               <a:spcBef>
@@ -3083,7 +3063,7 @@
       </p:sp>
       <p:sp>
         <p:nvSpPr>
-          <p:cNvPr id="24" name="Google Shape;24;p4"/>
+          <p:cNvPr id="31" name="Google Shape;31;p5"/>
           <p:cNvSpPr txBox="1">
             <a:spLocks noGrp="1"/>
           </p:cNvSpPr>
@@ -3118,11 +3098,7 @@
               </a:spcAft>
               <a:buSzPts val="1400"/>
               <a:buNone/>
-              <a:defRPr>
-                <a:solidFill>
-                  <a:srgbClr val="2D58AC"/>
-                </a:solidFill>
-              </a:defRPr>
+              <a:defRPr/>
             </a:lvl1pPr>
             <a:lvl2pPr lvl="1" algn="l">
               <a:spcBef>
@@ -3220,7 +3196,7 @@
       </p:sp>
       <p:sp>
         <p:nvSpPr>
-          <p:cNvPr id="25" name="Google Shape;25;p4"/>
+          <p:cNvPr id="32" name="Google Shape;32;p5"/>
           <p:cNvSpPr txBox="1">
             <a:spLocks noGrp="1"/>
           </p:cNvSpPr>
@@ -3251,135 +3227,63 @@
                 <a:spcPts val="0"/>
               </a:spcBef>
               <a:buNone/>
-              <a:defRPr sz="900">
-                <a:solidFill>
-                  <a:srgbClr val="2D58AC"/>
-                </a:solidFill>
-                <a:latin typeface="Gill Sans"/>
-                <a:ea typeface="Gill Sans"/>
-                <a:cs typeface="Gill Sans"/>
-                <a:sym typeface="Gill Sans"/>
-              </a:defRPr>
+              <a:defRPr/>
             </a:lvl1pPr>
             <a:lvl2pPr marL="0" lvl="1" indent="0" algn="r">
               <a:spcBef>
                 <a:spcPts val="0"/>
               </a:spcBef>
               <a:buNone/>
-              <a:defRPr sz="900">
-                <a:solidFill>
-                  <a:srgbClr val="2D58AC"/>
-                </a:solidFill>
-                <a:latin typeface="Gill Sans"/>
-                <a:ea typeface="Gill Sans"/>
-                <a:cs typeface="Gill Sans"/>
-                <a:sym typeface="Gill Sans"/>
-              </a:defRPr>
+              <a:defRPr/>
             </a:lvl2pPr>
             <a:lvl3pPr marL="0" lvl="2" indent="0" algn="r">
               <a:spcBef>
                 <a:spcPts val="0"/>
               </a:spcBef>
               <a:buNone/>
-              <a:defRPr sz="900">
-                <a:solidFill>
-                  <a:srgbClr val="2D58AC"/>
-                </a:solidFill>
-                <a:latin typeface="Gill Sans"/>
-                <a:ea typeface="Gill Sans"/>
-                <a:cs typeface="Gill Sans"/>
-                <a:sym typeface="Gill Sans"/>
-              </a:defRPr>
+              <a:defRPr/>
             </a:lvl3pPr>
             <a:lvl4pPr marL="0" lvl="3" indent="0" algn="r">
               <a:spcBef>
                 <a:spcPts val="0"/>
               </a:spcBef>
               <a:buNone/>
-              <a:defRPr sz="900">
-                <a:solidFill>
-                  <a:srgbClr val="2D58AC"/>
-                </a:solidFill>
-                <a:latin typeface="Gill Sans"/>
-                <a:ea typeface="Gill Sans"/>
-                <a:cs typeface="Gill Sans"/>
-                <a:sym typeface="Gill Sans"/>
-              </a:defRPr>
+              <a:defRPr/>
             </a:lvl4pPr>
             <a:lvl5pPr marL="0" lvl="4" indent="0" algn="r">
               <a:spcBef>
                 <a:spcPts val="0"/>
               </a:spcBef>
               <a:buNone/>
-              <a:defRPr sz="900">
-                <a:solidFill>
-                  <a:srgbClr val="2D58AC"/>
-                </a:solidFill>
-                <a:latin typeface="Gill Sans"/>
-                <a:ea typeface="Gill Sans"/>
-                <a:cs typeface="Gill Sans"/>
-                <a:sym typeface="Gill Sans"/>
-              </a:defRPr>
+              <a:defRPr/>
             </a:lvl5pPr>
             <a:lvl6pPr marL="0" lvl="5" indent="0" algn="r">
               <a:spcBef>
                 <a:spcPts val="0"/>
               </a:spcBef>
               <a:buNone/>
-              <a:defRPr sz="900">
-                <a:solidFill>
-                  <a:srgbClr val="2D58AC"/>
-                </a:solidFill>
-                <a:latin typeface="Gill Sans"/>
-                <a:ea typeface="Gill Sans"/>
-                <a:cs typeface="Gill Sans"/>
-                <a:sym typeface="Gill Sans"/>
-              </a:defRPr>
+              <a:defRPr/>
             </a:lvl6pPr>
             <a:lvl7pPr marL="0" lvl="6" indent="0" algn="r">
               <a:spcBef>
                 <a:spcPts val="0"/>
               </a:spcBef>
               <a:buNone/>
-              <a:defRPr sz="900">
-                <a:solidFill>
-                  <a:srgbClr val="2D58AC"/>
-                </a:solidFill>
-                <a:latin typeface="Gill Sans"/>
-                <a:ea typeface="Gill Sans"/>
-                <a:cs typeface="Gill Sans"/>
-                <a:sym typeface="Gill Sans"/>
-              </a:defRPr>
+              <a:defRPr/>
             </a:lvl7pPr>
             <a:lvl8pPr marL="0" lvl="7" indent="0" algn="r">
               <a:spcBef>
                 <a:spcPts val="0"/>
               </a:spcBef>
               <a:buNone/>
-              <a:defRPr sz="900">
-                <a:solidFill>
-                  <a:srgbClr val="2D58AC"/>
-                </a:solidFill>
-                <a:latin typeface="Gill Sans"/>
-                <a:ea typeface="Gill Sans"/>
-                <a:cs typeface="Gill Sans"/>
-                <a:sym typeface="Gill Sans"/>
-              </a:defRPr>
+              <a:defRPr/>
             </a:lvl8pPr>
             <a:lvl9pPr marL="0" lvl="8" indent="0" algn="r">
               <a:spcBef>
                 <a:spcPts val="0"/>
               </a:spcBef>
               <a:buNone/>
-              <a:defRPr sz="900">
-                <a:solidFill>
-                  <a:srgbClr val="2D58AC"/>
-                </a:solidFill>
-                <a:latin typeface="Gill Sans"/>
-                <a:ea typeface="Gill Sans"/>
-                <a:cs typeface="Gill Sans"/>
-                <a:sym typeface="Gill Sans"/>
-              </a:defRPr>
+              <a:defRPr/>
             </a:lvl9pPr>
           </a:lstStyle>
           <a:p>
@@ -3402,12 +3306,12 @@
       </p:sp>
       <p:sp>
         <p:nvSpPr>
-          <p:cNvPr id="26" name="Google Shape;26;p4"/>
+          <p:cNvPr id="33" name="Google Shape;33;p5"/>
           <p:cNvSpPr>
             <a:spLocks noGrp="1"/>
           </p:cNvSpPr>
           <p:nvPr>
-            <p:ph type="pic" idx="2"/>
+            <p:ph type="pic" idx="3"/>
           </p:nvPr>
         </p:nvSpPr>
         <p:spPr>
@@ -3423,49 +3327,17 @@
             <a:noFill/>
           </a:ln>
         </p:spPr>
-        <p:txBody>
-          <a:bodyPr/>
-          <a:lstStyle/>
-          <a:p>
-            <a:endParaRPr lang="en-US"/>
-          </a:p>
-        </p:txBody>
       </p:sp>
-    </p:spTree>
-  </p:cSld>
-  <p:clrMapOvr>
-    <a:masterClrMapping/>
-  </p:clrMapOvr>
-</p:sldLayout>
-</file>
-
-<file path=ppt/slideLayouts/slideLayout10.xml><?xml version="1.0" encoding="utf-8"?>
-<p:sldLayout xmlns:a="http://schemas.openxmlformats.org/drawingml/2006/main" xmlns:r="http://schemas.openxmlformats.org/officeDocument/2006/relationships" xmlns:p="http://schemas.openxmlformats.org/presentationml/2006/main" matchingName="Title and Vertical Text" type="vertTx">
-  <p:cSld name="VERTICAL_TEXT">
-    <p:spTree>
-      <p:nvGrpSpPr>
-        <p:cNvPr id="1" name="Shape 100"/>
-        <p:cNvGrpSpPr/>
-        <p:nvPr/>
-      </p:nvGrpSpPr>
-      <p:grpSpPr>
-        <a:xfrm>
-          <a:off x="0" y="0"/>
-          <a:ext cx="0" cy="0"/>
-          <a:chOff x="0" y="0"/>
-          <a:chExt cx="0" cy="0"/>
-        </a:xfrm>
-      </p:grpSpPr>
       <p:sp>
         <p:nvSpPr>
-          <p:cNvPr id="101" name="Google Shape;101;p15"/>
+          <p:cNvPr id="34" name="Google Shape;34;p5"/>
           <p:cNvSpPr/>
           <p:nvPr/>
         </p:nvSpPr>
         <p:spPr>
           <a:xfrm>
-            <a:off x="440286" y="614407"/>
-            <a:ext cx="11309338" cy="1189298"/>
+            <a:off x="597457" y="599726"/>
+            <a:ext cx="10991499" cy="835785"/>
           </a:xfrm>
           <a:prstGeom prst="rect">
             <a:avLst/>
@@ -3498,7 +3370,7 @@
       </p:sp>
       <p:sp>
         <p:nvSpPr>
-          <p:cNvPr id="102" name="Google Shape;102;p15"/>
+          <p:cNvPr id="35" name="Google Shape;35;p5"/>
           <p:cNvSpPr txBox="1">
             <a:spLocks noGrp="1"/>
           </p:cNvSpPr>
@@ -3508,8 +3380,8 @@
         </p:nvSpPr>
         <p:spPr>
           <a:xfrm>
-            <a:off x="581192" y="702156"/>
-            <a:ext cx="11029616" cy="1013800"/>
+            <a:off x="774923" y="687475"/>
+            <a:ext cx="10106109" cy="630049"/>
           </a:xfrm>
           <a:prstGeom prst="rect">
             <a:avLst/>
@@ -3534,9 +3406,15 @@
               <a:buClr>
                 <a:schemeClr val="lt1"/>
               </a:buClr>
-              <a:buSzPts val="1800"/>
-              <a:buNone/>
-              <a:defRPr/>
+              <a:buSzPts val="2800"/>
+              <a:buFont typeface="Arial"/>
+              <a:buNone/>
+              <a:defRPr>
+                <a:latin typeface="Arial"/>
+                <a:ea typeface="Arial"/>
+                <a:cs typeface="Arial"/>
+                <a:sym typeface="Arial"/>
+              </a:defRPr>
             </a:lvl1pPr>
             <a:lvl2pPr lvl="1" algn="l">
               <a:spcBef>
@@ -3628,515 +3506,6 @@
             </a:lvl9pPr>
           </a:lstStyle>
           <a:p>
-            <a:endParaRPr/>
-          </a:p>
-        </p:txBody>
-      </p:sp>
-      <p:sp>
-        <p:nvSpPr>
-          <p:cNvPr id="103" name="Google Shape;103;p15"/>
-          <p:cNvSpPr txBox="1">
-            <a:spLocks noGrp="1"/>
-          </p:cNvSpPr>
-          <p:nvPr>
-            <p:ph type="body" idx="1"/>
-          </p:nvPr>
-        </p:nvSpPr>
-        <p:spPr>
-          <a:xfrm rot="5400000">
-            <a:off x="4334603" y="-1417408"/>
-            <a:ext cx="3522794" cy="11029616"/>
-          </a:xfrm>
-          <a:prstGeom prst="rect">
-            <a:avLst/>
-          </a:prstGeom>
-          <a:noFill/>
-          <a:ln>
-            <a:noFill/>
-          </a:ln>
-        </p:spPr>
-        <p:txBody>
-          <a:bodyPr spcFirstLastPara="1" wrap="square" lIns="91425" tIns="45700" rIns="91425" bIns="45700" anchor="t" anchorCtr="0">
-            <a:normAutofit/>
-          </a:bodyPr>
-          <a:lstStyle>
-            <a:lvl1pPr marL="457200" lvl="0" indent="-333756" algn="l">
-              <a:spcBef>
-                <a:spcPts val="360"/>
-              </a:spcBef>
-              <a:spcAft>
-                <a:spcPts val="0"/>
-              </a:spcAft>
-              <a:buSzPts val="1656"/>
-              <a:buChar char="◼"/>
-              <a:defRPr/>
-            </a:lvl1pPr>
-            <a:lvl2pPr marL="914400" lvl="1" indent="-322072" algn="l">
-              <a:spcBef>
-                <a:spcPts val="600"/>
-              </a:spcBef>
-              <a:spcAft>
-                <a:spcPts val="0"/>
-              </a:spcAft>
-              <a:buSzPts val="1472"/>
-              <a:buChar char="◼"/>
-              <a:defRPr/>
-            </a:lvl2pPr>
-            <a:lvl3pPr marL="1371600" lvl="2" indent="-310388" algn="l">
-              <a:spcBef>
-                <a:spcPts val="600"/>
-              </a:spcBef>
-              <a:spcAft>
-                <a:spcPts val="0"/>
-              </a:spcAft>
-              <a:buSzPts val="1288"/>
-              <a:buChar char="◼"/>
-              <a:defRPr/>
-            </a:lvl3pPr>
-            <a:lvl4pPr marL="1828800" lvl="3" indent="-298704" algn="l">
-              <a:spcBef>
-                <a:spcPts val="600"/>
-              </a:spcBef>
-              <a:spcAft>
-                <a:spcPts val="0"/>
-              </a:spcAft>
-              <a:buSzPts val="1104"/>
-              <a:buChar char="◼"/>
-              <a:defRPr/>
-            </a:lvl4pPr>
-            <a:lvl5pPr marL="2286000" lvl="4" indent="-298704" algn="l">
-              <a:spcBef>
-                <a:spcPts val="600"/>
-              </a:spcBef>
-              <a:spcAft>
-                <a:spcPts val="0"/>
-              </a:spcAft>
-              <a:buSzPts val="1104"/>
-              <a:buChar char="◼"/>
-              <a:defRPr/>
-            </a:lvl5pPr>
-            <a:lvl6pPr marL="2743200" lvl="5" indent="-333756" algn="l">
-              <a:spcBef>
-                <a:spcPts val="600"/>
-              </a:spcBef>
-              <a:spcAft>
-                <a:spcPts val="0"/>
-              </a:spcAft>
-              <a:buSzPts val="1656"/>
-              <a:buChar char="◼"/>
-              <a:defRPr/>
-            </a:lvl6pPr>
-            <a:lvl7pPr marL="3200400" lvl="6" indent="-333756" algn="l">
-              <a:spcBef>
-                <a:spcPts val="600"/>
-              </a:spcBef>
-              <a:spcAft>
-                <a:spcPts val="0"/>
-              </a:spcAft>
-              <a:buSzPts val="1656"/>
-              <a:buChar char="◼"/>
-              <a:defRPr/>
-            </a:lvl7pPr>
-            <a:lvl8pPr marL="3657600" lvl="7" indent="-333756" algn="l">
-              <a:spcBef>
-                <a:spcPts val="600"/>
-              </a:spcBef>
-              <a:spcAft>
-                <a:spcPts val="0"/>
-              </a:spcAft>
-              <a:buSzPts val="1656"/>
-              <a:buChar char="◼"/>
-              <a:defRPr/>
-            </a:lvl8pPr>
-            <a:lvl9pPr marL="4114800" lvl="8" indent="-333756" algn="l">
-              <a:spcBef>
-                <a:spcPts val="600"/>
-              </a:spcBef>
-              <a:spcAft>
-                <a:spcPts val="600"/>
-              </a:spcAft>
-              <a:buSzPts val="1656"/>
-              <a:buChar char="◼"/>
-              <a:defRPr/>
-            </a:lvl9pPr>
-          </a:lstStyle>
-          <a:p>
-            <a:endParaRPr/>
-          </a:p>
-        </p:txBody>
-      </p:sp>
-      <p:sp>
-        <p:nvSpPr>
-          <p:cNvPr id="104" name="Google Shape;104;p15"/>
-          <p:cNvSpPr txBox="1">
-            <a:spLocks noGrp="1"/>
-          </p:cNvSpPr>
-          <p:nvPr>
-            <p:ph type="dt" idx="10"/>
-          </p:nvPr>
-        </p:nvSpPr>
-        <p:spPr>
-          <a:xfrm>
-            <a:off x="7605951" y="5956137"/>
-            <a:ext cx="2844799" cy="365125"/>
-          </a:xfrm>
-          <a:prstGeom prst="rect">
-            <a:avLst/>
-          </a:prstGeom>
-          <a:noFill/>
-          <a:ln>
-            <a:noFill/>
-          </a:ln>
-        </p:spPr>
-        <p:txBody>
-          <a:bodyPr spcFirstLastPara="1" wrap="square" lIns="91425" tIns="45700" rIns="91425" bIns="45700" anchor="ctr" anchorCtr="0">
-            <a:noAutofit/>
-          </a:bodyPr>
-          <a:lstStyle>
-            <a:lvl1pPr lvl="0" algn="r">
-              <a:spcBef>
-                <a:spcPts val="0"/>
-              </a:spcBef>
-              <a:spcAft>
-                <a:spcPts val="0"/>
-              </a:spcAft>
-              <a:buSzPts val="1400"/>
-              <a:buNone/>
-              <a:defRPr/>
-            </a:lvl1pPr>
-            <a:lvl2pPr lvl="1" algn="l">
-              <a:spcBef>
-                <a:spcPts val="0"/>
-              </a:spcBef>
-              <a:spcAft>
-                <a:spcPts val="0"/>
-              </a:spcAft>
-              <a:buSzPts val="1400"/>
-              <a:buNone/>
-              <a:defRPr/>
-            </a:lvl2pPr>
-            <a:lvl3pPr lvl="2" algn="l">
-              <a:spcBef>
-                <a:spcPts val="0"/>
-              </a:spcBef>
-              <a:spcAft>
-                <a:spcPts val="0"/>
-              </a:spcAft>
-              <a:buSzPts val="1400"/>
-              <a:buNone/>
-              <a:defRPr/>
-            </a:lvl3pPr>
-            <a:lvl4pPr lvl="3" algn="l">
-              <a:spcBef>
-                <a:spcPts val="0"/>
-              </a:spcBef>
-              <a:spcAft>
-                <a:spcPts val="0"/>
-              </a:spcAft>
-              <a:buSzPts val="1400"/>
-              <a:buNone/>
-              <a:defRPr/>
-            </a:lvl4pPr>
-            <a:lvl5pPr lvl="4" algn="l">
-              <a:spcBef>
-                <a:spcPts val="0"/>
-              </a:spcBef>
-              <a:spcAft>
-                <a:spcPts val="0"/>
-              </a:spcAft>
-              <a:buSzPts val="1400"/>
-              <a:buNone/>
-              <a:defRPr/>
-            </a:lvl5pPr>
-            <a:lvl6pPr lvl="5" algn="l">
-              <a:spcBef>
-                <a:spcPts val="0"/>
-              </a:spcBef>
-              <a:spcAft>
-                <a:spcPts val="0"/>
-              </a:spcAft>
-              <a:buSzPts val="1400"/>
-              <a:buNone/>
-              <a:defRPr/>
-            </a:lvl6pPr>
-            <a:lvl7pPr lvl="6" algn="l">
-              <a:spcBef>
-                <a:spcPts val="0"/>
-              </a:spcBef>
-              <a:spcAft>
-                <a:spcPts val="0"/>
-              </a:spcAft>
-              <a:buSzPts val="1400"/>
-              <a:buNone/>
-              <a:defRPr/>
-            </a:lvl7pPr>
-            <a:lvl8pPr lvl="7" algn="l">
-              <a:spcBef>
-                <a:spcPts val="0"/>
-              </a:spcBef>
-              <a:spcAft>
-                <a:spcPts val="0"/>
-              </a:spcAft>
-              <a:buSzPts val="1400"/>
-              <a:buNone/>
-              <a:defRPr/>
-            </a:lvl8pPr>
-            <a:lvl9pPr lvl="8" algn="l">
-              <a:spcBef>
-                <a:spcPts val="0"/>
-              </a:spcBef>
-              <a:spcAft>
-                <a:spcPts val="0"/>
-              </a:spcAft>
-              <a:buSzPts val="1400"/>
-              <a:buNone/>
-              <a:defRPr/>
-            </a:lvl9pPr>
-          </a:lstStyle>
-          <a:p>
-            <a:endParaRPr/>
-          </a:p>
-        </p:txBody>
-      </p:sp>
-      <p:sp>
-        <p:nvSpPr>
-          <p:cNvPr id="105" name="Google Shape;105;p15"/>
-          <p:cNvSpPr txBox="1">
-            <a:spLocks noGrp="1"/>
-          </p:cNvSpPr>
-          <p:nvPr>
-            <p:ph type="ftr" idx="11"/>
-          </p:nvPr>
-        </p:nvSpPr>
-        <p:spPr>
-          <a:xfrm>
-            <a:off x="581192" y="5951811"/>
-            <a:ext cx="6917210" cy="365125"/>
-          </a:xfrm>
-          <a:prstGeom prst="rect">
-            <a:avLst/>
-          </a:prstGeom>
-          <a:noFill/>
-          <a:ln>
-            <a:noFill/>
-          </a:ln>
-        </p:spPr>
-        <p:txBody>
-          <a:bodyPr spcFirstLastPara="1" wrap="square" lIns="91425" tIns="45700" rIns="91425" bIns="45700" anchor="ctr" anchorCtr="0">
-            <a:noAutofit/>
-          </a:bodyPr>
-          <a:lstStyle>
-            <a:lvl1pPr lvl="0" algn="l">
-              <a:spcBef>
-                <a:spcPts val="0"/>
-              </a:spcBef>
-              <a:spcAft>
-                <a:spcPts val="0"/>
-              </a:spcAft>
-              <a:buSzPts val="1400"/>
-              <a:buNone/>
-              <a:defRPr/>
-            </a:lvl1pPr>
-            <a:lvl2pPr lvl="1" algn="l">
-              <a:spcBef>
-                <a:spcPts val="0"/>
-              </a:spcBef>
-              <a:spcAft>
-                <a:spcPts val="0"/>
-              </a:spcAft>
-              <a:buSzPts val="1400"/>
-              <a:buNone/>
-              <a:defRPr/>
-            </a:lvl2pPr>
-            <a:lvl3pPr lvl="2" algn="l">
-              <a:spcBef>
-                <a:spcPts val="0"/>
-              </a:spcBef>
-              <a:spcAft>
-                <a:spcPts val="0"/>
-              </a:spcAft>
-              <a:buSzPts val="1400"/>
-              <a:buNone/>
-              <a:defRPr/>
-            </a:lvl3pPr>
-            <a:lvl4pPr lvl="3" algn="l">
-              <a:spcBef>
-                <a:spcPts val="0"/>
-              </a:spcBef>
-              <a:spcAft>
-                <a:spcPts val="0"/>
-              </a:spcAft>
-              <a:buSzPts val="1400"/>
-              <a:buNone/>
-              <a:defRPr/>
-            </a:lvl4pPr>
-            <a:lvl5pPr lvl="4" algn="l">
-              <a:spcBef>
-                <a:spcPts val="0"/>
-              </a:spcBef>
-              <a:spcAft>
-                <a:spcPts val="0"/>
-              </a:spcAft>
-              <a:buSzPts val="1400"/>
-              <a:buNone/>
-              <a:defRPr/>
-            </a:lvl5pPr>
-            <a:lvl6pPr lvl="5" algn="l">
-              <a:spcBef>
-                <a:spcPts val="0"/>
-              </a:spcBef>
-              <a:spcAft>
-                <a:spcPts val="0"/>
-              </a:spcAft>
-              <a:buSzPts val="1400"/>
-              <a:buNone/>
-              <a:defRPr/>
-            </a:lvl6pPr>
-            <a:lvl7pPr lvl="6" algn="l">
-              <a:spcBef>
-                <a:spcPts val="0"/>
-              </a:spcBef>
-              <a:spcAft>
-                <a:spcPts val="0"/>
-              </a:spcAft>
-              <a:buSzPts val="1400"/>
-              <a:buNone/>
-              <a:defRPr/>
-            </a:lvl7pPr>
-            <a:lvl8pPr lvl="7" algn="l">
-              <a:spcBef>
-                <a:spcPts val="0"/>
-              </a:spcBef>
-              <a:spcAft>
-                <a:spcPts val="0"/>
-              </a:spcAft>
-              <a:buSzPts val="1400"/>
-              <a:buNone/>
-              <a:defRPr/>
-            </a:lvl8pPr>
-            <a:lvl9pPr lvl="8" algn="l">
-              <a:spcBef>
-                <a:spcPts val="0"/>
-              </a:spcBef>
-              <a:spcAft>
-                <a:spcPts val="0"/>
-              </a:spcAft>
-              <a:buSzPts val="1400"/>
-              <a:buNone/>
-              <a:defRPr/>
-            </a:lvl9pPr>
-          </a:lstStyle>
-          <a:p>
-            <a:endParaRPr/>
-          </a:p>
-        </p:txBody>
-      </p:sp>
-      <p:sp>
-        <p:nvSpPr>
-          <p:cNvPr id="106" name="Google Shape;106;p15"/>
-          <p:cNvSpPr txBox="1">
-            <a:spLocks noGrp="1"/>
-          </p:cNvSpPr>
-          <p:nvPr>
-            <p:ph type="sldNum" idx="12"/>
-          </p:nvPr>
-        </p:nvSpPr>
-        <p:spPr>
-          <a:xfrm>
-            <a:off x="10558300" y="5956137"/>
-            <a:ext cx="1052510" cy="365125"/>
-          </a:xfrm>
-          <a:prstGeom prst="rect">
-            <a:avLst/>
-          </a:prstGeom>
-          <a:noFill/>
-          <a:ln>
-            <a:noFill/>
-          </a:ln>
-        </p:spPr>
-        <p:txBody>
-          <a:bodyPr spcFirstLastPara="1" wrap="square" lIns="91425" tIns="45700" rIns="91425" bIns="45700" anchor="ctr" anchorCtr="0">
-            <a:noAutofit/>
-          </a:bodyPr>
-          <a:lstStyle>
-            <a:lvl1pPr marL="0" lvl="0" indent="0" algn="r">
-              <a:spcBef>
-                <a:spcPts val="0"/>
-              </a:spcBef>
-              <a:buNone/>
-              <a:defRPr/>
-            </a:lvl1pPr>
-            <a:lvl2pPr marL="0" lvl="1" indent="0" algn="r">
-              <a:spcBef>
-                <a:spcPts val="0"/>
-              </a:spcBef>
-              <a:buNone/>
-              <a:defRPr/>
-            </a:lvl2pPr>
-            <a:lvl3pPr marL="0" lvl="2" indent="0" algn="r">
-              <a:spcBef>
-                <a:spcPts val="0"/>
-              </a:spcBef>
-              <a:buNone/>
-              <a:defRPr/>
-            </a:lvl3pPr>
-            <a:lvl4pPr marL="0" lvl="3" indent="0" algn="r">
-              <a:spcBef>
-                <a:spcPts val="0"/>
-              </a:spcBef>
-              <a:buNone/>
-              <a:defRPr/>
-            </a:lvl4pPr>
-            <a:lvl5pPr marL="0" lvl="4" indent="0" algn="r">
-              <a:spcBef>
-                <a:spcPts val="0"/>
-              </a:spcBef>
-              <a:buNone/>
-              <a:defRPr/>
-            </a:lvl5pPr>
-            <a:lvl6pPr marL="0" lvl="5" indent="0" algn="r">
-              <a:spcBef>
-                <a:spcPts val="0"/>
-              </a:spcBef>
-              <a:buNone/>
-              <a:defRPr/>
-            </a:lvl6pPr>
-            <a:lvl7pPr marL="0" lvl="6" indent="0" algn="r">
-              <a:spcBef>
-                <a:spcPts val="0"/>
-              </a:spcBef>
-              <a:buNone/>
-              <a:defRPr/>
-            </a:lvl7pPr>
-            <a:lvl8pPr marL="0" lvl="7" indent="0" algn="r">
-              <a:spcBef>
-                <a:spcPts val="0"/>
-              </a:spcBef>
-              <a:buNone/>
-              <a:defRPr/>
-            </a:lvl8pPr>
-            <a:lvl9pPr marL="0" lvl="8" indent="0" algn="r">
-              <a:spcBef>
-                <a:spcPts val="0"/>
-              </a:spcBef>
-              <a:buNone/>
-              <a:defRPr/>
-            </a:lvl9pPr>
-          </a:lstStyle>
-          <a:p>
-            <a:pPr marL="0" lvl="0" indent="0" algn="r" rtl="0">
-              <a:spcBef>
-                <a:spcPts val="0"/>
-              </a:spcBef>
-              <a:spcAft>
-                <a:spcPts val="0"/>
-              </a:spcAft>
-              <a:buNone/>
-            </a:pPr>
-            <a:fld id="{00000000-1234-1234-1234-123412341234}" type="slidenum">
-              <a:rPr lang="en-US"/>
-              <a:t>‹#›</a:t>
-            </a:fld>
             <a:endParaRPr/>
           </a:p>
         </p:txBody>
@@ -4149,7 +3518,7 @@
 </p:sldLayout>
 </file>
 
-<file path=ppt/slideLayouts/slideLayout11.xml><?xml version="1.0" encoding="utf-8"?>
+<file path=ppt/slideLayouts/slideLayout10.xml><?xml version="1.0" encoding="utf-8"?>
 <p:sldLayout xmlns:a="http://schemas.openxmlformats.org/drawingml/2006/main" xmlns:r="http://schemas.openxmlformats.org/officeDocument/2006/relationships" xmlns:p="http://schemas.openxmlformats.org/presentationml/2006/main" matchingName="Vertical Title and Text" type="vertTitleAndTx">
   <p:cSld name="VERTICAL_TITLE_AND_VERTICAL_TEXT">
     <p:spTree>
@@ -4935,7 +4304,7 @@
 </p:sldLayout>
 </file>
 
-<file path=ppt/slideLayouts/slideLayout12.xml><?xml version="1.0" encoding="utf-8"?>
+<file path=ppt/slideLayouts/slideLayout11.xml><?xml version="1.0" encoding="utf-8"?>
 <p:sldLayout xmlns:a="http://schemas.openxmlformats.org/drawingml/2006/main" xmlns:r="http://schemas.openxmlformats.org/officeDocument/2006/relationships" xmlns:p="http://schemas.openxmlformats.org/presentationml/2006/main" matchingName="1_Section Header">
   <p:cSld name="1_Section Header">
     <p:spTree>
@@ -5794,7 +5163,7 @@
 </p:sldLayout>
 </file>
 
-<file path=ppt/slideLayouts/slideLayout13.xml><?xml version="1.0" encoding="utf-8"?>
+<file path=ppt/slideLayouts/slideLayout12.xml><?xml version="1.0" encoding="utf-8"?>
 <p:sldLayout xmlns:a="http://schemas.openxmlformats.org/drawingml/2006/main" xmlns:r="http://schemas.openxmlformats.org/officeDocument/2006/relationships" xmlns:p="http://schemas.openxmlformats.org/presentationml/2006/main" matchingName="1_Title Only">
   <p:cSld name="1_Title Only">
     <p:spTree>
@@ -6401,7 +5770,7 @@
 </p:sldLayout>
 </file>
 
-<file path=ppt/slideLayouts/slideLayout14.xml><?xml version="1.0" encoding="utf-8"?>
+<file path=ppt/slideLayouts/slideLayout13.xml><?xml version="1.0" encoding="utf-8"?>
 <p:sldLayout xmlns:a="http://schemas.openxmlformats.org/drawingml/2006/main" xmlns:r="http://schemas.openxmlformats.org/officeDocument/2006/relationships" xmlns:p="http://schemas.openxmlformats.org/presentationml/2006/main" matchingName="1_Content with Caption">
   <p:cSld name="1_Content with Caption">
     <p:spTree>
@@ -7397,7 +6766,7 @@
 </p:sldLayout>
 </file>
 
-<file path=ppt/slideLayouts/slideLayout15.xml><?xml version="1.0" encoding="utf-8"?>
+<file path=ppt/slideLayouts/slideLayout14.xml><?xml version="1.0" encoding="utf-8"?>
 <p:sldLayout xmlns:a="http://schemas.openxmlformats.org/drawingml/2006/main" xmlns:r="http://schemas.openxmlformats.org/officeDocument/2006/relationships" xmlns:p="http://schemas.openxmlformats.org/presentationml/2006/main" matchingName="1_Picture with Caption">
   <p:cSld name="1_Picture with Caption">
     <p:spTree>
@@ -8124,7 +7493,7 @@
 </p:sldLayout>
 </file>
 
-<file path=ppt/slideLayouts/slideLayout16.xml><?xml version="1.0" encoding="utf-8"?>
+<file path=ppt/slideLayouts/slideLayout15.xml><?xml version="1.0" encoding="utf-8"?>
 <p:sldLayout xmlns:a="http://schemas.openxmlformats.org/drawingml/2006/main" xmlns:r="http://schemas.openxmlformats.org/officeDocument/2006/relationships" xmlns:p="http://schemas.openxmlformats.org/presentationml/2006/main" matchingName="1_Title and Vertical Text">
   <p:cSld name="1_Title and Vertical Text">
     <p:spTree>
@@ -8864,7 +8233,7 @@
 </p:sldLayout>
 </file>
 
-<file path=ppt/slideLayouts/slideLayout17.xml><?xml version="1.0" encoding="utf-8"?>
+<file path=ppt/slideLayouts/slideLayout16.xml><?xml version="1.0" encoding="utf-8"?>
 <p:sldLayout xmlns:a="http://schemas.openxmlformats.org/drawingml/2006/main" xmlns:r="http://schemas.openxmlformats.org/officeDocument/2006/relationships" xmlns:p="http://schemas.openxmlformats.org/presentationml/2006/main" matchingName="1_Vertical Title and Text">
   <p:cSld name="1_Vertical Title and Text">
     <p:spTree>
@@ -9680,7 +9049,7 @@
 </p:sldLayout>
 </file>
 
-<file path=ppt/slideLayouts/slideLayout18.xml><?xml version="1.0" encoding="utf-8"?>
+<file path=ppt/slideLayouts/slideLayout17.xml><?xml version="1.0" encoding="utf-8"?>
 <p:sldLayout xmlns:a="http://schemas.openxmlformats.org/drawingml/2006/main" xmlns:r="http://schemas.openxmlformats.org/officeDocument/2006/relationships" xmlns:p="http://schemas.openxmlformats.org/presentationml/2006/main" matchingName="2_Section Header">
   <p:cSld name="2_Section Header">
     <p:spTree>
@@ -10563,7 +9932,7 @@
 </p:sldLayout>
 </file>
 
-<file path=ppt/slideLayouts/slideLayout19.xml><?xml version="1.0" encoding="utf-8"?>
+<file path=ppt/slideLayouts/slideLayout18.xml><?xml version="1.0" encoding="utf-8"?>
 <p:sldLayout xmlns:a="http://schemas.openxmlformats.org/drawingml/2006/main" xmlns:r="http://schemas.openxmlformats.org/officeDocument/2006/relationships" xmlns:p="http://schemas.openxmlformats.org/presentationml/2006/main" matchingName="2_Title Only">
   <p:cSld name="2_Title Only">
     <p:spTree>
@@ -11194,880 +10563,7 @@
 </p:sldLayout>
 </file>
 
-<file path=ppt/slideLayouts/slideLayout2.xml><?xml version="1.0" encoding="utf-8"?>
-<p:sldLayout xmlns:a="http://schemas.openxmlformats.org/drawingml/2006/main" xmlns:r="http://schemas.openxmlformats.org/officeDocument/2006/relationships" xmlns:p="http://schemas.openxmlformats.org/presentationml/2006/main" matchingName="1_Two Content">
-  <p:cSld name="1_Two Content">
-    <p:spTree>
-      <p:nvGrpSpPr>
-        <p:cNvPr id="1" name="Shape 27"/>
-        <p:cNvGrpSpPr/>
-        <p:nvPr/>
-      </p:nvGrpSpPr>
-      <p:grpSpPr>
-        <a:xfrm>
-          <a:off x="0" y="0"/>
-          <a:ext cx="0" cy="0"/>
-          <a:chOff x="0" y="0"/>
-          <a:chExt cx="0" cy="0"/>
-        </a:xfrm>
-      </p:grpSpPr>
-      <p:sp>
-        <p:nvSpPr>
-          <p:cNvPr id="28" name="Google Shape;28;p5"/>
-          <p:cNvSpPr txBox="1">
-            <a:spLocks noGrp="1"/>
-          </p:cNvSpPr>
-          <p:nvPr>
-            <p:ph type="body" idx="1"/>
-          </p:nvPr>
-        </p:nvSpPr>
-        <p:spPr>
-          <a:xfrm>
-            <a:off x="774924" y="1523260"/>
-            <a:ext cx="5199369" cy="4337790"/>
-          </a:xfrm>
-          <a:prstGeom prst="rect">
-            <a:avLst/>
-          </a:prstGeom>
-          <a:noFill/>
-          <a:ln>
-            <a:noFill/>
-          </a:ln>
-        </p:spPr>
-        <p:txBody>
-          <a:bodyPr spcFirstLastPara="1" wrap="square" lIns="91425" tIns="45700" rIns="91425" bIns="45700" anchor="ctr" anchorCtr="0">
-            <a:normAutofit/>
-          </a:bodyPr>
-          <a:lstStyle>
-            <a:lvl1pPr marL="457200" lvl="0" indent="-228600" algn="l">
-              <a:spcBef>
-                <a:spcPts val="360"/>
-              </a:spcBef>
-              <a:spcAft>
-                <a:spcPts val="0"/>
-              </a:spcAft>
-              <a:buSzPts val="1656"/>
-              <a:buNone/>
-              <a:defRPr/>
-            </a:lvl1pPr>
-            <a:lvl2pPr marL="914400" lvl="1" indent="-333756" algn="l">
-              <a:spcBef>
-                <a:spcPts val="600"/>
-              </a:spcBef>
-              <a:spcAft>
-                <a:spcPts val="0"/>
-              </a:spcAft>
-              <a:buSzPts val="1656"/>
-              <a:buChar char="◼"/>
-              <a:defRPr/>
-            </a:lvl2pPr>
-            <a:lvl3pPr marL="1371600" lvl="2" indent="-333756" algn="l">
-              <a:spcBef>
-                <a:spcPts val="600"/>
-              </a:spcBef>
-              <a:spcAft>
-                <a:spcPts val="0"/>
-              </a:spcAft>
-              <a:buSzPts val="1656"/>
-              <a:buChar char="◼"/>
-              <a:defRPr/>
-            </a:lvl3pPr>
-            <a:lvl4pPr marL="1828800" lvl="3" indent="-333756" algn="l">
-              <a:spcBef>
-                <a:spcPts val="600"/>
-              </a:spcBef>
-              <a:spcAft>
-                <a:spcPts val="0"/>
-              </a:spcAft>
-              <a:buSzPts val="1656"/>
-              <a:buChar char="◼"/>
-              <a:defRPr/>
-            </a:lvl4pPr>
-            <a:lvl5pPr marL="2286000" lvl="4" indent="-333756" algn="l">
-              <a:spcBef>
-                <a:spcPts val="600"/>
-              </a:spcBef>
-              <a:spcAft>
-                <a:spcPts val="0"/>
-              </a:spcAft>
-              <a:buSzPts val="1656"/>
-              <a:buChar char="◼"/>
-              <a:defRPr/>
-            </a:lvl5pPr>
-            <a:lvl6pPr marL="2743200" lvl="5" indent="-333756" algn="l">
-              <a:spcBef>
-                <a:spcPts val="600"/>
-              </a:spcBef>
-              <a:spcAft>
-                <a:spcPts val="0"/>
-              </a:spcAft>
-              <a:buSzPts val="1656"/>
-              <a:buChar char="◼"/>
-              <a:defRPr/>
-            </a:lvl6pPr>
-            <a:lvl7pPr marL="3200400" lvl="6" indent="-333756" algn="l">
-              <a:spcBef>
-                <a:spcPts val="600"/>
-              </a:spcBef>
-              <a:spcAft>
-                <a:spcPts val="0"/>
-              </a:spcAft>
-              <a:buSzPts val="1656"/>
-              <a:buChar char="◼"/>
-              <a:defRPr/>
-            </a:lvl7pPr>
-            <a:lvl8pPr marL="3657600" lvl="7" indent="-333756" algn="l">
-              <a:spcBef>
-                <a:spcPts val="600"/>
-              </a:spcBef>
-              <a:spcAft>
-                <a:spcPts val="0"/>
-              </a:spcAft>
-              <a:buSzPts val="1656"/>
-              <a:buChar char="◼"/>
-              <a:defRPr/>
-            </a:lvl8pPr>
-            <a:lvl9pPr marL="4114800" lvl="8" indent="-333756" algn="l">
-              <a:spcBef>
-                <a:spcPts val="600"/>
-              </a:spcBef>
-              <a:spcAft>
-                <a:spcPts val="600"/>
-              </a:spcAft>
-              <a:buSzPts val="1656"/>
-              <a:buChar char="◼"/>
-              <a:defRPr/>
-            </a:lvl9pPr>
-          </a:lstStyle>
-          <a:p>
-            <a:endParaRPr/>
-          </a:p>
-        </p:txBody>
-      </p:sp>
-      <p:sp>
-        <p:nvSpPr>
-          <p:cNvPr id="29" name="Google Shape;29;p5"/>
-          <p:cNvSpPr txBox="1">
-            <a:spLocks noGrp="1"/>
-          </p:cNvSpPr>
-          <p:nvPr>
-            <p:ph type="body" idx="2"/>
-          </p:nvPr>
-        </p:nvSpPr>
-        <p:spPr>
-          <a:xfrm>
-            <a:off x="6217709" y="1523260"/>
-            <a:ext cx="5210216" cy="4337791"/>
-          </a:xfrm>
-          <a:prstGeom prst="rect">
-            <a:avLst/>
-          </a:prstGeom>
-          <a:noFill/>
-          <a:ln>
-            <a:noFill/>
-          </a:ln>
-        </p:spPr>
-        <p:txBody>
-          <a:bodyPr spcFirstLastPara="1" wrap="square" lIns="91425" tIns="45700" rIns="91425" bIns="45700" anchor="ctr" anchorCtr="0">
-            <a:normAutofit/>
-          </a:bodyPr>
-          <a:lstStyle>
-            <a:lvl1pPr marL="457200" lvl="0" indent="-228600" algn="l">
-              <a:spcBef>
-                <a:spcPts val="360"/>
-              </a:spcBef>
-              <a:spcAft>
-                <a:spcPts val="0"/>
-              </a:spcAft>
-              <a:buSzPts val="1656"/>
-              <a:buNone/>
-              <a:defRPr/>
-            </a:lvl1pPr>
-            <a:lvl2pPr marL="914400" lvl="1" indent="-333756" algn="l">
-              <a:spcBef>
-                <a:spcPts val="600"/>
-              </a:spcBef>
-              <a:spcAft>
-                <a:spcPts val="0"/>
-              </a:spcAft>
-              <a:buSzPts val="1656"/>
-              <a:buChar char="◼"/>
-              <a:defRPr/>
-            </a:lvl2pPr>
-            <a:lvl3pPr marL="1371600" lvl="2" indent="-333756" algn="l">
-              <a:spcBef>
-                <a:spcPts val="600"/>
-              </a:spcBef>
-              <a:spcAft>
-                <a:spcPts val="0"/>
-              </a:spcAft>
-              <a:buSzPts val="1656"/>
-              <a:buChar char="◼"/>
-              <a:defRPr/>
-            </a:lvl3pPr>
-            <a:lvl4pPr marL="1828800" lvl="3" indent="-333756" algn="l">
-              <a:spcBef>
-                <a:spcPts val="600"/>
-              </a:spcBef>
-              <a:spcAft>
-                <a:spcPts val="0"/>
-              </a:spcAft>
-              <a:buSzPts val="1656"/>
-              <a:buChar char="◼"/>
-              <a:defRPr/>
-            </a:lvl4pPr>
-            <a:lvl5pPr marL="2286000" lvl="4" indent="-333756" algn="l">
-              <a:spcBef>
-                <a:spcPts val="600"/>
-              </a:spcBef>
-              <a:spcAft>
-                <a:spcPts val="0"/>
-              </a:spcAft>
-              <a:buSzPts val="1656"/>
-              <a:buChar char="◼"/>
-              <a:defRPr/>
-            </a:lvl5pPr>
-            <a:lvl6pPr marL="2743200" lvl="5" indent="-333756" algn="l">
-              <a:spcBef>
-                <a:spcPts val="600"/>
-              </a:spcBef>
-              <a:spcAft>
-                <a:spcPts val="0"/>
-              </a:spcAft>
-              <a:buSzPts val="1656"/>
-              <a:buChar char="◼"/>
-              <a:defRPr/>
-            </a:lvl6pPr>
-            <a:lvl7pPr marL="3200400" lvl="6" indent="-333756" algn="l">
-              <a:spcBef>
-                <a:spcPts val="600"/>
-              </a:spcBef>
-              <a:spcAft>
-                <a:spcPts val="0"/>
-              </a:spcAft>
-              <a:buSzPts val="1656"/>
-              <a:buChar char="◼"/>
-              <a:defRPr/>
-            </a:lvl7pPr>
-            <a:lvl8pPr marL="3657600" lvl="7" indent="-333756" algn="l">
-              <a:spcBef>
-                <a:spcPts val="600"/>
-              </a:spcBef>
-              <a:spcAft>
-                <a:spcPts val="0"/>
-              </a:spcAft>
-              <a:buSzPts val="1656"/>
-              <a:buChar char="◼"/>
-              <a:defRPr/>
-            </a:lvl8pPr>
-            <a:lvl9pPr marL="4114800" lvl="8" indent="-333756" algn="l">
-              <a:spcBef>
-                <a:spcPts val="600"/>
-              </a:spcBef>
-              <a:spcAft>
-                <a:spcPts val="600"/>
-              </a:spcAft>
-              <a:buSzPts val="1656"/>
-              <a:buChar char="◼"/>
-              <a:defRPr/>
-            </a:lvl9pPr>
-          </a:lstStyle>
-          <a:p>
-            <a:endParaRPr/>
-          </a:p>
-        </p:txBody>
-      </p:sp>
-      <p:sp>
-        <p:nvSpPr>
-          <p:cNvPr id="30" name="Google Shape;30;p5"/>
-          <p:cNvSpPr txBox="1">
-            <a:spLocks noGrp="1"/>
-          </p:cNvSpPr>
-          <p:nvPr>
-            <p:ph type="dt" idx="10"/>
-          </p:nvPr>
-        </p:nvSpPr>
-        <p:spPr>
-          <a:xfrm>
-            <a:off x="7605951" y="5956137"/>
-            <a:ext cx="2844799" cy="365125"/>
-          </a:xfrm>
-          <a:prstGeom prst="rect">
-            <a:avLst/>
-          </a:prstGeom>
-          <a:noFill/>
-          <a:ln>
-            <a:noFill/>
-          </a:ln>
-        </p:spPr>
-        <p:txBody>
-          <a:bodyPr spcFirstLastPara="1" wrap="square" lIns="91425" tIns="45700" rIns="91425" bIns="45700" anchor="ctr" anchorCtr="0">
-            <a:noAutofit/>
-          </a:bodyPr>
-          <a:lstStyle>
-            <a:lvl1pPr lvl="0" algn="r">
-              <a:spcBef>
-                <a:spcPts val="0"/>
-              </a:spcBef>
-              <a:spcAft>
-                <a:spcPts val="0"/>
-              </a:spcAft>
-              <a:buSzPts val="1400"/>
-              <a:buNone/>
-              <a:defRPr/>
-            </a:lvl1pPr>
-            <a:lvl2pPr lvl="1" algn="l">
-              <a:spcBef>
-                <a:spcPts val="0"/>
-              </a:spcBef>
-              <a:spcAft>
-                <a:spcPts val="0"/>
-              </a:spcAft>
-              <a:buSzPts val="1400"/>
-              <a:buNone/>
-              <a:defRPr/>
-            </a:lvl2pPr>
-            <a:lvl3pPr lvl="2" algn="l">
-              <a:spcBef>
-                <a:spcPts val="0"/>
-              </a:spcBef>
-              <a:spcAft>
-                <a:spcPts val="0"/>
-              </a:spcAft>
-              <a:buSzPts val="1400"/>
-              <a:buNone/>
-              <a:defRPr/>
-            </a:lvl3pPr>
-            <a:lvl4pPr lvl="3" algn="l">
-              <a:spcBef>
-                <a:spcPts val="0"/>
-              </a:spcBef>
-              <a:spcAft>
-                <a:spcPts val="0"/>
-              </a:spcAft>
-              <a:buSzPts val="1400"/>
-              <a:buNone/>
-              <a:defRPr/>
-            </a:lvl4pPr>
-            <a:lvl5pPr lvl="4" algn="l">
-              <a:spcBef>
-                <a:spcPts val="0"/>
-              </a:spcBef>
-              <a:spcAft>
-                <a:spcPts val="0"/>
-              </a:spcAft>
-              <a:buSzPts val="1400"/>
-              <a:buNone/>
-              <a:defRPr/>
-            </a:lvl5pPr>
-            <a:lvl6pPr lvl="5" algn="l">
-              <a:spcBef>
-                <a:spcPts val="0"/>
-              </a:spcBef>
-              <a:spcAft>
-                <a:spcPts val="0"/>
-              </a:spcAft>
-              <a:buSzPts val="1400"/>
-              <a:buNone/>
-              <a:defRPr/>
-            </a:lvl6pPr>
-            <a:lvl7pPr lvl="6" algn="l">
-              <a:spcBef>
-                <a:spcPts val="0"/>
-              </a:spcBef>
-              <a:spcAft>
-                <a:spcPts val="0"/>
-              </a:spcAft>
-              <a:buSzPts val="1400"/>
-              <a:buNone/>
-              <a:defRPr/>
-            </a:lvl7pPr>
-            <a:lvl8pPr lvl="7" algn="l">
-              <a:spcBef>
-                <a:spcPts val="0"/>
-              </a:spcBef>
-              <a:spcAft>
-                <a:spcPts val="0"/>
-              </a:spcAft>
-              <a:buSzPts val="1400"/>
-              <a:buNone/>
-              <a:defRPr/>
-            </a:lvl8pPr>
-            <a:lvl9pPr lvl="8" algn="l">
-              <a:spcBef>
-                <a:spcPts val="0"/>
-              </a:spcBef>
-              <a:spcAft>
-                <a:spcPts val="0"/>
-              </a:spcAft>
-              <a:buSzPts val="1400"/>
-              <a:buNone/>
-              <a:defRPr/>
-            </a:lvl9pPr>
-          </a:lstStyle>
-          <a:p>
-            <a:endParaRPr/>
-          </a:p>
-        </p:txBody>
-      </p:sp>
-      <p:sp>
-        <p:nvSpPr>
-          <p:cNvPr id="31" name="Google Shape;31;p5"/>
-          <p:cNvSpPr txBox="1">
-            <a:spLocks noGrp="1"/>
-          </p:cNvSpPr>
-          <p:nvPr>
-            <p:ph type="ftr" idx="11"/>
-          </p:nvPr>
-        </p:nvSpPr>
-        <p:spPr>
-          <a:xfrm>
-            <a:off x="581192" y="5951811"/>
-            <a:ext cx="6917210" cy="365125"/>
-          </a:xfrm>
-          <a:prstGeom prst="rect">
-            <a:avLst/>
-          </a:prstGeom>
-          <a:noFill/>
-          <a:ln>
-            <a:noFill/>
-          </a:ln>
-        </p:spPr>
-        <p:txBody>
-          <a:bodyPr spcFirstLastPara="1" wrap="square" lIns="91425" tIns="45700" rIns="91425" bIns="45700" anchor="ctr" anchorCtr="0">
-            <a:noAutofit/>
-          </a:bodyPr>
-          <a:lstStyle>
-            <a:lvl1pPr lvl="0" algn="l">
-              <a:spcBef>
-                <a:spcPts val="0"/>
-              </a:spcBef>
-              <a:spcAft>
-                <a:spcPts val="0"/>
-              </a:spcAft>
-              <a:buSzPts val="1400"/>
-              <a:buNone/>
-              <a:defRPr/>
-            </a:lvl1pPr>
-            <a:lvl2pPr lvl="1" algn="l">
-              <a:spcBef>
-                <a:spcPts val="0"/>
-              </a:spcBef>
-              <a:spcAft>
-                <a:spcPts val="0"/>
-              </a:spcAft>
-              <a:buSzPts val="1400"/>
-              <a:buNone/>
-              <a:defRPr/>
-            </a:lvl2pPr>
-            <a:lvl3pPr lvl="2" algn="l">
-              <a:spcBef>
-                <a:spcPts val="0"/>
-              </a:spcBef>
-              <a:spcAft>
-                <a:spcPts val="0"/>
-              </a:spcAft>
-              <a:buSzPts val="1400"/>
-              <a:buNone/>
-              <a:defRPr/>
-            </a:lvl3pPr>
-            <a:lvl4pPr lvl="3" algn="l">
-              <a:spcBef>
-                <a:spcPts val="0"/>
-              </a:spcBef>
-              <a:spcAft>
-                <a:spcPts val="0"/>
-              </a:spcAft>
-              <a:buSzPts val="1400"/>
-              <a:buNone/>
-              <a:defRPr/>
-            </a:lvl4pPr>
-            <a:lvl5pPr lvl="4" algn="l">
-              <a:spcBef>
-                <a:spcPts val="0"/>
-              </a:spcBef>
-              <a:spcAft>
-                <a:spcPts val="0"/>
-              </a:spcAft>
-              <a:buSzPts val="1400"/>
-              <a:buNone/>
-              <a:defRPr/>
-            </a:lvl5pPr>
-            <a:lvl6pPr lvl="5" algn="l">
-              <a:spcBef>
-                <a:spcPts val="0"/>
-              </a:spcBef>
-              <a:spcAft>
-                <a:spcPts val="0"/>
-              </a:spcAft>
-              <a:buSzPts val="1400"/>
-              <a:buNone/>
-              <a:defRPr/>
-            </a:lvl6pPr>
-            <a:lvl7pPr lvl="6" algn="l">
-              <a:spcBef>
-                <a:spcPts val="0"/>
-              </a:spcBef>
-              <a:spcAft>
-                <a:spcPts val="0"/>
-              </a:spcAft>
-              <a:buSzPts val="1400"/>
-              <a:buNone/>
-              <a:defRPr/>
-            </a:lvl7pPr>
-            <a:lvl8pPr lvl="7" algn="l">
-              <a:spcBef>
-                <a:spcPts val="0"/>
-              </a:spcBef>
-              <a:spcAft>
-                <a:spcPts val="0"/>
-              </a:spcAft>
-              <a:buSzPts val="1400"/>
-              <a:buNone/>
-              <a:defRPr/>
-            </a:lvl8pPr>
-            <a:lvl9pPr lvl="8" algn="l">
-              <a:spcBef>
-                <a:spcPts val="0"/>
-              </a:spcBef>
-              <a:spcAft>
-                <a:spcPts val="0"/>
-              </a:spcAft>
-              <a:buSzPts val="1400"/>
-              <a:buNone/>
-              <a:defRPr/>
-            </a:lvl9pPr>
-          </a:lstStyle>
-          <a:p>
-            <a:endParaRPr/>
-          </a:p>
-        </p:txBody>
-      </p:sp>
-      <p:sp>
-        <p:nvSpPr>
-          <p:cNvPr id="32" name="Google Shape;32;p5"/>
-          <p:cNvSpPr txBox="1">
-            <a:spLocks noGrp="1"/>
-          </p:cNvSpPr>
-          <p:nvPr>
-            <p:ph type="sldNum" idx="12"/>
-          </p:nvPr>
-        </p:nvSpPr>
-        <p:spPr>
-          <a:xfrm>
-            <a:off x="10558300" y="5956137"/>
-            <a:ext cx="1052510" cy="365125"/>
-          </a:xfrm>
-          <a:prstGeom prst="rect">
-            <a:avLst/>
-          </a:prstGeom>
-          <a:noFill/>
-          <a:ln>
-            <a:noFill/>
-          </a:ln>
-        </p:spPr>
-        <p:txBody>
-          <a:bodyPr spcFirstLastPara="1" wrap="square" lIns="91425" tIns="45700" rIns="91425" bIns="45700" anchor="ctr" anchorCtr="0">
-            <a:noAutofit/>
-          </a:bodyPr>
-          <a:lstStyle>
-            <a:lvl1pPr marL="0" lvl="0" indent="0" algn="r">
-              <a:spcBef>
-                <a:spcPts val="0"/>
-              </a:spcBef>
-              <a:buNone/>
-              <a:defRPr/>
-            </a:lvl1pPr>
-            <a:lvl2pPr marL="0" lvl="1" indent="0" algn="r">
-              <a:spcBef>
-                <a:spcPts val="0"/>
-              </a:spcBef>
-              <a:buNone/>
-              <a:defRPr/>
-            </a:lvl2pPr>
-            <a:lvl3pPr marL="0" lvl="2" indent="0" algn="r">
-              <a:spcBef>
-                <a:spcPts val="0"/>
-              </a:spcBef>
-              <a:buNone/>
-              <a:defRPr/>
-            </a:lvl3pPr>
-            <a:lvl4pPr marL="0" lvl="3" indent="0" algn="r">
-              <a:spcBef>
-                <a:spcPts val="0"/>
-              </a:spcBef>
-              <a:buNone/>
-              <a:defRPr/>
-            </a:lvl4pPr>
-            <a:lvl5pPr marL="0" lvl="4" indent="0" algn="r">
-              <a:spcBef>
-                <a:spcPts val="0"/>
-              </a:spcBef>
-              <a:buNone/>
-              <a:defRPr/>
-            </a:lvl5pPr>
-            <a:lvl6pPr marL="0" lvl="5" indent="0" algn="r">
-              <a:spcBef>
-                <a:spcPts val="0"/>
-              </a:spcBef>
-              <a:buNone/>
-              <a:defRPr/>
-            </a:lvl6pPr>
-            <a:lvl7pPr marL="0" lvl="6" indent="0" algn="r">
-              <a:spcBef>
-                <a:spcPts val="0"/>
-              </a:spcBef>
-              <a:buNone/>
-              <a:defRPr/>
-            </a:lvl7pPr>
-            <a:lvl8pPr marL="0" lvl="7" indent="0" algn="r">
-              <a:spcBef>
-                <a:spcPts val="0"/>
-              </a:spcBef>
-              <a:buNone/>
-              <a:defRPr/>
-            </a:lvl8pPr>
-            <a:lvl9pPr marL="0" lvl="8" indent="0" algn="r">
-              <a:spcBef>
-                <a:spcPts val="0"/>
-              </a:spcBef>
-              <a:buNone/>
-              <a:defRPr/>
-            </a:lvl9pPr>
-          </a:lstStyle>
-          <a:p>
-            <a:pPr marL="0" lvl="0" indent="0" algn="r" rtl="0">
-              <a:spcBef>
-                <a:spcPts val="0"/>
-              </a:spcBef>
-              <a:spcAft>
-                <a:spcPts val="0"/>
-              </a:spcAft>
-              <a:buNone/>
-            </a:pPr>
-            <a:fld id="{00000000-1234-1234-1234-123412341234}" type="slidenum">
-              <a:rPr lang="en-US"/>
-              <a:t>‹#›</a:t>
-            </a:fld>
-            <a:endParaRPr/>
-          </a:p>
-        </p:txBody>
-      </p:sp>
-      <p:sp>
-        <p:nvSpPr>
-          <p:cNvPr id="33" name="Google Shape;33;p5"/>
-          <p:cNvSpPr>
-            <a:spLocks noGrp="1"/>
-          </p:cNvSpPr>
-          <p:nvPr>
-            <p:ph type="pic" idx="3"/>
-          </p:nvPr>
-        </p:nvSpPr>
-        <p:spPr>
-          <a:xfrm>
-            <a:off x="334901" y="5681499"/>
-            <a:ext cx="1016439" cy="914400"/>
-          </a:xfrm>
-          <a:prstGeom prst="rect">
-            <a:avLst/>
-          </a:prstGeom>
-          <a:noFill/>
-          <a:ln>
-            <a:noFill/>
-          </a:ln>
-        </p:spPr>
-      </p:sp>
-      <p:sp>
-        <p:nvSpPr>
-          <p:cNvPr id="34" name="Google Shape;34;p5"/>
-          <p:cNvSpPr/>
-          <p:nvPr/>
-        </p:nvSpPr>
-        <p:spPr>
-          <a:xfrm>
-            <a:off x="597457" y="599726"/>
-            <a:ext cx="10991499" cy="835785"/>
-          </a:xfrm>
-          <a:prstGeom prst="rect">
-            <a:avLst/>
-          </a:prstGeom>
-          <a:solidFill>
-            <a:schemeClr val="accent1"/>
-          </a:solidFill>
-          <a:ln>
-            <a:noFill/>
-          </a:ln>
-        </p:spPr>
-        <p:txBody>
-          <a:bodyPr spcFirstLastPara="1" wrap="square" lIns="91425" tIns="91425" rIns="91425" bIns="91425" anchor="ctr" anchorCtr="0">
-            <a:noAutofit/>
-          </a:bodyPr>
-          <a:lstStyle/>
-          <a:p>
-            <a:pPr marL="0" lvl="0" indent="0" algn="l" rtl="0">
-              <a:spcBef>
-                <a:spcPts val="0"/>
-              </a:spcBef>
-              <a:spcAft>
-                <a:spcPts val="0"/>
-              </a:spcAft>
-              <a:buNone/>
-            </a:pPr>
-            <a:endParaRPr/>
-          </a:p>
-        </p:txBody>
-      </p:sp>
-      <p:sp>
-        <p:nvSpPr>
-          <p:cNvPr id="35" name="Google Shape;35;p5"/>
-          <p:cNvSpPr txBox="1">
-            <a:spLocks noGrp="1"/>
-          </p:cNvSpPr>
-          <p:nvPr>
-            <p:ph type="title"/>
-          </p:nvPr>
-        </p:nvSpPr>
-        <p:spPr>
-          <a:xfrm>
-            <a:off x="774923" y="687475"/>
-            <a:ext cx="10106109" cy="630049"/>
-          </a:xfrm>
-          <a:prstGeom prst="rect">
-            <a:avLst/>
-          </a:prstGeom>
-          <a:noFill/>
-          <a:ln>
-            <a:noFill/>
-          </a:ln>
-        </p:spPr>
-        <p:txBody>
-          <a:bodyPr spcFirstLastPara="1" wrap="square" lIns="91425" tIns="45700" rIns="91425" bIns="45700" anchor="b" anchorCtr="0">
-            <a:normAutofit/>
-          </a:bodyPr>
-          <a:lstStyle>
-            <a:lvl1pPr lvl="0" algn="l">
-              <a:spcBef>
-                <a:spcPts val="0"/>
-              </a:spcBef>
-              <a:spcAft>
-                <a:spcPts val="0"/>
-              </a:spcAft>
-              <a:buClr>
-                <a:schemeClr val="lt1"/>
-              </a:buClr>
-              <a:buSzPts val="2800"/>
-              <a:buFont typeface="Arial"/>
-              <a:buNone/>
-              <a:defRPr>
-                <a:latin typeface="Arial"/>
-                <a:ea typeface="Arial"/>
-                <a:cs typeface="Arial"/>
-                <a:sym typeface="Arial"/>
-              </a:defRPr>
-            </a:lvl1pPr>
-            <a:lvl2pPr lvl="1" algn="l">
-              <a:spcBef>
-                <a:spcPts val="0"/>
-              </a:spcBef>
-              <a:spcAft>
-                <a:spcPts val="0"/>
-              </a:spcAft>
-              <a:buSzPts val="1400"/>
-              <a:buNone/>
-              <a:defRPr/>
-            </a:lvl2pPr>
-            <a:lvl3pPr lvl="2" algn="l">
-              <a:spcBef>
-                <a:spcPts val="0"/>
-              </a:spcBef>
-              <a:spcAft>
-                <a:spcPts val="0"/>
-              </a:spcAft>
-              <a:buSzPts val="1400"/>
-              <a:buNone/>
-              <a:defRPr/>
-            </a:lvl3pPr>
-            <a:lvl4pPr lvl="3" algn="l">
-              <a:spcBef>
-                <a:spcPts val="0"/>
-              </a:spcBef>
-              <a:spcAft>
-                <a:spcPts val="0"/>
-              </a:spcAft>
-              <a:buSzPts val="1400"/>
-              <a:buNone/>
-              <a:defRPr/>
-            </a:lvl4pPr>
-            <a:lvl5pPr lvl="4" algn="l">
-              <a:spcBef>
-                <a:spcPts val="0"/>
-              </a:spcBef>
-              <a:spcAft>
-                <a:spcPts val="0"/>
-              </a:spcAft>
-              <a:buSzPts val="1400"/>
-              <a:buNone/>
-              <a:defRPr/>
-            </a:lvl5pPr>
-            <a:lvl6pPr lvl="5" algn="l">
-              <a:spcBef>
-                <a:spcPts val="0"/>
-              </a:spcBef>
-              <a:spcAft>
-                <a:spcPts val="0"/>
-              </a:spcAft>
-              <a:buSzPts val="1400"/>
-              <a:buNone/>
-              <a:defRPr/>
-            </a:lvl6pPr>
-            <a:lvl7pPr lvl="6" algn="l">
-              <a:spcBef>
-                <a:spcPts val="0"/>
-              </a:spcBef>
-              <a:spcAft>
-                <a:spcPts val="0"/>
-              </a:spcAft>
-              <a:buSzPts val="1400"/>
-              <a:buNone/>
-              <a:defRPr/>
-            </a:lvl7pPr>
-            <a:lvl8pPr lvl="7" algn="l">
-              <a:spcBef>
-                <a:spcPts val="0"/>
-              </a:spcBef>
-              <a:spcAft>
-                <a:spcPts val="0"/>
-              </a:spcAft>
-              <a:buSzPts val="1400"/>
-              <a:buNone/>
-              <a:defRPr/>
-            </a:lvl8pPr>
-            <a:lvl9pPr lvl="8" algn="l">
-              <a:spcBef>
-                <a:spcPts val="0"/>
-              </a:spcBef>
-              <a:spcAft>
-                <a:spcPts val="0"/>
-              </a:spcAft>
-              <a:buSzPts val="1400"/>
-              <a:buNone/>
-              <a:defRPr/>
-            </a:lvl9pPr>
-          </a:lstStyle>
-          <a:p>
-            <a:endParaRPr/>
-          </a:p>
-        </p:txBody>
-      </p:sp>
-    </p:spTree>
-  </p:cSld>
-  <p:clrMapOvr>
-    <a:masterClrMapping/>
-  </p:clrMapOvr>
-</p:sldLayout>
-</file>
-
-<file path=ppt/slideLayouts/slideLayout20.xml><?xml version="1.0" encoding="utf-8"?>
+<file path=ppt/slideLayouts/slideLayout19.xml><?xml version="1.0" encoding="utf-8"?>
 <p:sldLayout xmlns:a="http://schemas.openxmlformats.org/drawingml/2006/main" xmlns:r="http://schemas.openxmlformats.org/officeDocument/2006/relationships" xmlns:p="http://schemas.openxmlformats.org/presentationml/2006/main" matchingName="2_Blank">
   <p:cSld name="2_Blank">
     <p:spTree>
@@ -12516,7 +11012,842 @@
 </p:sldLayout>
 </file>
 
-<file path=ppt/slideLayouts/slideLayout21.xml><?xml version="1.0" encoding="utf-8"?>
+<file path=ppt/slideLayouts/slideLayout2.xml><?xml version="1.0" encoding="utf-8"?>
+<p:sldLayout xmlns:a="http://schemas.openxmlformats.org/drawingml/2006/main" xmlns:r="http://schemas.openxmlformats.org/officeDocument/2006/relationships" xmlns:p="http://schemas.openxmlformats.org/presentationml/2006/main" matchingName="Title Slide" type="title">
+  <p:cSld name="TITLE">
+    <p:spTree>
+      <p:nvGrpSpPr>
+        <p:cNvPr id="1" name="Shape 36"/>
+        <p:cNvGrpSpPr/>
+        <p:nvPr/>
+      </p:nvGrpSpPr>
+      <p:grpSpPr>
+        <a:xfrm>
+          <a:off x="0" y="0"/>
+          <a:ext cx="0" cy="0"/>
+          <a:chOff x="0" y="0"/>
+          <a:chExt cx="0" cy="0"/>
+        </a:xfrm>
+      </p:grpSpPr>
+      <p:sp>
+        <p:nvSpPr>
+          <p:cNvPr id="37" name="Google Shape;37;p6"/>
+          <p:cNvSpPr/>
+          <p:nvPr/>
+        </p:nvSpPr>
+        <p:spPr>
+          <a:xfrm>
+            <a:off x="446534" y="3085765"/>
+            <a:ext cx="11262866" cy="3304800"/>
+          </a:xfrm>
+          <a:prstGeom prst="rect">
+            <a:avLst/>
+          </a:prstGeom>
+          <a:solidFill>
+            <a:schemeClr val="accent1"/>
+          </a:solidFill>
+          <a:ln>
+            <a:noFill/>
+          </a:ln>
+        </p:spPr>
+        <p:txBody>
+          <a:bodyPr spcFirstLastPara="1" wrap="square" lIns="91425" tIns="91425" rIns="91425" bIns="91425" anchor="ctr" anchorCtr="0">
+            <a:noAutofit/>
+          </a:bodyPr>
+          <a:lstStyle/>
+          <a:p>
+            <a:pPr marL="0" lvl="0" indent="0" algn="l" rtl="0">
+              <a:spcBef>
+                <a:spcPts val="0"/>
+              </a:spcBef>
+              <a:spcAft>
+                <a:spcPts val="0"/>
+              </a:spcAft>
+              <a:buNone/>
+            </a:pPr>
+            <a:endParaRPr/>
+          </a:p>
+        </p:txBody>
+      </p:sp>
+      <p:sp>
+        <p:nvSpPr>
+          <p:cNvPr id="38" name="Google Shape;38;p6"/>
+          <p:cNvSpPr txBox="1">
+            <a:spLocks noGrp="1"/>
+          </p:cNvSpPr>
+          <p:nvPr>
+            <p:ph type="ctrTitle"/>
+          </p:nvPr>
+        </p:nvSpPr>
+        <p:spPr>
+          <a:xfrm>
+            <a:off x="581191" y="1020431"/>
+            <a:ext cx="10993549" cy="1475013"/>
+          </a:xfrm>
+          <a:prstGeom prst="rect">
+            <a:avLst/>
+          </a:prstGeom>
+          <a:noFill/>
+          <a:ln>
+            <a:noFill/>
+          </a:ln>
+        </p:spPr>
+        <p:txBody>
+          <a:bodyPr spcFirstLastPara="1" wrap="square" lIns="91425" tIns="45700" rIns="91425" bIns="45700" anchor="b" anchorCtr="0">
+            <a:normAutofit/>
+          </a:bodyPr>
+          <a:lstStyle>
+            <a:lvl1pPr lvl="0" algn="l">
+              <a:spcBef>
+                <a:spcPts val="0"/>
+              </a:spcBef>
+              <a:spcAft>
+                <a:spcPts val="0"/>
+              </a:spcAft>
+              <a:buClr>
+                <a:schemeClr val="accent1"/>
+              </a:buClr>
+              <a:buSzPts val="3600"/>
+              <a:buFont typeface="Verdana"/>
+              <a:buNone/>
+              <a:defRPr sz="3600">
+                <a:solidFill>
+                  <a:schemeClr val="accent1"/>
+                </a:solidFill>
+              </a:defRPr>
+            </a:lvl1pPr>
+            <a:lvl2pPr lvl="1" algn="l">
+              <a:spcBef>
+                <a:spcPts val="0"/>
+              </a:spcBef>
+              <a:spcAft>
+                <a:spcPts val="0"/>
+              </a:spcAft>
+              <a:buSzPts val="1400"/>
+              <a:buNone/>
+              <a:defRPr/>
+            </a:lvl2pPr>
+            <a:lvl3pPr lvl="2" algn="l">
+              <a:spcBef>
+                <a:spcPts val="0"/>
+              </a:spcBef>
+              <a:spcAft>
+                <a:spcPts val="0"/>
+              </a:spcAft>
+              <a:buSzPts val="1400"/>
+              <a:buNone/>
+              <a:defRPr/>
+            </a:lvl3pPr>
+            <a:lvl4pPr lvl="3" algn="l">
+              <a:spcBef>
+                <a:spcPts val="0"/>
+              </a:spcBef>
+              <a:spcAft>
+                <a:spcPts val="0"/>
+              </a:spcAft>
+              <a:buSzPts val="1400"/>
+              <a:buNone/>
+              <a:defRPr/>
+            </a:lvl4pPr>
+            <a:lvl5pPr lvl="4" algn="l">
+              <a:spcBef>
+                <a:spcPts val="0"/>
+              </a:spcBef>
+              <a:spcAft>
+                <a:spcPts val="0"/>
+              </a:spcAft>
+              <a:buSzPts val="1400"/>
+              <a:buNone/>
+              <a:defRPr/>
+            </a:lvl5pPr>
+            <a:lvl6pPr lvl="5" algn="l">
+              <a:spcBef>
+                <a:spcPts val="0"/>
+              </a:spcBef>
+              <a:spcAft>
+                <a:spcPts val="0"/>
+              </a:spcAft>
+              <a:buSzPts val="1400"/>
+              <a:buNone/>
+              <a:defRPr/>
+            </a:lvl6pPr>
+            <a:lvl7pPr lvl="6" algn="l">
+              <a:spcBef>
+                <a:spcPts val="0"/>
+              </a:spcBef>
+              <a:spcAft>
+                <a:spcPts val="0"/>
+              </a:spcAft>
+              <a:buSzPts val="1400"/>
+              <a:buNone/>
+              <a:defRPr/>
+            </a:lvl7pPr>
+            <a:lvl8pPr lvl="7" algn="l">
+              <a:spcBef>
+                <a:spcPts val="0"/>
+              </a:spcBef>
+              <a:spcAft>
+                <a:spcPts val="0"/>
+              </a:spcAft>
+              <a:buSzPts val="1400"/>
+              <a:buNone/>
+              <a:defRPr/>
+            </a:lvl8pPr>
+            <a:lvl9pPr lvl="8" algn="l">
+              <a:spcBef>
+                <a:spcPts val="0"/>
+              </a:spcBef>
+              <a:spcAft>
+                <a:spcPts val="0"/>
+              </a:spcAft>
+              <a:buSzPts val="1400"/>
+              <a:buNone/>
+              <a:defRPr/>
+            </a:lvl9pPr>
+          </a:lstStyle>
+          <a:p>
+            <a:endParaRPr/>
+          </a:p>
+        </p:txBody>
+      </p:sp>
+      <p:sp>
+        <p:nvSpPr>
+          <p:cNvPr id="39" name="Google Shape;39;p6"/>
+          <p:cNvSpPr txBox="1">
+            <a:spLocks noGrp="1"/>
+          </p:cNvSpPr>
+          <p:nvPr>
+            <p:ph type="subTitle" idx="1"/>
+          </p:nvPr>
+        </p:nvSpPr>
+        <p:spPr>
+          <a:xfrm>
+            <a:off x="581194" y="2495445"/>
+            <a:ext cx="10993546" cy="590321"/>
+          </a:xfrm>
+          <a:prstGeom prst="rect">
+            <a:avLst/>
+          </a:prstGeom>
+          <a:noFill/>
+          <a:ln>
+            <a:noFill/>
+          </a:ln>
+        </p:spPr>
+        <p:txBody>
+          <a:bodyPr spcFirstLastPara="1" wrap="square" lIns="91425" tIns="45700" rIns="91425" bIns="45700" anchor="t" anchorCtr="0">
+            <a:normAutofit/>
+          </a:bodyPr>
+          <a:lstStyle>
+            <a:lvl1pPr lvl="0" algn="l">
+              <a:spcBef>
+                <a:spcPts val="320"/>
+              </a:spcBef>
+              <a:spcAft>
+                <a:spcPts val="0"/>
+              </a:spcAft>
+              <a:buSzPts val="1472"/>
+              <a:buNone/>
+              <a:defRPr sz="1600" cap="none">
+                <a:solidFill>
+                  <a:schemeClr val="accent2"/>
+                </a:solidFill>
+                <a:latin typeface="Verdana"/>
+                <a:ea typeface="Verdana"/>
+                <a:cs typeface="Verdana"/>
+                <a:sym typeface="Verdana"/>
+              </a:defRPr>
+            </a:lvl1pPr>
+            <a:lvl2pPr lvl="1" algn="ctr">
+              <a:spcBef>
+                <a:spcPts val="600"/>
+              </a:spcBef>
+              <a:spcAft>
+                <a:spcPts val="0"/>
+              </a:spcAft>
+              <a:buSzPts val="1472"/>
+              <a:buNone/>
+              <a:defRPr>
+                <a:solidFill>
+                  <a:srgbClr val="888888"/>
+                </a:solidFill>
+              </a:defRPr>
+            </a:lvl2pPr>
+            <a:lvl3pPr lvl="2" algn="ctr">
+              <a:spcBef>
+                <a:spcPts val="600"/>
+              </a:spcBef>
+              <a:spcAft>
+                <a:spcPts val="0"/>
+              </a:spcAft>
+              <a:buSzPts val="1288"/>
+              <a:buNone/>
+              <a:defRPr>
+                <a:solidFill>
+                  <a:srgbClr val="888888"/>
+                </a:solidFill>
+              </a:defRPr>
+            </a:lvl3pPr>
+            <a:lvl4pPr lvl="3" algn="ctr">
+              <a:spcBef>
+                <a:spcPts val="600"/>
+              </a:spcBef>
+              <a:spcAft>
+                <a:spcPts val="0"/>
+              </a:spcAft>
+              <a:buSzPts val="1104"/>
+              <a:buNone/>
+              <a:defRPr>
+                <a:solidFill>
+                  <a:srgbClr val="888888"/>
+                </a:solidFill>
+              </a:defRPr>
+            </a:lvl4pPr>
+            <a:lvl5pPr lvl="4" algn="ctr">
+              <a:spcBef>
+                <a:spcPts val="600"/>
+              </a:spcBef>
+              <a:spcAft>
+                <a:spcPts val="0"/>
+              </a:spcAft>
+              <a:buSzPts val="1104"/>
+              <a:buNone/>
+              <a:defRPr>
+                <a:solidFill>
+                  <a:srgbClr val="888888"/>
+                </a:solidFill>
+              </a:defRPr>
+            </a:lvl5pPr>
+            <a:lvl6pPr lvl="5" algn="ctr">
+              <a:spcBef>
+                <a:spcPts val="600"/>
+              </a:spcBef>
+              <a:spcAft>
+                <a:spcPts val="0"/>
+              </a:spcAft>
+              <a:buSzPts val="1104"/>
+              <a:buNone/>
+              <a:defRPr>
+                <a:solidFill>
+                  <a:srgbClr val="888888"/>
+                </a:solidFill>
+              </a:defRPr>
+            </a:lvl6pPr>
+            <a:lvl7pPr lvl="6" algn="ctr">
+              <a:spcBef>
+                <a:spcPts val="600"/>
+              </a:spcBef>
+              <a:spcAft>
+                <a:spcPts val="0"/>
+              </a:spcAft>
+              <a:buSzPts val="1104"/>
+              <a:buNone/>
+              <a:defRPr>
+                <a:solidFill>
+                  <a:srgbClr val="888888"/>
+                </a:solidFill>
+              </a:defRPr>
+            </a:lvl7pPr>
+            <a:lvl8pPr lvl="7" algn="ctr">
+              <a:spcBef>
+                <a:spcPts val="600"/>
+              </a:spcBef>
+              <a:spcAft>
+                <a:spcPts val="0"/>
+              </a:spcAft>
+              <a:buSzPts val="1104"/>
+              <a:buNone/>
+              <a:defRPr>
+                <a:solidFill>
+                  <a:srgbClr val="888888"/>
+                </a:solidFill>
+              </a:defRPr>
+            </a:lvl8pPr>
+            <a:lvl9pPr lvl="8" algn="ctr">
+              <a:spcBef>
+                <a:spcPts val="600"/>
+              </a:spcBef>
+              <a:spcAft>
+                <a:spcPts val="600"/>
+              </a:spcAft>
+              <a:buSzPts val="1104"/>
+              <a:buNone/>
+              <a:defRPr>
+                <a:solidFill>
+                  <a:srgbClr val="888888"/>
+                </a:solidFill>
+              </a:defRPr>
+            </a:lvl9pPr>
+          </a:lstStyle>
+          <a:p>
+            <a:endParaRPr/>
+          </a:p>
+        </p:txBody>
+      </p:sp>
+      <p:sp>
+        <p:nvSpPr>
+          <p:cNvPr id="40" name="Google Shape;40;p6"/>
+          <p:cNvSpPr txBox="1">
+            <a:spLocks noGrp="1"/>
+          </p:cNvSpPr>
+          <p:nvPr>
+            <p:ph type="dt" idx="10"/>
+          </p:nvPr>
+        </p:nvSpPr>
+        <p:spPr>
+          <a:xfrm>
+            <a:off x="7605951" y="5956137"/>
+            <a:ext cx="2844800" cy="365125"/>
+          </a:xfrm>
+          <a:prstGeom prst="rect">
+            <a:avLst/>
+          </a:prstGeom>
+          <a:noFill/>
+          <a:ln>
+            <a:noFill/>
+          </a:ln>
+        </p:spPr>
+        <p:txBody>
+          <a:bodyPr spcFirstLastPara="1" wrap="square" lIns="91425" tIns="45700" rIns="91425" bIns="45700" anchor="ctr" anchorCtr="0">
+            <a:noAutofit/>
+          </a:bodyPr>
+          <a:lstStyle>
+            <a:lvl1pPr lvl="0" algn="r">
+              <a:spcBef>
+                <a:spcPts val="0"/>
+              </a:spcBef>
+              <a:spcAft>
+                <a:spcPts val="0"/>
+              </a:spcAft>
+              <a:buSzPts val="1400"/>
+              <a:buNone/>
+              <a:defRPr>
+                <a:solidFill>
+                  <a:srgbClr val="2D58AC"/>
+                </a:solidFill>
+              </a:defRPr>
+            </a:lvl1pPr>
+            <a:lvl2pPr lvl="1" algn="l">
+              <a:spcBef>
+                <a:spcPts val="0"/>
+              </a:spcBef>
+              <a:spcAft>
+                <a:spcPts val="0"/>
+              </a:spcAft>
+              <a:buSzPts val="1400"/>
+              <a:buNone/>
+              <a:defRPr/>
+            </a:lvl2pPr>
+            <a:lvl3pPr lvl="2" algn="l">
+              <a:spcBef>
+                <a:spcPts val="0"/>
+              </a:spcBef>
+              <a:spcAft>
+                <a:spcPts val="0"/>
+              </a:spcAft>
+              <a:buSzPts val="1400"/>
+              <a:buNone/>
+              <a:defRPr/>
+            </a:lvl3pPr>
+            <a:lvl4pPr lvl="3" algn="l">
+              <a:spcBef>
+                <a:spcPts val="0"/>
+              </a:spcBef>
+              <a:spcAft>
+                <a:spcPts val="0"/>
+              </a:spcAft>
+              <a:buSzPts val="1400"/>
+              <a:buNone/>
+              <a:defRPr/>
+            </a:lvl4pPr>
+            <a:lvl5pPr lvl="4" algn="l">
+              <a:spcBef>
+                <a:spcPts val="0"/>
+              </a:spcBef>
+              <a:spcAft>
+                <a:spcPts val="0"/>
+              </a:spcAft>
+              <a:buSzPts val="1400"/>
+              <a:buNone/>
+              <a:defRPr/>
+            </a:lvl5pPr>
+            <a:lvl6pPr lvl="5" algn="l">
+              <a:spcBef>
+                <a:spcPts val="0"/>
+              </a:spcBef>
+              <a:spcAft>
+                <a:spcPts val="0"/>
+              </a:spcAft>
+              <a:buSzPts val="1400"/>
+              <a:buNone/>
+              <a:defRPr/>
+            </a:lvl6pPr>
+            <a:lvl7pPr lvl="6" algn="l">
+              <a:spcBef>
+                <a:spcPts val="0"/>
+              </a:spcBef>
+              <a:spcAft>
+                <a:spcPts val="0"/>
+              </a:spcAft>
+              <a:buSzPts val="1400"/>
+              <a:buNone/>
+              <a:defRPr/>
+            </a:lvl7pPr>
+            <a:lvl8pPr lvl="7" algn="l">
+              <a:spcBef>
+                <a:spcPts val="0"/>
+              </a:spcBef>
+              <a:spcAft>
+                <a:spcPts val="0"/>
+              </a:spcAft>
+              <a:buSzPts val="1400"/>
+              <a:buNone/>
+              <a:defRPr/>
+            </a:lvl8pPr>
+            <a:lvl9pPr lvl="8" algn="l">
+              <a:spcBef>
+                <a:spcPts val="0"/>
+              </a:spcBef>
+              <a:spcAft>
+                <a:spcPts val="0"/>
+              </a:spcAft>
+              <a:buSzPts val="1400"/>
+              <a:buNone/>
+              <a:defRPr/>
+            </a:lvl9pPr>
+          </a:lstStyle>
+          <a:p>
+            <a:endParaRPr/>
+          </a:p>
+        </p:txBody>
+      </p:sp>
+      <p:sp>
+        <p:nvSpPr>
+          <p:cNvPr id="41" name="Google Shape;41;p6"/>
+          <p:cNvSpPr txBox="1">
+            <a:spLocks noGrp="1"/>
+          </p:cNvSpPr>
+          <p:nvPr>
+            <p:ph type="ftr" idx="11"/>
+          </p:nvPr>
+        </p:nvSpPr>
+        <p:spPr>
+          <a:xfrm>
+            <a:off x="581192" y="5951811"/>
+            <a:ext cx="6917210" cy="365125"/>
+          </a:xfrm>
+          <a:prstGeom prst="rect">
+            <a:avLst/>
+          </a:prstGeom>
+          <a:noFill/>
+          <a:ln>
+            <a:noFill/>
+          </a:ln>
+        </p:spPr>
+        <p:txBody>
+          <a:bodyPr spcFirstLastPara="1" wrap="square" lIns="91425" tIns="45700" rIns="91425" bIns="45700" anchor="ctr" anchorCtr="0">
+            <a:noAutofit/>
+          </a:bodyPr>
+          <a:lstStyle>
+            <a:lvl1pPr lvl="0" algn="l">
+              <a:spcBef>
+                <a:spcPts val="0"/>
+              </a:spcBef>
+              <a:spcAft>
+                <a:spcPts val="0"/>
+              </a:spcAft>
+              <a:buSzPts val="1400"/>
+              <a:buNone/>
+              <a:defRPr>
+                <a:solidFill>
+                  <a:srgbClr val="2D58AC"/>
+                </a:solidFill>
+              </a:defRPr>
+            </a:lvl1pPr>
+            <a:lvl2pPr lvl="1" algn="l">
+              <a:spcBef>
+                <a:spcPts val="0"/>
+              </a:spcBef>
+              <a:spcAft>
+                <a:spcPts val="0"/>
+              </a:spcAft>
+              <a:buSzPts val="1400"/>
+              <a:buNone/>
+              <a:defRPr/>
+            </a:lvl2pPr>
+            <a:lvl3pPr lvl="2" algn="l">
+              <a:spcBef>
+                <a:spcPts val="0"/>
+              </a:spcBef>
+              <a:spcAft>
+                <a:spcPts val="0"/>
+              </a:spcAft>
+              <a:buSzPts val="1400"/>
+              <a:buNone/>
+              <a:defRPr/>
+            </a:lvl3pPr>
+            <a:lvl4pPr lvl="3" algn="l">
+              <a:spcBef>
+                <a:spcPts val="0"/>
+              </a:spcBef>
+              <a:spcAft>
+                <a:spcPts val="0"/>
+              </a:spcAft>
+              <a:buSzPts val="1400"/>
+              <a:buNone/>
+              <a:defRPr/>
+            </a:lvl4pPr>
+            <a:lvl5pPr lvl="4" algn="l">
+              <a:spcBef>
+                <a:spcPts val="0"/>
+              </a:spcBef>
+              <a:spcAft>
+                <a:spcPts val="0"/>
+              </a:spcAft>
+              <a:buSzPts val="1400"/>
+              <a:buNone/>
+              <a:defRPr/>
+            </a:lvl5pPr>
+            <a:lvl6pPr lvl="5" algn="l">
+              <a:spcBef>
+                <a:spcPts val="0"/>
+              </a:spcBef>
+              <a:spcAft>
+                <a:spcPts val="0"/>
+              </a:spcAft>
+              <a:buSzPts val="1400"/>
+              <a:buNone/>
+              <a:defRPr/>
+            </a:lvl6pPr>
+            <a:lvl7pPr lvl="6" algn="l">
+              <a:spcBef>
+                <a:spcPts val="0"/>
+              </a:spcBef>
+              <a:spcAft>
+                <a:spcPts val="0"/>
+              </a:spcAft>
+              <a:buSzPts val="1400"/>
+              <a:buNone/>
+              <a:defRPr/>
+            </a:lvl7pPr>
+            <a:lvl8pPr lvl="7" algn="l">
+              <a:spcBef>
+                <a:spcPts val="0"/>
+              </a:spcBef>
+              <a:spcAft>
+                <a:spcPts val="0"/>
+              </a:spcAft>
+              <a:buSzPts val="1400"/>
+              <a:buNone/>
+              <a:defRPr/>
+            </a:lvl8pPr>
+            <a:lvl9pPr lvl="8" algn="l">
+              <a:spcBef>
+                <a:spcPts val="0"/>
+              </a:spcBef>
+              <a:spcAft>
+                <a:spcPts val="0"/>
+              </a:spcAft>
+              <a:buSzPts val="1400"/>
+              <a:buNone/>
+              <a:defRPr/>
+            </a:lvl9pPr>
+          </a:lstStyle>
+          <a:p>
+            <a:endParaRPr/>
+          </a:p>
+        </p:txBody>
+      </p:sp>
+      <p:sp>
+        <p:nvSpPr>
+          <p:cNvPr id="42" name="Google Shape;42;p6"/>
+          <p:cNvSpPr txBox="1">
+            <a:spLocks noGrp="1"/>
+          </p:cNvSpPr>
+          <p:nvPr>
+            <p:ph type="sldNum" idx="12"/>
+          </p:nvPr>
+        </p:nvSpPr>
+        <p:spPr>
+          <a:xfrm>
+            <a:off x="10558300" y="5956137"/>
+            <a:ext cx="1016440" cy="365125"/>
+          </a:xfrm>
+          <a:prstGeom prst="rect">
+            <a:avLst/>
+          </a:prstGeom>
+          <a:noFill/>
+          <a:ln>
+            <a:noFill/>
+          </a:ln>
+        </p:spPr>
+        <p:txBody>
+          <a:bodyPr spcFirstLastPara="1" wrap="square" lIns="91425" tIns="45700" rIns="91425" bIns="45700" anchor="ctr" anchorCtr="0">
+            <a:noAutofit/>
+          </a:bodyPr>
+          <a:lstStyle>
+            <a:lvl1pPr marL="0" lvl="0" indent="0" algn="r">
+              <a:spcBef>
+                <a:spcPts val="0"/>
+              </a:spcBef>
+              <a:buNone/>
+              <a:defRPr sz="900">
+                <a:solidFill>
+                  <a:srgbClr val="2D58AC"/>
+                </a:solidFill>
+                <a:latin typeface="Gill Sans"/>
+                <a:ea typeface="Gill Sans"/>
+                <a:cs typeface="Gill Sans"/>
+                <a:sym typeface="Gill Sans"/>
+              </a:defRPr>
+            </a:lvl1pPr>
+            <a:lvl2pPr marL="0" lvl="1" indent="0" algn="r">
+              <a:spcBef>
+                <a:spcPts val="0"/>
+              </a:spcBef>
+              <a:buNone/>
+              <a:defRPr sz="900">
+                <a:solidFill>
+                  <a:srgbClr val="2D58AC"/>
+                </a:solidFill>
+                <a:latin typeface="Gill Sans"/>
+                <a:ea typeface="Gill Sans"/>
+                <a:cs typeface="Gill Sans"/>
+                <a:sym typeface="Gill Sans"/>
+              </a:defRPr>
+            </a:lvl2pPr>
+            <a:lvl3pPr marL="0" lvl="2" indent="0" algn="r">
+              <a:spcBef>
+                <a:spcPts val="0"/>
+              </a:spcBef>
+              <a:buNone/>
+              <a:defRPr sz="900">
+                <a:solidFill>
+                  <a:srgbClr val="2D58AC"/>
+                </a:solidFill>
+                <a:latin typeface="Gill Sans"/>
+                <a:ea typeface="Gill Sans"/>
+                <a:cs typeface="Gill Sans"/>
+                <a:sym typeface="Gill Sans"/>
+              </a:defRPr>
+            </a:lvl3pPr>
+            <a:lvl4pPr marL="0" lvl="3" indent="0" algn="r">
+              <a:spcBef>
+                <a:spcPts val="0"/>
+              </a:spcBef>
+              <a:buNone/>
+              <a:defRPr sz="900">
+                <a:solidFill>
+                  <a:srgbClr val="2D58AC"/>
+                </a:solidFill>
+                <a:latin typeface="Gill Sans"/>
+                <a:ea typeface="Gill Sans"/>
+                <a:cs typeface="Gill Sans"/>
+                <a:sym typeface="Gill Sans"/>
+              </a:defRPr>
+            </a:lvl4pPr>
+            <a:lvl5pPr marL="0" lvl="4" indent="0" algn="r">
+              <a:spcBef>
+                <a:spcPts val="0"/>
+              </a:spcBef>
+              <a:buNone/>
+              <a:defRPr sz="900">
+                <a:solidFill>
+                  <a:srgbClr val="2D58AC"/>
+                </a:solidFill>
+                <a:latin typeface="Gill Sans"/>
+                <a:ea typeface="Gill Sans"/>
+                <a:cs typeface="Gill Sans"/>
+                <a:sym typeface="Gill Sans"/>
+              </a:defRPr>
+            </a:lvl5pPr>
+            <a:lvl6pPr marL="0" lvl="5" indent="0" algn="r">
+              <a:spcBef>
+                <a:spcPts val="0"/>
+              </a:spcBef>
+              <a:buNone/>
+              <a:defRPr sz="900">
+                <a:solidFill>
+                  <a:srgbClr val="2D58AC"/>
+                </a:solidFill>
+                <a:latin typeface="Gill Sans"/>
+                <a:ea typeface="Gill Sans"/>
+                <a:cs typeface="Gill Sans"/>
+                <a:sym typeface="Gill Sans"/>
+              </a:defRPr>
+            </a:lvl6pPr>
+            <a:lvl7pPr marL="0" lvl="6" indent="0" algn="r">
+              <a:spcBef>
+                <a:spcPts val="0"/>
+              </a:spcBef>
+              <a:buNone/>
+              <a:defRPr sz="900">
+                <a:solidFill>
+                  <a:srgbClr val="2D58AC"/>
+                </a:solidFill>
+                <a:latin typeface="Gill Sans"/>
+                <a:ea typeface="Gill Sans"/>
+                <a:cs typeface="Gill Sans"/>
+                <a:sym typeface="Gill Sans"/>
+              </a:defRPr>
+            </a:lvl7pPr>
+            <a:lvl8pPr marL="0" lvl="7" indent="0" algn="r">
+              <a:spcBef>
+                <a:spcPts val="0"/>
+              </a:spcBef>
+              <a:buNone/>
+              <a:defRPr sz="900">
+                <a:solidFill>
+                  <a:srgbClr val="2D58AC"/>
+                </a:solidFill>
+                <a:latin typeface="Gill Sans"/>
+                <a:ea typeface="Gill Sans"/>
+                <a:cs typeface="Gill Sans"/>
+                <a:sym typeface="Gill Sans"/>
+              </a:defRPr>
+            </a:lvl8pPr>
+            <a:lvl9pPr marL="0" lvl="8" indent="0" algn="r">
+              <a:spcBef>
+                <a:spcPts val="0"/>
+              </a:spcBef>
+              <a:buNone/>
+              <a:defRPr sz="900">
+                <a:solidFill>
+                  <a:srgbClr val="2D58AC"/>
+                </a:solidFill>
+                <a:latin typeface="Gill Sans"/>
+                <a:ea typeface="Gill Sans"/>
+                <a:cs typeface="Gill Sans"/>
+                <a:sym typeface="Gill Sans"/>
+              </a:defRPr>
+            </a:lvl9pPr>
+          </a:lstStyle>
+          <a:p>
+            <a:pPr marL="0" lvl="0" indent="0" algn="r" rtl="0">
+              <a:spcBef>
+                <a:spcPts val="0"/>
+              </a:spcBef>
+              <a:spcAft>
+                <a:spcPts val="0"/>
+              </a:spcAft>
+              <a:buNone/>
+            </a:pPr>
+            <a:fld id="{00000000-1234-1234-1234-123412341234}" type="slidenum">
+              <a:rPr lang="en-US"/>
+              <a:t>‹#›</a:t>
+            </a:fld>
+            <a:endParaRPr/>
+          </a:p>
+        </p:txBody>
+      </p:sp>
+    </p:spTree>
+  </p:cSld>
+  <p:clrMapOvr>
+    <a:masterClrMapping/>
+  </p:clrMapOvr>
+</p:sldLayout>
+</file>
+
+<file path=ppt/slideLayouts/slideLayout20.xml><?xml version="1.0" encoding="utf-8"?>
 <p:sldLayout xmlns:a="http://schemas.openxmlformats.org/drawingml/2006/main" xmlns:r="http://schemas.openxmlformats.org/officeDocument/2006/relationships" xmlns:p="http://schemas.openxmlformats.org/presentationml/2006/main" matchingName="2_Content with Caption">
   <p:cSld name="2_Content with Caption">
     <p:spTree>
@@ -13532,7 +12863,7 @@
 </p:sldLayout>
 </file>
 
-<file path=ppt/slideLayouts/slideLayout22.xml><?xml version="1.0" encoding="utf-8"?>
+<file path=ppt/slideLayouts/slideLayout21.xml><?xml version="1.0" encoding="utf-8"?>
 <p:sldLayout xmlns:a="http://schemas.openxmlformats.org/drawingml/2006/main" xmlns:r="http://schemas.openxmlformats.org/officeDocument/2006/relationships" xmlns:p="http://schemas.openxmlformats.org/presentationml/2006/main" matchingName="2_Picture with Caption">
   <p:cSld name="2_Picture with Caption">
     <p:spTree>
@@ -14279,7 +13610,7 @@
 </p:sldLayout>
 </file>
 
-<file path=ppt/slideLayouts/slideLayout23.xml><?xml version="1.0" encoding="utf-8"?>
+<file path=ppt/slideLayouts/slideLayout22.xml><?xml version="1.0" encoding="utf-8"?>
 <p:sldLayout xmlns:a="http://schemas.openxmlformats.org/drawingml/2006/main" xmlns:r="http://schemas.openxmlformats.org/officeDocument/2006/relationships" xmlns:p="http://schemas.openxmlformats.org/presentationml/2006/main" matchingName="2_Title and Vertical Text">
   <p:cSld name="2_Title and Vertical Text">
     <p:spTree>
@@ -15043,7 +14374,7 @@
 </p:sldLayout>
 </file>
 
-<file path=ppt/slideLayouts/slideLayout24.xml><?xml version="1.0" encoding="utf-8"?>
+<file path=ppt/slideLayouts/slideLayout23.xml><?xml version="1.0" encoding="utf-8"?>
 <p:sldLayout xmlns:a="http://schemas.openxmlformats.org/drawingml/2006/main" xmlns:r="http://schemas.openxmlformats.org/officeDocument/2006/relationships" xmlns:p="http://schemas.openxmlformats.org/presentationml/2006/main" matchingName="2_Vertical Title and Text">
   <p:cSld name="2_Vertical Title and Text">
     <p:spTree>
@@ -15877,7 +15208,7 @@
 </p:sldLayout>
 </file>
 
-<file path=ppt/slideLayouts/slideLayout25.xml><?xml version="1.0" encoding="utf-8"?>
+<file path=ppt/slideLayouts/slideLayout24.xml><?xml version="1.0" encoding="utf-8"?>
 <p:sldLayout xmlns:a="http://schemas.openxmlformats.org/drawingml/2006/main" xmlns:r="http://schemas.openxmlformats.org/officeDocument/2006/relationships" xmlns:p="http://schemas.openxmlformats.org/presentationml/2006/main" matchingName="Title and body" type="tx">
   <p:cSld name="TITLE_AND_BODY">
     <p:spTree>
@@ -16240,841 +15571,6 @@
 </file>
 
 <file path=ppt/slideLayouts/slideLayout3.xml><?xml version="1.0" encoding="utf-8"?>
-<p:sldLayout xmlns:a="http://schemas.openxmlformats.org/drawingml/2006/main" xmlns:r="http://schemas.openxmlformats.org/officeDocument/2006/relationships" xmlns:p="http://schemas.openxmlformats.org/presentationml/2006/main" matchingName="Title Slide" type="title">
-  <p:cSld name="TITLE">
-    <p:spTree>
-      <p:nvGrpSpPr>
-        <p:cNvPr id="1" name="Shape 36"/>
-        <p:cNvGrpSpPr/>
-        <p:nvPr/>
-      </p:nvGrpSpPr>
-      <p:grpSpPr>
-        <a:xfrm>
-          <a:off x="0" y="0"/>
-          <a:ext cx="0" cy="0"/>
-          <a:chOff x="0" y="0"/>
-          <a:chExt cx="0" cy="0"/>
-        </a:xfrm>
-      </p:grpSpPr>
-      <p:sp>
-        <p:nvSpPr>
-          <p:cNvPr id="37" name="Google Shape;37;p6"/>
-          <p:cNvSpPr/>
-          <p:nvPr/>
-        </p:nvSpPr>
-        <p:spPr>
-          <a:xfrm>
-            <a:off x="446534" y="3085765"/>
-            <a:ext cx="11262866" cy="3304800"/>
-          </a:xfrm>
-          <a:prstGeom prst="rect">
-            <a:avLst/>
-          </a:prstGeom>
-          <a:solidFill>
-            <a:schemeClr val="accent1"/>
-          </a:solidFill>
-          <a:ln>
-            <a:noFill/>
-          </a:ln>
-        </p:spPr>
-        <p:txBody>
-          <a:bodyPr spcFirstLastPara="1" wrap="square" lIns="91425" tIns="91425" rIns="91425" bIns="91425" anchor="ctr" anchorCtr="0">
-            <a:noAutofit/>
-          </a:bodyPr>
-          <a:lstStyle/>
-          <a:p>
-            <a:pPr marL="0" lvl="0" indent="0" algn="l" rtl="0">
-              <a:spcBef>
-                <a:spcPts val="0"/>
-              </a:spcBef>
-              <a:spcAft>
-                <a:spcPts val="0"/>
-              </a:spcAft>
-              <a:buNone/>
-            </a:pPr>
-            <a:endParaRPr/>
-          </a:p>
-        </p:txBody>
-      </p:sp>
-      <p:sp>
-        <p:nvSpPr>
-          <p:cNvPr id="38" name="Google Shape;38;p6"/>
-          <p:cNvSpPr txBox="1">
-            <a:spLocks noGrp="1"/>
-          </p:cNvSpPr>
-          <p:nvPr>
-            <p:ph type="ctrTitle"/>
-          </p:nvPr>
-        </p:nvSpPr>
-        <p:spPr>
-          <a:xfrm>
-            <a:off x="581191" y="1020431"/>
-            <a:ext cx="10993549" cy="1475013"/>
-          </a:xfrm>
-          <a:prstGeom prst="rect">
-            <a:avLst/>
-          </a:prstGeom>
-          <a:noFill/>
-          <a:ln>
-            <a:noFill/>
-          </a:ln>
-        </p:spPr>
-        <p:txBody>
-          <a:bodyPr spcFirstLastPara="1" wrap="square" lIns="91425" tIns="45700" rIns="91425" bIns="45700" anchor="b" anchorCtr="0">
-            <a:normAutofit/>
-          </a:bodyPr>
-          <a:lstStyle>
-            <a:lvl1pPr lvl="0" algn="l">
-              <a:spcBef>
-                <a:spcPts val="0"/>
-              </a:spcBef>
-              <a:spcAft>
-                <a:spcPts val="0"/>
-              </a:spcAft>
-              <a:buClr>
-                <a:schemeClr val="accent1"/>
-              </a:buClr>
-              <a:buSzPts val="3600"/>
-              <a:buFont typeface="Verdana"/>
-              <a:buNone/>
-              <a:defRPr sz="3600">
-                <a:solidFill>
-                  <a:schemeClr val="accent1"/>
-                </a:solidFill>
-              </a:defRPr>
-            </a:lvl1pPr>
-            <a:lvl2pPr lvl="1" algn="l">
-              <a:spcBef>
-                <a:spcPts val="0"/>
-              </a:spcBef>
-              <a:spcAft>
-                <a:spcPts val="0"/>
-              </a:spcAft>
-              <a:buSzPts val="1400"/>
-              <a:buNone/>
-              <a:defRPr/>
-            </a:lvl2pPr>
-            <a:lvl3pPr lvl="2" algn="l">
-              <a:spcBef>
-                <a:spcPts val="0"/>
-              </a:spcBef>
-              <a:spcAft>
-                <a:spcPts val="0"/>
-              </a:spcAft>
-              <a:buSzPts val="1400"/>
-              <a:buNone/>
-              <a:defRPr/>
-            </a:lvl3pPr>
-            <a:lvl4pPr lvl="3" algn="l">
-              <a:spcBef>
-                <a:spcPts val="0"/>
-              </a:spcBef>
-              <a:spcAft>
-                <a:spcPts val="0"/>
-              </a:spcAft>
-              <a:buSzPts val="1400"/>
-              <a:buNone/>
-              <a:defRPr/>
-            </a:lvl4pPr>
-            <a:lvl5pPr lvl="4" algn="l">
-              <a:spcBef>
-                <a:spcPts val="0"/>
-              </a:spcBef>
-              <a:spcAft>
-                <a:spcPts val="0"/>
-              </a:spcAft>
-              <a:buSzPts val="1400"/>
-              <a:buNone/>
-              <a:defRPr/>
-            </a:lvl5pPr>
-            <a:lvl6pPr lvl="5" algn="l">
-              <a:spcBef>
-                <a:spcPts val="0"/>
-              </a:spcBef>
-              <a:spcAft>
-                <a:spcPts val="0"/>
-              </a:spcAft>
-              <a:buSzPts val="1400"/>
-              <a:buNone/>
-              <a:defRPr/>
-            </a:lvl6pPr>
-            <a:lvl7pPr lvl="6" algn="l">
-              <a:spcBef>
-                <a:spcPts val="0"/>
-              </a:spcBef>
-              <a:spcAft>
-                <a:spcPts val="0"/>
-              </a:spcAft>
-              <a:buSzPts val="1400"/>
-              <a:buNone/>
-              <a:defRPr/>
-            </a:lvl7pPr>
-            <a:lvl8pPr lvl="7" algn="l">
-              <a:spcBef>
-                <a:spcPts val="0"/>
-              </a:spcBef>
-              <a:spcAft>
-                <a:spcPts val="0"/>
-              </a:spcAft>
-              <a:buSzPts val="1400"/>
-              <a:buNone/>
-              <a:defRPr/>
-            </a:lvl8pPr>
-            <a:lvl9pPr lvl="8" algn="l">
-              <a:spcBef>
-                <a:spcPts val="0"/>
-              </a:spcBef>
-              <a:spcAft>
-                <a:spcPts val="0"/>
-              </a:spcAft>
-              <a:buSzPts val="1400"/>
-              <a:buNone/>
-              <a:defRPr/>
-            </a:lvl9pPr>
-          </a:lstStyle>
-          <a:p>
-            <a:endParaRPr/>
-          </a:p>
-        </p:txBody>
-      </p:sp>
-      <p:sp>
-        <p:nvSpPr>
-          <p:cNvPr id="39" name="Google Shape;39;p6"/>
-          <p:cNvSpPr txBox="1">
-            <a:spLocks noGrp="1"/>
-          </p:cNvSpPr>
-          <p:nvPr>
-            <p:ph type="subTitle" idx="1"/>
-          </p:nvPr>
-        </p:nvSpPr>
-        <p:spPr>
-          <a:xfrm>
-            <a:off x="581194" y="2495445"/>
-            <a:ext cx="10993546" cy="590321"/>
-          </a:xfrm>
-          <a:prstGeom prst="rect">
-            <a:avLst/>
-          </a:prstGeom>
-          <a:noFill/>
-          <a:ln>
-            <a:noFill/>
-          </a:ln>
-        </p:spPr>
-        <p:txBody>
-          <a:bodyPr spcFirstLastPara="1" wrap="square" lIns="91425" tIns="45700" rIns="91425" bIns="45700" anchor="t" anchorCtr="0">
-            <a:normAutofit/>
-          </a:bodyPr>
-          <a:lstStyle>
-            <a:lvl1pPr lvl="0" algn="l">
-              <a:spcBef>
-                <a:spcPts val="320"/>
-              </a:spcBef>
-              <a:spcAft>
-                <a:spcPts val="0"/>
-              </a:spcAft>
-              <a:buSzPts val="1472"/>
-              <a:buNone/>
-              <a:defRPr sz="1600" cap="none">
-                <a:solidFill>
-                  <a:schemeClr val="accent2"/>
-                </a:solidFill>
-                <a:latin typeface="Verdana"/>
-                <a:ea typeface="Verdana"/>
-                <a:cs typeface="Verdana"/>
-                <a:sym typeface="Verdana"/>
-              </a:defRPr>
-            </a:lvl1pPr>
-            <a:lvl2pPr lvl="1" algn="ctr">
-              <a:spcBef>
-                <a:spcPts val="600"/>
-              </a:spcBef>
-              <a:spcAft>
-                <a:spcPts val="0"/>
-              </a:spcAft>
-              <a:buSzPts val="1472"/>
-              <a:buNone/>
-              <a:defRPr>
-                <a:solidFill>
-                  <a:srgbClr val="888888"/>
-                </a:solidFill>
-              </a:defRPr>
-            </a:lvl2pPr>
-            <a:lvl3pPr lvl="2" algn="ctr">
-              <a:spcBef>
-                <a:spcPts val="600"/>
-              </a:spcBef>
-              <a:spcAft>
-                <a:spcPts val="0"/>
-              </a:spcAft>
-              <a:buSzPts val="1288"/>
-              <a:buNone/>
-              <a:defRPr>
-                <a:solidFill>
-                  <a:srgbClr val="888888"/>
-                </a:solidFill>
-              </a:defRPr>
-            </a:lvl3pPr>
-            <a:lvl4pPr lvl="3" algn="ctr">
-              <a:spcBef>
-                <a:spcPts val="600"/>
-              </a:spcBef>
-              <a:spcAft>
-                <a:spcPts val="0"/>
-              </a:spcAft>
-              <a:buSzPts val="1104"/>
-              <a:buNone/>
-              <a:defRPr>
-                <a:solidFill>
-                  <a:srgbClr val="888888"/>
-                </a:solidFill>
-              </a:defRPr>
-            </a:lvl4pPr>
-            <a:lvl5pPr lvl="4" algn="ctr">
-              <a:spcBef>
-                <a:spcPts val="600"/>
-              </a:spcBef>
-              <a:spcAft>
-                <a:spcPts val="0"/>
-              </a:spcAft>
-              <a:buSzPts val="1104"/>
-              <a:buNone/>
-              <a:defRPr>
-                <a:solidFill>
-                  <a:srgbClr val="888888"/>
-                </a:solidFill>
-              </a:defRPr>
-            </a:lvl5pPr>
-            <a:lvl6pPr lvl="5" algn="ctr">
-              <a:spcBef>
-                <a:spcPts val="600"/>
-              </a:spcBef>
-              <a:spcAft>
-                <a:spcPts val="0"/>
-              </a:spcAft>
-              <a:buSzPts val="1104"/>
-              <a:buNone/>
-              <a:defRPr>
-                <a:solidFill>
-                  <a:srgbClr val="888888"/>
-                </a:solidFill>
-              </a:defRPr>
-            </a:lvl6pPr>
-            <a:lvl7pPr lvl="6" algn="ctr">
-              <a:spcBef>
-                <a:spcPts val="600"/>
-              </a:spcBef>
-              <a:spcAft>
-                <a:spcPts val="0"/>
-              </a:spcAft>
-              <a:buSzPts val="1104"/>
-              <a:buNone/>
-              <a:defRPr>
-                <a:solidFill>
-                  <a:srgbClr val="888888"/>
-                </a:solidFill>
-              </a:defRPr>
-            </a:lvl7pPr>
-            <a:lvl8pPr lvl="7" algn="ctr">
-              <a:spcBef>
-                <a:spcPts val="600"/>
-              </a:spcBef>
-              <a:spcAft>
-                <a:spcPts val="0"/>
-              </a:spcAft>
-              <a:buSzPts val="1104"/>
-              <a:buNone/>
-              <a:defRPr>
-                <a:solidFill>
-                  <a:srgbClr val="888888"/>
-                </a:solidFill>
-              </a:defRPr>
-            </a:lvl8pPr>
-            <a:lvl9pPr lvl="8" algn="ctr">
-              <a:spcBef>
-                <a:spcPts val="600"/>
-              </a:spcBef>
-              <a:spcAft>
-                <a:spcPts val="600"/>
-              </a:spcAft>
-              <a:buSzPts val="1104"/>
-              <a:buNone/>
-              <a:defRPr>
-                <a:solidFill>
-                  <a:srgbClr val="888888"/>
-                </a:solidFill>
-              </a:defRPr>
-            </a:lvl9pPr>
-          </a:lstStyle>
-          <a:p>
-            <a:endParaRPr/>
-          </a:p>
-        </p:txBody>
-      </p:sp>
-      <p:sp>
-        <p:nvSpPr>
-          <p:cNvPr id="40" name="Google Shape;40;p6"/>
-          <p:cNvSpPr txBox="1">
-            <a:spLocks noGrp="1"/>
-          </p:cNvSpPr>
-          <p:nvPr>
-            <p:ph type="dt" idx="10"/>
-          </p:nvPr>
-        </p:nvSpPr>
-        <p:spPr>
-          <a:xfrm>
-            <a:off x="7605951" y="5956137"/>
-            <a:ext cx="2844800" cy="365125"/>
-          </a:xfrm>
-          <a:prstGeom prst="rect">
-            <a:avLst/>
-          </a:prstGeom>
-          <a:noFill/>
-          <a:ln>
-            <a:noFill/>
-          </a:ln>
-        </p:spPr>
-        <p:txBody>
-          <a:bodyPr spcFirstLastPara="1" wrap="square" lIns="91425" tIns="45700" rIns="91425" bIns="45700" anchor="ctr" anchorCtr="0">
-            <a:noAutofit/>
-          </a:bodyPr>
-          <a:lstStyle>
-            <a:lvl1pPr lvl="0" algn="r">
-              <a:spcBef>
-                <a:spcPts val="0"/>
-              </a:spcBef>
-              <a:spcAft>
-                <a:spcPts val="0"/>
-              </a:spcAft>
-              <a:buSzPts val="1400"/>
-              <a:buNone/>
-              <a:defRPr>
-                <a:solidFill>
-                  <a:srgbClr val="2D58AC"/>
-                </a:solidFill>
-              </a:defRPr>
-            </a:lvl1pPr>
-            <a:lvl2pPr lvl="1" algn="l">
-              <a:spcBef>
-                <a:spcPts val="0"/>
-              </a:spcBef>
-              <a:spcAft>
-                <a:spcPts val="0"/>
-              </a:spcAft>
-              <a:buSzPts val="1400"/>
-              <a:buNone/>
-              <a:defRPr/>
-            </a:lvl2pPr>
-            <a:lvl3pPr lvl="2" algn="l">
-              <a:spcBef>
-                <a:spcPts val="0"/>
-              </a:spcBef>
-              <a:spcAft>
-                <a:spcPts val="0"/>
-              </a:spcAft>
-              <a:buSzPts val="1400"/>
-              <a:buNone/>
-              <a:defRPr/>
-            </a:lvl3pPr>
-            <a:lvl4pPr lvl="3" algn="l">
-              <a:spcBef>
-                <a:spcPts val="0"/>
-              </a:spcBef>
-              <a:spcAft>
-                <a:spcPts val="0"/>
-              </a:spcAft>
-              <a:buSzPts val="1400"/>
-              <a:buNone/>
-              <a:defRPr/>
-            </a:lvl4pPr>
-            <a:lvl5pPr lvl="4" algn="l">
-              <a:spcBef>
-                <a:spcPts val="0"/>
-              </a:spcBef>
-              <a:spcAft>
-                <a:spcPts val="0"/>
-              </a:spcAft>
-              <a:buSzPts val="1400"/>
-              <a:buNone/>
-              <a:defRPr/>
-            </a:lvl5pPr>
-            <a:lvl6pPr lvl="5" algn="l">
-              <a:spcBef>
-                <a:spcPts val="0"/>
-              </a:spcBef>
-              <a:spcAft>
-                <a:spcPts val="0"/>
-              </a:spcAft>
-              <a:buSzPts val="1400"/>
-              <a:buNone/>
-              <a:defRPr/>
-            </a:lvl6pPr>
-            <a:lvl7pPr lvl="6" algn="l">
-              <a:spcBef>
-                <a:spcPts val="0"/>
-              </a:spcBef>
-              <a:spcAft>
-                <a:spcPts val="0"/>
-              </a:spcAft>
-              <a:buSzPts val="1400"/>
-              <a:buNone/>
-              <a:defRPr/>
-            </a:lvl7pPr>
-            <a:lvl8pPr lvl="7" algn="l">
-              <a:spcBef>
-                <a:spcPts val="0"/>
-              </a:spcBef>
-              <a:spcAft>
-                <a:spcPts val="0"/>
-              </a:spcAft>
-              <a:buSzPts val="1400"/>
-              <a:buNone/>
-              <a:defRPr/>
-            </a:lvl8pPr>
-            <a:lvl9pPr lvl="8" algn="l">
-              <a:spcBef>
-                <a:spcPts val="0"/>
-              </a:spcBef>
-              <a:spcAft>
-                <a:spcPts val="0"/>
-              </a:spcAft>
-              <a:buSzPts val="1400"/>
-              <a:buNone/>
-              <a:defRPr/>
-            </a:lvl9pPr>
-          </a:lstStyle>
-          <a:p>
-            <a:endParaRPr/>
-          </a:p>
-        </p:txBody>
-      </p:sp>
-      <p:sp>
-        <p:nvSpPr>
-          <p:cNvPr id="41" name="Google Shape;41;p6"/>
-          <p:cNvSpPr txBox="1">
-            <a:spLocks noGrp="1"/>
-          </p:cNvSpPr>
-          <p:nvPr>
-            <p:ph type="ftr" idx="11"/>
-          </p:nvPr>
-        </p:nvSpPr>
-        <p:spPr>
-          <a:xfrm>
-            <a:off x="581192" y="5951811"/>
-            <a:ext cx="6917210" cy="365125"/>
-          </a:xfrm>
-          <a:prstGeom prst="rect">
-            <a:avLst/>
-          </a:prstGeom>
-          <a:noFill/>
-          <a:ln>
-            <a:noFill/>
-          </a:ln>
-        </p:spPr>
-        <p:txBody>
-          <a:bodyPr spcFirstLastPara="1" wrap="square" lIns="91425" tIns="45700" rIns="91425" bIns="45700" anchor="ctr" anchorCtr="0">
-            <a:noAutofit/>
-          </a:bodyPr>
-          <a:lstStyle>
-            <a:lvl1pPr lvl="0" algn="l">
-              <a:spcBef>
-                <a:spcPts val="0"/>
-              </a:spcBef>
-              <a:spcAft>
-                <a:spcPts val="0"/>
-              </a:spcAft>
-              <a:buSzPts val="1400"/>
-              <a:buNone/>
-              <a:defRPr>
-                <a:solidFill>
-                  <a:srgbClr val="2D58AC"/>
-                </a:solidFill>
-              </a:defRPr>
-            </a:lvl1pPr>
-            <a:lvl2pPr lvl="1" algn="l">
-              <a:spcBef>
-                <a:spcPts val="0"/>
-              </a:spcBef>
-              <a:spcAft>
-                <a:spcPts val="0"/>
-              </a:spcAft>
-              <a:buSzPts val="1400"/>
-              <a:buNone/>
-              <a:defRPr/>
-            </a:lvl2pPr>
-            <a:lvl3pPr lvl="2" algn="l">
-              <a:spcBef>
-                <a:spcPts val="0"/>
-              </a:spcBef>
-              <a:spcAft>
-                <a:spcPts val="0"/>
-              </a:spcAft>
-              <a:buSzPts val="1400"/>
-              <a:buNone/>
-              <a:defRPr/>
-            </a:lvl3pPr>
-            <a:lvl4pPr lvl="3" algn="l">
-              <a:spcBef>
-                <a:spcPts val="0"/>
-              </a:spcBef>
-              <a:spcAft>
-                <a:spcPts val="0"/>
-              </a:spcAft>
-              <a:buSzPts val="1400"/>
-              <a:buNone/>
-              <a:defRPr/>
-            </a:lvl4pPr>
-            <a:lvl5pPr lvl="4" algn="l">
-              <a:spcBef>
-                <a:spcPts val="0"/>
-              </a:spcBef>
-              <a:spcAft>
-                <a:spcPts val="0"/>
-              </a:spcAft>
-              <a:buSzPts val="1400"/>
-              <a:buNone/>
-              <a:defRPr/>
-            </a:lvl5pPr>
-            <a:lvl6pPr lvl="5" algn="l">
-              <a:spcBef>
-                <a:spcPts val="0"/>
-              </a:spcBef>
-              <a:spcAft>
-                <a:spcPts val="0"/>
-              </a:spcAft>
-              <a:buSzPts val="1400"/>
-              <a:buNone/>
-              <a:defRPr/>
-            </a:lvl6pPr>
-            <a:lvl7pPr lvl="6" algn="l">
-              <a:spcBef>
-                <a:spcPts val="0"/>
-              </a:spcBef>
-              <a:spcAft>
-                <a:spcPts val="0"/>
-              </a:spcAft>
-              <a:buSzPts val="1400"/>
-              <a:buNone/>
-              <a:defRPr/>
-            </a:lvl7pPr>
-            <a:lvl8pPr lvl="7" algn="l">
-              <a:spcBef>
-                <a:spcPts val="0"/>
-              </a:spcBef>
-              <a:spcAft>
-                <a:spcPts val="0"/>
-              </a:spcAft>
-              <a:buSzPts val="1400"/>
-              <a:buNone/>
-              <a:defRPr/>
-            </a:lvl8pPr>
-            <a:lvl9pPr lvl="8" algn="l">
-              <a:spcBef>
-                <a:spcPts val="0"/>
-              </a:spcBef>
-              <a:spcAft>
-                <a:spcPts val="0"/>
-              </a:spcAft>
-              <a:buSzPts val="1400"/>
-              <a:buNone/>
-              <a:defRPr/>
-            </a:lvl9pPr>
-          </a:lstStyle>
-          <a:p>
-            <a:endParaRPr/>
-          </a:p>
-        </p:txBody>
-      </p:sp>
-      <p:sp>
-        <p:nvSpPr>
-          <p:cNvPr id="42" name="Google Shape;42;p6"/>
-          <p:cNvSpPr txBox="1">
-            <a:spLocks noGrp="1"/>
-          </p:cNvSpPr>
-          <p:nvPr>
-            <p:ph type="sldNum" idx="12"/>
-          </p:nvPr>
-        </p:nvSpPr>
-        <p:spPr>
-          <a:xfrm>
-            <a:off x="10558300" y="5956137"/>
-            <a:ext cx="1016440" cy="365125"/>
-          </a:xfrm>
-          <a:prstGeom prst="rect">
-            <a:avLst/>
-          </a:prstGeom>
-          <a:noFill/>
-          <a:ln>
-            <a:noFill/>
-          </a:ln>
-        </p:spPr>
-        <p:txBody>
-          <a:bodyPr spcFirstLastPara="1" wrap="square" lIns="91425" tIns="45700" rIns="91425" bIns="45700" anchor="ctr" anchorCtr="0">
-            <a:noAutofit/>
-          </a:bodyPr>
-          <a:lstStyle>
-            <a:lvl1pPr marL="0" lvl="0" indent="0" algn="r">
-              <a:spcBef>
-                <a:spcPts val="0"/>
-              </a:spcBef>
-              <a:buNone/>
-              <a:defRPr sz="900">
-                <a:solidFill>
-                  <a:srgbClr val="2D58AC"/>
-                </a:solidFill>
-                <a:latin typeface="Gill Sans"/>
-                <a:ea typeface="Gill Sans"/>
-                <a:cs typeface="Gill Sans"/>
-                <a:sym typeface="Gill Sans"/>
-              </a:defRPr>
-            </a:lvl1pPr>
-            <a:lvl2pPr marL="0" lvl="1" indent="0" algn="r">
-              <a:spcBef>
-                <a:spcPts val="0"/>
-              </a:spcBef>
-              <a:buNone/>
-              <a:defRPr sz="900">
-                <a:solidFill>
-                  <a:srgbClr val="2D58AC"/>
-                </a:solidFill>
-                <a:latin typeface="Gill Sans"/>
-                <a:ea typeface="Gill Sans"/>
-                <a:cs typeface="Gill Sans"/>
-                <a:sym typeface="Gill Sans"/>
-              </a:defRPr>
-            </a:lvl2pPr>
-            <a:lvl3pPr marL="0" lvl="2" indent="0" algn="r">
-              <a:spcBef>
-                <a:spcPts val="0"/>
-              </a:spcBef>
-              <a:buNone/>
-              <a:defRPr sz="900">
-                <a:solidFill>
-                  <a:srgbClr val="2D58AC"/>
-                </a:solidFill>
-                <a:latin typeface="Gill Sans"/>
-                <a:ea typeface="Gill Sans"/>
-                <a:cs typeface="Gill Sans"/>
-                <a:sym typeface="Gill Sans"/>
-              </a:defRPr>
-            </a:lvl3pPr>
-            <a:lvl4pPr marL="0" lvl="3" indent="0" algn="r">
-              <a:spcBef>
-                <a:spcPts val="0"/>
-              </a:spcBef>
-              <a:buNone/>
-              <a:defRPr sz="900">
-                <a:solidFill>
-                  <a:srgbClr val="2D58AC"/>
-                </a:solidFill>
-                <a:latin typeface="Gill Sans"/>
-                <a:ea typeface="Gill Sans"/>
-                <a:cs typeface="Gill Sans"/>
-                <a:sym typeface="Gill Sans"/>
-              </a:defRPr>
-            </a:lvl4pPr>
-            <a:lvl5pPr marL="0" lvl="4" indent="0" algn="r">
-              <a:spcBef>
-                <a:spcPts val="0"/>
-              </a:spcBef>
-              <a:buNone/>
-              <a:defRPr sz="900">
-                <a:solidFill>
-                  <a:srgbClr val="2D58AC"/>
-                </a:solidFill>
-                <a:latin typeface="Gill Sans"/>
-                <a:ea typeface="Gill Sans"/>
-                <a:cs typeface="Gill Sans"/>
-                <a:sym typeface="Gill Sans"/>
-              </a:defRPr>
-            </a:lvl5pPr>
-            <a:lvl6pPr marL="0" lvl="5" indent="0" algn="r">
-              <a:spcBef>
-                <a:spcPts val="0"/>
-              </a:spcBef>
-              <a:buNone/>
-              <a:defRPr sz="900">
-                <a:solidFill>
-                  <a:srgbClr val="2D58AC"/>
-                </a:solidFill>
-                <a:latin typeface="Gill Sans"/>
-                <a:ea typeface="Gill Sans"/>
-                <a:cs typeface="Gill Sans"/>
-                <a:sym typeface="Gill Sans"/>
-              </a:defRPr>
-            </a:lvl6pPr>
-            <a:lvl7pPr marL="0" lvl="6" indent="0" algn="r">
-              <a:spcBef>
-                <a:spcPts val="0"/>
-              </a:spcBef>
-              <a:buNone/>
-              <a:defRPr sz="900">
-                <a:solidFill>
-                  <a:srgbClr val="2D58AC"/>
-                </a:solidFill>
-                <a:latin typeface="Gill Sans"/>
-                <a:ea typeface="Gill Sans"/>
-                <a:cs typeface="Gill Sans"/>
-                <a:sym typeface="Gill Sans"/>
-              </a:defRPr>
-            </a:lvl7pPr>
-            <a:lvl8pPr marL="0" lvl="7" indent="0" algn="r">
-              <a:spcBef>
-                <a:spcPts val="0"/>
-              </a:spcBef>
-              <a:buNone/>
-              <a:defRPr sz="900">
-                <a:solidFill>
-                  <a:srgbClr val="2D58AC"/>
-                </a:solidFill>
-                <a:latin typeface="Gill Sans"/>
-                <a:ea typeface="Gill Sans"/>
-                <a:cs typeface="Gill Sans"/>
-                <a:sym typeface="Gill Sans"/>
-              </a:defRPr>
-            </a:lvl8pPr>
-            <a:lvl9pPr marL="0" lvl="8" indent="0" algn="r">
-              <a:spcBef>
-                <a:spcPts val="0"/>
-              </a:spcBef>
-              <a:buNone/>
-              <a:defRPr sz="900">
-                <a:solidFill>
-                  <a:srgbClr val="2D58AC"/>
-                </a:solidFill>
-                <a:latin typeface="Gill Sans"/>
-                <a:ea typeface="Gill Sans"/>
-                <a:cs typeface="Gill Sans"/>
-                <a:sym typeface="Gill Sans"/>
-              </a:defRPr>
-            </a:lvl9pPr>
-          </a:lstStyle>
-          <a:p>
-            <a:pPr marL="0" lvl="0" indent="0" algn="r" rtl="0">
-              <a:spcBef>
-                <a:spcPts val="0"/>
-              </a:spcBef>
-              <a:spcAft>
-                <a:spcPts val="0"/>
-              </a:spcAft>
-              <a:buNone/>
-            </a:pPr>
-            <a:fld id="{00000000-1234-1234-1234-123412341234}" type="slidenum">
-              <a:rPr lang="en-US"/>
-              <a:t>‹#›</a:t>
-            </a:fld>
-            <a:endParaRPr/>
-          </a:p>
-        </p:txBody>
-      </p:sp>
-    </p:spTree>
-  </p:cSld>
-  <p:clrMapOvr>
-    <a:masterClrMapping/>
-  </p:clrMapOvr>
-</p:sldLayout>
-</file>
-
-<file path=ppt/slideLayouts/slideLayout4.xml><?xml version="1.0" encoding="utf-8"?>
 <p:sldLayout xmlns:a="http://schemas.openxmlformats.org/drawingml/2006/main" xmlns:r="http://schemas.openxmlformats.org/officeDocument/2006/relationships" xmlns:p="http://schemas.openxmlformats.org/presentationml/2006/main" matchingName="Section Header" type="secHead">
   <p:cSld name="SECTION_HEADER">
     <p:spTree>
@@ -17909,7 +16405,7 @@
 </p:sldLayout>
 </file>
 
-<file path=ppt/slideLayouts/slideLayout5.xml><?xml version="1.0" encoding="utf-8"?>
+<file path=ppt/slideLayouts/slideLayout4.xml><?xml version="1.0" encoding="utf-8"?>
 <p:sldLayout xmlns:a="http://schemas.openxmlformats.org/drawingml/2006/main" xmlns:r="http://schemas.openxmlformats.org/officeDocument/2006/relationships" xmlns:p="http://schemas.openxmlformats.org/presentationml/2006/main" matchingName="Comparison" type="twoTxTwoObj">
   <p:cSld name="TWO_OBJECTS_WITH_TEXT">
     <p:spTree>
@@ -19084,7 +17580,7 @@
 </p:sldLayout>
 </file>
 
-<file path=ppt/slideLayouts/slideLayout6.xml><?xml version="1.0" encoding="utf-8"?>
+<file path=ppt/slideLayouts/slideLayout5.xml><?xml version="1.0" encoding="utf-8"?>
 <p:sldLayout xmlns:a="http://schemas.openxmlformats.org/drawingml/2006/main" xmlns:r="http://schemas.openxmlformats.org/officeDocument/2006/relationships" xmlns:p="http://schemas.openxmlformats.org/presentationml/2006/main" matchingName="Title Only" type="titleOnly">
   <p:cSld name="TITLE_ONLY">
     <p:spTree>
@@ -19661,7 +18157,7 @@
 </p:sldLayout>
 </file>
 
-<file path=ppt/slideLayouts/slideLayout7.xml><?xml version="1.0" encoding="utf-8"?>
+<file path=ppt/slideLayouts/slideLayout6.xml><?xml version="1.0" encoding="utf-8"?>
 <p:sldLayout xmlns:a="http://schemas.openxmlformats.org/drawingml/2006/main" xmlns:r="http://schemas.openxmlformats.org/officeDocument/2006/relationships" xmlns:p="http://schemas.openxmlformats.org/presentationml/2006/main" matchingName="Blank" type="blank">
   <p:cSld name="BLANK">
     <p:spTree>
@@ -20062,7 +18558,7 @@
 </p:sldLayout>
 </file>
 
-<file path=ppt/slideLayouts/slideLayout8.xml><?xml version="1.0" encoding="utf-8"?>
+<file path=ppt/slideLayouts/slideLayout7.xml><?xml version="1.0" encoding="utf-8"?>
 <p:sldLayout xmlns:a="http://schemas.openxmlformats.org/drawingml/2006/main" xmlns:r="http://schemas.openxmlformats.org/officeDocument/2006/relationships" xmlns:p="http://schemas.openxmlformats.org/presentationml/2006/main" matchingName="Content with Caption" type="objTx">
   <p:cSld name="OBJECT_WITH_CAPTION_TEXT">
     <p:spTree>
@@ -21050,7 +19546,7 @@
 </p:sldLayout>
 </file>
 
-<file path=ppt/slideLayouts/slideLayout9.xml><?xml version="1.0" encoding="utf-8"?>
+<file path=ppt/slideLayouts/slideLayout8.xml><?xml version="1.0" encoding="utf-8"?>
 <p:sldLayout xmlns:a="http://schemas.openxmlformats.org/drawingml/2006/main" xmlns:r="http://schemas.openxmlformats.org/officeDocument/2006/relationships" xmlns:p="http://schemas.openxmlformats.org/presentationml/2006/main" matchingName="Picture with Caption" type="picTx">
   <p:cSld name="PICTURE_WITH_CAPTION_TEXT">
     <p:spTree>
@@ -21634,6 +20130,716 @@
       <p:sp>
         <p:nvSpPr>
           <p:cNvPr id="99" name="Google Shape;99;p14"/>
+          <p:cNvSpPr txBox="1">
+            <a:spLocks noGrp="1"/>
+          </p:cNvSpPr>
+          <p:nvPr>
+            <p:ph type="sldNum" idx="12"/>
+          </p:nvPr>
+        </p:nvSpPr>
+        <p:spPr>
+          <a:xfrm>
+            <a:off x="10558300" y="5956137"/>
+            <a:ext cx="1052510" cy="365125"/>
+          </a:xfrm>
+          <a:prstGeom prst="rect">
+            <a:avLst/>
+          </a:prstGeom>
+          <a:noFill/>
+          <a:ln>
+            <a:noFill/>
+          </a:ln>
+        </p:spPr>
+        <p:txBody>
+          <a:bodyPr spcFirstLastPara="1" wrap="square" lIns="91425" tIns="45700" rIns="91425" bIns="45700" anchor="ctr" anchorCtr="0">
+            <a:noAutofit/>
+          </a:bodyPr>
+          <a:lstStyle>
+            <a:lvl1pPr marL="0" lvl="0" indent="0" algn="r">
+              <a:spcBef>
+                <a:spcPts val="0"/>
+              </a:spcBef>
+              <a:buNone/>
+              <a:defRPr/>
+            </a:lvl1pPr>
+            <a:lvl2pPr marL="0" lvl="1" indent="0" algn="r">
+              <a:spcBef>
+                <a:spcPts val="0"/>
+              </a:spcBef>
+              <a:buNone/>
+              <a:defRPr/>
+            </a:lvl2pPr>
+            <a:lvl3pPr marL="0" lvl="2" indent="0" algn="r">
+              <a:spcBef>
+                <a:spcPts val="0"/>
+              </a:spcBef>
+              <a:buNone/>
+              <a:defRPr/>
+            </a:lvl3pPr>
+            <a:lvl4pPr marL="0" lvl="3" indent="0" algn="r">
+              <a:spcBef>
+                <a:spcPts val="0"/>
+              </a:spcBef>
+              <a:buNone/>
+              <a:defRPr/>
+            </a:lvl4pPr>
+            <a:lvl5pPr marL="0" lvl="4" indent="0" algn="r">
+              <a:spcBef>
+                <a:spcPts val="0"/>
+              </a:spcBef>
+              <a:buNone/>
+              <a:defRPr/>
+            </a:lvl5pPr>
+            <a:lvl6pPr marL="0" lvl="5" indent="0" algn="r">
+              <a:spcBef>
+                <a:spcPts val="0"/>
+              </a:spcBef>
+              <a:buNone/>
+              <a:defRPr/>
+            </a:lvl6pPr>
+            <a:lvl7pPr marL="0" lvl="6" indent="0" algn="r">
+              <a:spcBef>
+                <a:spcPts val="0"/>
+              </a:spcBef>
+              <a:buNone/>
+              <a:defRPr/>
+            </a:lvl7pPr>
+            <a:lvl8pPr marL="0" lvl="7" indent="0" algn="r">
+              <a:spcBef>
+                <a:spcPts val="0"/>
+              </a:spcBef>
+              <a:buNone/>
+              <a:defRPr/>
+            </a:lvl8pPr>
+            <a:lvl9pPr marL="0" lvl="8" indent="0" algn="r">
+              <a:spcBef>
+                <a:spcPts val="0"/>
+              </a:spcBef>
+              <a:buNone/>
+              <a:defRPr/>
+            </a:lvl9pPr>
+          </a:lstStyle>
+          <a:p>
+            <a:pPr marL="0" lvl="0" indent="0" algn="r" rtl="0">
+              <a:spcBef>
+                <a:spcPts val="0"/>
+              </a:spcBef>
+              <a:spcAft>
+                <a:spcPts val="0"/>
+              </a:spcAft>
+              <a:buNone/>
+            </a:pPr>
+            <a:fld id="{00000000-1234-1234-1234-123412341234}" type="slidenum">
+              <a:rPr lang="en-US"/>
+              <a:t>‹#›</a:t>
+            </a:fld>
+            <a:endParaRPr/>
+          </a:p>
+        </p:txBody>
+      </p:sp>
+    </p:spTree>
+  </p:cSld>
+  <p:clrMapOvr>
+    <a:masterClrMapping/>
+  </p:clrMapOvr>
+</p:sldLayout>
+</file>
+
+<file path=ppt/slideLayouts/slideLayout9.xml><?xml version="1.0" encoding="utf-8"?>
+<p:sldLayout xmlns:a="http://schemas.openxmlformats.org/drawingml/2006/main" xmlns:r="http://schemas.openxmlformats.org/officeDocument/2006/relationships" xmlns:p="http://schemas.openxmlformats.org/presentationml/2006/main" matchingName="Title and Vertical Text" type="vertTx">
+  <p:cSld name="VERTICAL_TEXT">
+    <p:spTree>
+      <p:nvGrpSpPr>
+        <p:cNvPr id="1" name="Shape 100"/>
+        <p:cNvGrpSpPr/>
+        <p:nvPr/>
+      </p:nvGrpSpPr>
+      <p:grpSpPr>
+        <a:xfrm>
+          <a:off x="0" y="0"/>
+          <a:ext cx="0" cy="0"/>
+          <a:chOff x="0" y="0"/>
+          <a:chExt cx="0" cy="0"/>
+        </a:xfrm>
+      </p:grpSpPr>
+      <p:sp>
+        <p:nvSpPr>
+          <p:cNvPr id="101" name="Google Shape;101;p15"/>
+          <p:cNvSpPr/>
+          <p:nvPr/>
+        </p:nvSpPr>
+        <p:spPr>
+          <a:xfrm>
+            <a:off x="440286" y="614407"/>
+            <a:ext cx="11309338" cy="1189298"/>
+          </a:xfrm>
+          <a:prstGeom prst="rect">
+            <a:avLst/>
+          </a:prstGeom>
+          <a:solidFill>
+            <a:schemeClr val="accent1"/>
+          </a:solidFill>
+          <a:ln>
+            <a:noFill/>
+          </a:ln>
+        </p:spPr>
+        <p:txBody>
+          <a:bodyPr spcFirstLastPara="1" wrap="square" lIns="91425" tIns="91425" rIns="91425" bIns="91425" anchor="ctr" anchorCtr="0">
+            <a:noAutofit/>
+          </a:bodyPr>
+          <a:lstStyle/>
+          <a:p>
+            <a:pPr marL="0" lvl="0" indent="0" algn="l" rtl="0">
+              <a:spcBef>
+                <a:spcPts val="0"/>
+              </a:spcBef>
+              <a:spcAft>
+                <a:spcPts val="0"/>
+              </a:spcAft>
+              <a:buNone/>
+            </a:pPr>
+            <a:endParaRPr/>
+          </a:p>
+        </p:txBody>
+      </p:sp>
+      <p:sp>
+        <p:nvSpPr>
+          <p:cNvPr id="102" name="Google Shape;102;p15"/>
+          <p:cNvSpPr txBox="1">
+            <a:spLocks noGrp="1"/>
+          </p:cNvSpPr>
+          <p:nvPr>
+            <p:ph type="title"/>
+          </p:nvPr>
+        </p:nvSpPr>
+        <p:spPr>
+          <a:xfrm>
+            <a:off x="581192" y="702156"/>
+            <a:ext cx="11029616" cy="1013800"/>
+          </a:xfrm>
+          <a:prstGeom prst="rect">
+            <a:avLst/>
+          </a:prstGeom>
+          <a:noFill/>
+          <a:ln>
+            <a:noFill/>
+          </a:ln>
+        </p:spPr>
+        <p:txBody>
+          <a:bodyPr spcFirstLastPara="1" wrap="square" lIns="91425" tIns="45700" rIns="91425" bIns="45700" anchor="b" anchorCtr="0">
+            <a:normAutofit/>
+          </a:bodyPr>
+          <a:lstStyle>
+            <a:lvl1pPr lvl="0" algn="l">
+              <a:spcBef>
+                <a:spcPts val="0"/>
+              </a:spcBef>
+              <a:spcAft>
+                <a:spcPts val="0"/>
+              </a:spcAft>
+              <a:buClr>
+                <a:schemeClr val="lt1"/>
+              </a:buClr>
+              <a:buSzPts val="1800"/>
+              <a:buNone/>
+              <a:defRPr/>
+            </a:lvl1pPr>
+            <a:lvl2pPr lvl="1" algn="l">
+              <a:spcBef>
+                <a:spcPts val="0"/>
+              </a:spcBef>
+              <a:spcAft>
+                <a:spcPts val="0"/>
+              </a:spcAft>
+              <a:buSzPts val="1400"/>
+              <a:buNone/>
+              <a:defRPr/>
+            </a:lvl2pPr>
+            <a:lvl3pPr lvl="2" algn="l">
+              <a:spcBef>
+                <a:spcPts val="0"/>
+              </a:spcBef>
+              <a:spcAft>
+                <a:spcPts val="0"/>
+              </a:spcAft>
+              <a:buSzPts val="1400"/>
+              <a:buNone/>
+              <a:defRPr/>
+            </a:lvl3pPr>
+            <a:lvl4pPr lvl="3" algn="l">
+              <a:spcBef>
+                <a:spcPts val="0"/>
+              </a:spcBef>
+              <a:spcAft>
+                <a:spcPts val="0"/>
+              </a:spcAft>
+              <a:buSzPts val="1400"/>
+              <a:buNone/>
+              <a:defRPr/>
+            </a:lvl4pPr>
+            <a:lvl5pPr lvl="4" algn="l">
+              <a:spcBef>
+                <a:spcPts val="0"/>
+              </a:spcBef>
+              <a:spcAft>
+                <a:spcPts val="0"/>
+              </a:spcAft>
+              <a:buSzPts val="1400"/>
+              <a:buNone/>
+              <a:defRPr/>
+            </a:lvl5pPr>
+            <a:lvl6pPr lvl="5" algn="l">
+              <a:spcBef>
+                <a:spcPts val="0"/>
+              </a:spcBef>
+              <a:spcAft>
+                <a:spcPts val="0"/>
+              </a:spcAft>
+              <a:buSzPts val="1400"/>
+              <a:buNone/>
+              <a:defRPr/>
+            </a:lvl6pPr>
+            <a:lvl7pPr lvl="6" algn="l">
+              <a:spcBef>
+                <a:spcPts val="0"/>
+              </a:spcBef>
+              <a:spcAft>
+                <a:spcPts val="0"/>
+              </a:spcAft>
+              <a:buSzPts val="1400"/>
+              <a:buNone/>
+              <a:defRPr/>
+            </a:lvl7pPr>
+            <a:lvl8pPr lvl="7" algn="l">
+              <a:spcBef>
+                <a:spcPts val="0"/>
+              </a:spcBef>
+              <a:spcAft>
+                <a:spcPts val="0"/>
+              </a:spcAft>
+              <a:buSzPts val="1400"/>
+              <a:buNone/>
+              <a:defRPr/>
+            </a:lvl8pPr>
+            <a:lvl9pPr lvl="8" algn="l">
+              <a:spcBef>
+                <a:spcPts val="0"/>
+              </a:spcBef>
+              <a:spcAft>
+                <a:spcPts val="0"/>
+              </a:spcAft>
+              <a:buSzPts val="1400"/>
+              <a:buNone/>
+              <a:defRPr/>
+            </a:lvl9pPr>
+          </a:lstStyle>
+          <a:p>
+            <a:endParaRPr/>
+          </a:p>
+        </p:txBody>
+      </p:sp>
+      <p:sp>
+        <p:nvSpPr>
+          <p:cNvPr id="103" name="Google Shape;103;p15"/>
+          <p:cNvSpPr txBox="1">
+            <a:spLocks noGrp="1"/>
+          </p:cNvSpPr>
+          <p:nvPr>
+            <p:ph type="body" idx="1"/>
+          </p:nvPr>
+        </p:nvSpPr>
+        <p:spPr>
+          <a:xfrm rot="5400000">
+            <a:off x="4334603" y="-1417408"/>
+            <a:ext cx="3522794" cy="11029616"/>
+          </a:xfrm>
+          <a:prstGeom prst="rect">
+            <a:avLst/>
+          </a:prstGeom>
+          <a:noFill/>
+          <a:ln>
+            <a:noFill/>
+          </a:ln>
+        </p:spPr>
+        <p:txBody>
+          <a:bodyPr spcFirstLastPara="1" wrap="square" lIns="91425" tIns="45700" rIns="91425" bIns="45700" anchor="t" anchorCtr="0">
+            <a:normAutofit/>
+          </a:bodyPr>
+          <a:lstStyle>
+            <a:lvl1pPr marL="457200" lvl="0" indent="-333756" algn="l">
+              <a:spcBef>
+                <a:spcPts val="360"/>
+              </a:spcBef>
+              <a:spcAft>
+                <a:spcPts val="0"/>
+              </a:spcAft>
+              <a:buSzPts val="1656"/>
+              <a:buChar char="◼"/>
+              <a:defRPr/>
+            </a:lvl1pPr>
+            <a:lvl2pPr marL="914400" lvl="1" indent="-322072" algn="l">
+              <a:spcBef>
+                <a:spcPts val="600"/>
+              </a:spcBef>
+              <a:spcAft>
+                <a:spcPts val="0"/>
+              </a:spcAft>
+              <a:buSzPts val="1472"/>
+              <a:buChar char="◼"/>
+              <a:defRPr/>
+            </a:lvl2pPr>
+            <a:lvl3pPr marL="1371600" lvl="2" indent="-310388" algn="l">
+              <a:spcBef>
+                <a:spcPts val="600"/>
+              </a:spcBef>
+              <a:spcAft>
+                <a:spcPts val="0"/>
+              </a:spcAft>
+              <a:buSzPts val="1288"/>
+              <a:buChar char="◼"/>
+              <a:defRPr/>
+            </a:lvl3pPr>
+            <a:lvl4pPr marL="1828800" lvl="3" indent="-298704" algn="l">
+              <a:spcBef>
+                <a:spcPts val="600"/>
+              </a:spcBef>
+              <a:spcAft>
+                <a:spcPts val="0"/>
+              </a:spcAft>
+              <a:buSzPts val="1104"/>
+              <a:buChar char="◼"/>
+              <a:defRPr/>
+            </a:lvl4pPr>
+            <a:lvl5pPr marL="2286000" lvl="4" indent="-298704" algn="l">
+              <a:spcBef>
+                <a:spcPts val="600"/>
+              </a:spcBef>
+              <a:spcAft>
+                <a:spcPts val="0"/>
+              </a:spcAft>
+              <a:buSzPts val="1104"/>
+              <a:buChar char="◼"/>
+              <a:defRPr/>
+            </a:lvl5pPr>
+            <a:lvl6pPr marL="2743200" lvl="5" indent="-333756" algn="l">
+              <a:spcBef>
+                <a:spcPts val="600"/>
+              </a:spcBef>
+              <a:spcAft>
+                <a:spcPts val="0"/>
+              </a:spcAft>
+              <a:buSzPts val="1656"/>
+              <a:buChar char="◼"/>
+              <a:defRPr/>
+            </a:lvl6pPr>
+            <a:lvl7pPr marL="3200400" lvl="6" indent="-333756" algn="l">
+              <a:spcBef>
+                <a:spcPts val="600"/>
+              </a:spcBef>
+              <a:spcAft>
+                <a:spcPts val="0"/>
+              </a:spcAft>
+              <a:buSzPts val="1656"/>
+              <a:buChar char="◼"/>
+              <a:defRPr/>
+            </a:lvl7pPr>
+            <a:lvl8pPr marL="3657600" lvl="7" indent="-333756" algn="l">
+              <a:spcBef>
+                <a:spcPts val="600"/>
+              </a:spcBef>
+              <a:spcAft>
+                <a:spcPts val="0"/>
+              </a:spcAft>
+              <a:buSzPts val="1656"/>
+              <a:buChar char="◼"/>
+              <a:defRPr/>
+            </a:lvl8pPr>
+            <a:lvl9pPr marL="4114800" lvl="8" indent="-333756" algn="l">
+              <a:spcBef>
+                <a:spcPts val="600"/>
+              </a:spcBef>
+              <a:spcAft>
+                <a:spcPts val="600"/>
+              </a:spcAft>
+              <a:buSzPts val="1656"/>
+              <a:buChar char="◼"/>
+              <a:defRPr/>
+            </a:lvl9pPr>
+          </a:lstStyle>
+          <a:p>
+            <a:endParaRPr/>
+          </a:p>
+        </p:txBody>
+      </p:sp>
+      <p:sp>
+        <p:nvSpPr>
+          <p:cNvPr id="104" name="Google Shape;104;p15"/>
+          <p:cNvSpPr txBox="1">
+            <a:spLocks noGrp="1"/>
+          </p:cNvSpPr>
+          <p:nvPr>
+            <p:ph type="dt" idx="10"/>
+          </p:nvPr>
+        </p:nvSpPr>
+        <p:spPr>
+          <a:xfrm>
+            <a:off x="7605951" y="5956137"/>
+            <a:ext cx="2844799" cy="365125"/>
+          </a:xfrm>
+          <a:prstGeom prst="rect">
+            <a:avLst/>
+          </a:prstGeom>
+          <a:noFill/>
+          <a:ln>
+            <a:noFill/>
+          </a:ln>
+        </p:spPr>
+        <p:txBody>
+          <a:bodyPr spcFirstLastPara="1" wrap="square" lIns="91425" tIns="45700" rIns="91425" bIns="45700" anchor="ctr" anchorCtr="0">
+            <a:noAutofit/>
+          </a:bodyPr>
+          <a:lstStyle>
+            <a:lvl1pPr lvl="0" algn="r">
+              <a:spcBef>
+                <a:spcPts val="0"/>
+              </a:spcBef>
+              <a:spcAft>
+                <a:spcPts val="0"/>
+              </a:spcAft>
+              <a:buSzPts val="1400"/>
+              <a:buNone/>
+              <a:defRPr/>
+            </a:lvl1pPr>
+            <a:lvl2pPr lvl="1" algn="l">
+              <a:spcBef>
+                <a:spcPts val="0"/>
+              </a:spcBef>
+              <a:spcAft>
+                <a:spcPts val="0"/>
+              </a:spcAft>
+              <a:buSzPts val="1400"/>
+              <a:buNone/>
+              <a:defRPr/>
+            </a:lvl2pPr>
+            <a:lvl3pPr lvl="2" algn="l">
+              <a:spcBef>
+                <a:spcPts val="0"/>
+              </a:spcBef>
+              <a:spcAft>
+                <a:spcPts val="0"/>
+              </a:spcAft>
+              <a:buSzPts val="1400"/>
+              <a:buNone/>
+              <a:defRPr/>
+            </a:lvl3pPr>
+            <a:lvl4pPr lvl="3" algn="l">
+              <a:spcBef>
+                <a:spcPts val="0"/>
+              </a:spcBef>
+              <a:spcAft>
+                <a:spcPts val="0"/>
+              </a:spcAft>
+              <a:buSzPts val="1400"/>
+              <a:buNone/>
+              <a:defRPr/>
+            </a:lvl4pPr>
+            <a:lvl5pPr lvl="4" algn="l">
+              <a:spcBef>
+                <a:spcPts val="0"/>
+              </a:spcBef>
+              <a:spcAft>
+                <a:spcPts val="0"/>
+              </a:spcAft>
+              <a:buSzPts val="1400"/>
+              <a:buNone/>
+              <a:defRPr/>
+            </a:lvl5pPr>
+            <a:lvl6pPr lvl="5" algn="l">
+              <a:spcBef>
+                <a:spcPts val="0"/>
+              </a:spcBef>
+              <a:spcAft>
+                <a:spcPts val="0"/>
+              </a:spcAft>
+              <a:buSzPts val="1400"/>
+              <a:buNone/>
+              <a:defRPr/>
+            </a:lvl6pPr>
+            <a:lvl7pPr lvl="6" algn="l">
+              <a:spcBef>
+                <a:spcPts val="0"/>
+              </a:spcBef>
+              <a:spcAft>
+                <a:spcPts val="0"/>
+              </a:spcAft>
+              <a:buSzPts val="1400"/>
+              <a:buNone/>
+              <a:defRPr/>
+            </a:lvl7pPr>
+            <a:lvl8pPr lvl="7" algn="l">
+              <a:spcBef>
+                <a:spcPts val="0"/>
+              </a:spcBef>
+              <a:spcAft>
+                <a:spcPts val="0"/>
+              </a:spcAft>
+              <a:buSzPts val="1400"/>
+              <a:buNone/>
+              <a:defRPr/>
+            </a:lvl8pPr>
+            <a:lvl9pPr lvl="8" algn="l">
+              <a:spcBef>
+                <a:spcPts val="0"/>
+              </a:spcBef>
+              <a:spcAft>
+                <a:spcPts val="0"/>
+              </a:spcAft>
+              <a:buSzPts val="1400"/>
+              <a:buNone/>
+              <a:defRPr/>
+            </a:lvl9pPr>
+          </a:lstStyle>
+          <a:p>
+            <a:endParaRPr/>
+          </a:p>
+        </p:txBody>
+      </p:sp>
+      <p:sp>
+        <p:nvSpPr>
+          <p:cNvPr id="105" name="Google Shape;105;p15"/>
+          <p:cNvSpPr txBox="1">
+            <a:spLocks noGrp="1"/>
+          </p:cNvSpPr>
+          <p:nvPr>
+            <p:ph type="ftr" idx="11"/>
+          </p:nvPr>
+        </p:nvSpPr>
+        <p:spPr>
+          <a:xfrm>
+            <a:off x="581192" y="5951811"/>
+            <a:ext cx="6917210" cy="365125"/>
+          </a:xfrm>
+          <a:prstGeom prst="rect">
+            <a:avLst/>
+          </a:prstGeom>
+          <a:noFill/>
+          <a:ln>
+            <a:noFill/>
+          </a:ln>
+        </p:spPr>
+        <p:txBody>
+          <a:bodyPr spcFirstLastPara="1" wrap="square" lIns="91425" tIns="45700" rIns="91425" bIns="45700" anchor="ctr" anchorCtr="0">
+            <a:noAutofit/>
+          </a:bodyPr>
+          <a:lstStyle>
+            <a:lvl1pPr lvl="0" algn="l">
+              <a:spcBef>
+                <a:spcPts val="0"/>
+              </a:spcBef>
+              <a:spcAft>
+                <a:spcPts val="0"/>
+              </a:spcAft>
+              <a:buSzPts val="1400"/>
+              <a:buNone/>
+              <a:defRPr/>
+            </a:lvl1pPr>
+            <a:lvl2pPr lvl="1" algn="l">
+              <a:spcBef>
+                <a:spcPts val="0"/>
+              </a:spcBef>
+              <a:spcAft>
+                <a:spcPts val="0"/>
+              </a:spcAft>
+              <a:buSzPts val="1400"/>
+              <a:buNone/>
+              <a:defRPr/>
+            </a:lvl2pPr>
+            <a:lvl3pPr lvl="2" algn="l">
+              <a:spcBef>
+                <a:spcPts val="0"/>
+              </a:spcBef>
+              <a:spcAft>
+                <a:spcPts val="0"/>
+              </a:spcAft>
+              <a:buSzPts val="1400"/>
+              <a:buNone/>
+              <a:defRPr/>
+            </a:lvl3pPr>
+            <a:lvl4pPr lvl="3" algn="l">
+              <a:spcBef>
+                <a:spcPts val="0"/>
+              </a:spcBef>
+              <a:spcAft>
+                <a:spcPts val="0"/>
+              </a:spcAft>
+              <a:buSzPts val="1400"/>
+              <a:buNone/>
+              <a:defRPr/>
+            </a:lvl4pPr>
+            <a:lvl5pPr lvl="4" algn="l">
+              <a:spcBef>
+                <a:spcPts val="0"/>
+              </a:spcBef>
+              <a:spcAft>
+                <a:spcPts val="0"/>
+              </a:spcAft>
+              <a:buSzPts val="1400"/>
+              <a:buNone/>
+              <a:defRPr/>
+            </a:lvl5pPr>
+            <a:lvl6pPr lvl="5" algn="l">
+              <a:spcBef>
+                <a:spcPts val="0"/>
+              </a:spcBef>
+              <a:spcAft>
+                <a:spcPts val="0"/>
+              </a:spcAft>
+              <a:buSzPts val="1400"/>
+              <a:buNone/>
+              <a:defRPr/>
+            </a:lvl6pPr>
+            <a:lvl7pPr lvl="6" algn="l">
+              <a:spcBef>
+                <a:spcPts val="0"/>
+              </a:spcBef>
+              <a:spcAft>
+                <a:spcPts val="0"/>
+              </a:spcAft>
+              <a:buSzPts val="1400"/>
+              <a:buNone/>
+              <a:defRPr/>
+            </a:lvl7pPr>
+            <a:lvl8pPr lvl="7" algn="l">
+              <a:spcBef>
+                <a:spcPts val="0"/>
+              </a:spcBef>
+              <a:spcAft>
+                <a:spcPts val="0"/>
+              </a:spcAft>
+              <a:buSzPts val="1400"/>
+              <a:buNone/>
+              <a:defRPr/>
+            </a:lvl8pPr>
+            <a:lvl9pPr lvl="8" algn="l">
+              <a:spcBef>
+                <a:spcPts val="0"/>
+              </a:spcBef>
+              <a:spcAft>
+                <a:spcPts val="0"/>
+              </a:spcAft>
+              <a:buSzPts val="1400"/>
+              <a:buNone/>
+              <a:defRPr/>
+            </a:lvl9pPr>
+          </a:lstStyle>
+          <a:p>
+            <a:endParaRPr/>
+          </a:p>
+        </p:txBody>
+      </p:sp>
+      <p:sp>
+        <p:nvSpPr>
+          <p:cNvPr id="106" name="Google Shape;106;p15"/>
           <p:cNvSpPr txBox="1">
             <a:spLocks noGrp="1"/>
           </p:cNvSpPr>
@@ -22935,7 +22141,7 @@
           <p:nvPr/>
         </p:nvPicPr>
         <p:blipFill rotWithShape="1">
-          <a:blip r:embed="rId27">
+          <a:blip r:embed="rId26">
             <a:alphaModFix/>
           </a:blip>
           <a:srcRect/>
@@ -22959,31 +22165,30 @@
   </p:cSld>
   <p:clrMap bg1="lt1" tx1="dk1" bg2="dk2" tx2="lt2" accent1="accent1" accent2="accent2" accent3="accent3" accent4="accent4" accent5="accent5" accent6="accent6" hlink="hlink" folHlink="folHlink"/>
   <p:sldLayoutIdLst>
-    <p:sldLayoutId id="2147483649" r:id="rId1"/>
-    <p:sldLayoutId id="2147483650" r:id="rId2"/>
-    <p:sldLayoutId id="2147483651" r:id="rId3"/>
-    <p:sldLayoutId id="2147483653" r:id="rId4"/>
-    <p:sldLayoutId id="2147483655" r:id="rId5"/>
-    <p:sldLayoutId id="2147483656" r:id="rId6"/>
-    <p:sldLayoutId id="2147483657" r:id="rId7"/>
-    <p:sldLayoutId id="2147483658" r:id="rId8"/>
-    <p:sldLayoutId id="2147483659" r:id="rId9"/>
-    <p:sldLayoutId id="2147483660" r:id="rId10"/>
-    <p:sldLayoutId id="2147483661" r:id="rId11"/>
-    <p:sldLayoutId id="2147483662" r:id="rId12"/>
-    <p:sldLayoutId id="2147483663" r:id="rId13"/>
-    <p:sldLayoutId id="2147483664" r:id="rId14"/>
-    <p:sldLayoutId id="2147483665" r:id="rId15"/>
-    <p:sldLayoutId id="2147483666" r:id="rId16"/>
-    <p:sldLayoutId id="2147483667" r:id="rId17"/>
-    <p:sldLayoutId id="2147483668" r:id="rId18"/>
-    <p:sldLayoutId id="2147483669" r:id="rId19"/>
-    <p:sldLayoutId id="2147483670" r:id="rId20"/>
-    <p:sldLayoutId id="2147483671" r:id="rId21"/>
-    <p:sldLayoutId id="2147483672" r:id="rId22"/>
-    <p:sldLayoutId id="2147483673" r:id="rId23"/>
-    <p:sldLayoutId id="2147483674" r:id="rId24"/>
-    <p:sldLayoutId id="2147483675" r:id="rId25"/>
+    <p:sldLayoutId id="2147483650" r:id="rId1"/>
+    <p:sldLayoutId id="2147483651" r:id="rId2"/>
+    <p:sldLayoutId id="2147483653" r:id="rId3"/>
+    <p:sldLayoutId id="2147483655" r:id="rId4"/>
+    <p:sldLayoutId id="2147483656" r:id="rId5"/>
+    <p:sldLayoutId id="2147483657" r:id="rId6"/>
+    <p:sldLayoutId id="2147483658" r:id="rId7"/>
+    <p:sldLayoutId id="2147483659" r:id="rId8"/>
+    <p:sldLayoutId id="2147483660" r:id="rId9"/>
+    <p:sldLayoutId id="2147483661" r:id="rId10"/>
+    <p:sldLayoutId id="2147483662" r:id="rId11"/>
+    <p:sldLayoutId id="2147483663" r:id="rId12"/>
+    <p:sldLayoutId id="2147483664" r:id="rId13"/>
+    <p:sldLayoutId id="2147483665" r:id="rId14"/>
+    <p:sldLayoutId id="2147483666" r:id="rId15"/>
+    <p:sldLayoutId id="2147483667" r:id="rId16"/>
+    <p:sldLayoutId id="2147483668" r:id="rId17"/>
+    <p:sldLayoutId id="2147483669" r:id="rId18"/>
+    <p:sldLayoutId id="2147483670" r:id="rId19"/>
+    <p:sldLayoutId id="2147483671" r:id="rId20"/>
+    <p:sldLayoutId id="2147483672" r:id="rId21"/>
+    <p:sldLayoutId id="2147483673" r:id="rId22"/>
+    <p:sldLayoutId id="2147483674" r:id="rId23"/>
+    <p:sldLayoutId id="2147483675" r:id="rId24"/>
   </p:sldLayoutIdLst>
   <p:hf hdr="0" ftr="0" dt="0"/>
   <p:txStyles>
@@ -23683,7 +22888,7 @@
   <p:cSld>
     <p:spTree>
       <p:nvGrpSpPr>
-        <p:cNvPr id="1" name="Shape 351"/>
+        <p:cNvPr id="1" name="Shape 623"/>
         <p:cNvGrpSpPr/>
         <p:nvPr/>
       </p:nvGrpSpPr>
@@ -23697,18 +22902,18 @@
       </p:grpSpPr>
       <p:sp>
         <p:nvSpPr>
-          <p:cNvPr id="352" name="Google Shape;352;p1"/>
+          <p:cNvPr id="625" name="Google Shape;625;g3daf0311381_0_96"/>
           <p:cNvSpPr txBox="1">
             <a:spLocks noGrp="1"/>
           </p:cNvSpPr>
           <p:nvPr>
-            <p:ph type="ctrTitle"/>
+            <p:ph type="title"/>
           </p:nvPr>
         </p:nvSpPr>
         <p:spPr>
           <a:xfrm>
-            <a:off x="586166" y="0"/>
-            <a:ext cx="7179124" cy="1352412"/>
+            <a:off x="774923" y="687475"/>
+            <a:ext cx="10106100" cy="630000"/>
           </a:xfrm>
           <a:prstGeom prst="rect">
             <a:avLst/>
@@ -23732,15 +22937,175 @@
                 <a:spcPts val="0"/>
               </a:spcAft>
               <a:buClr>
-                <a:schemeClr val="accent1"/>
+                <a:schemeClr val="lt1"/>
               </a:buClr>
-              <a:buSzPts val="3600"/>
+              <a:buSzPts val="2800"/>
+              <a:buFont typeface="Arial"/>
+              <a:buNone/>
+            </a:pPr>
+            <a:r>
+              <a:rPr lang="en-US" i="1" dirty="0" err="1"/>
+              <a:t>Chionoecetes</a:t>
+            </a:r>
+            <a:r>
+              <a:rPr lang="en-US" i="1" dirty="0"/>
+              <a:t> spp.</a:t>
+            </a:r>
+            <a:r>
+              <a:rPr lang="en-US" dirty="0"/>
+              <a:t> hybrids</a:t>
+            </a:r>
+            <a:endParaRPr dirty="0"/>
+          </a:p>
+        </p:txBody>
+      </p:sp>
+      <p:pic>
+        <p:nvPicPr>
+          <p:cNvPr id="2" name="Picture 1">
+            <a:extLst>
+              <a:ext uri="{FF2B5EF4-FFF2-40B4-BE49-F238E27FC236}">
+                <a16:creationId xmlns:a16="http://schemas.microsoft.com/office/drawing/2014/main" id="{3A7AAA4D-6F6F-7614-7864-80573B4191AE}"/>
+              </a:ext>
+            </a:extLst>
+          </p:cNvPr>
+          <p:cNvPicPr>
+            <a:picLocks noChangeAspect="1"/>
+          </p:cNvPicPr>
+          <p:nvPr/>
+        </p:nvPicPr>
+        <p:blipFill>
+          <a:blip r:embed="rId3"/>
+          <a:stretch>
+            <a:fillRect/>
+          </a:stretch>
+        </p:blipFill>
+        <p:spPr>
+          <a:xfrm>
+            <a:off x="2209800" y="1951483"/>
+            <a:ext cx="7772400" cy="4677507"/>
+          </a:xfrm>
+          <a:prstGeom prst="rect">
+            <a:avLst/>
+          </a:prstGeom>
+        </p:spPr>
+      </p:pic>
+    </p:spTree>
+  </p:cSld>
+  <p:clrMapOvr>
+    <a:masterClrMapping/>
+  </p:clrMapOvr>
+</p:sld>
+</file>
+
+<file path=ppt/slides/slide10.xml><?xml version="1.0" encoding="utf-8"?>
+<p:sld xmlns:a="http://schemas.openxmlformats.org/drawingml/2006/main" xmlns:r="http://schemas.openxmlformats.org/officeDocument/2006/relationships" xmlns:p="http://schemas.openxmlformats.org/presentationml/2006/main">
+  <p:cSld>
+    <p:spTree>
+      <p:nvGrpSpPr>
+        <p:cNvPr id="1" name="Shape 690"/>
+        <p:cNvGrpSpPr/>
+        <p:nvPr/>
+      </p:nvGrpSpPr>
+      <p:grpSpPr>
+        <a:xfrm>
+          <a:off x="0" y="0"/>
+          <a:ext cx="0" cy="0"/>
+          <a:chOff x="0" y="0"/>
+          <a:chExt cx="0" cy="0"/>
+        </a:xfrm>
+      </p:grpSpPr>
+      <p:sp>
+        <p:nvSpPr>
+          <p:cNvPr id="691" name="Google Shape;691;g3daf0311381_0_114"/>
+          <p:cNvSpPr txBox="1">
+            <a:spLocks noGrp="1"/>
+          </p:cNvSpPr>
+          <p:nvPr>
+            <p:ph type="sldNum" idx="12"/>
+          </p:nvPr>
+        </p:nvSpPr>
+        <p:spPr>
+          <a:xfrm>
+            <a:off x="10558300" y="5956137"/>
+            <a:ext cx="1052400" cy="365100"/>
+          </a:xfrm>
+          <a:prstGeom prst="rect">
+            <a:avLst/>
+          </a:prstGeom>
+          <a:noFill/>
+          <a:ln>
+            <a:noFill/>
+          </a:ln>
+        </p:spPr>
+        <p:txBody>
+          <a:bodyPr spcFirstLastPara="1" wrap="square" lIns="91425" tIns="45700" rIns="91425" bIns="45700" anchor="ctr" anchorCtr="0">
+            <a:noAutofit/>
+          </a:bodyPr>
+          <a:lstStyle/>
+          <a:p>
+            <a:pPr marL="0" lvl="0" indent="0" algn="r" rtl="0">
+              <a:spcBef>
+                <a:spcPts val="0"/>
+              </a:spcBef>
+              <a:spcAft>
+                <a:spcPts val="0"/>
+              </a:spcAft>
+              <a:buNone/>
+            </a:pPr>
+            <a:fld id="{00000000-1234-1234-1234-123412341234}" type="slidenum">
+              <a:rPr lang="en-US"/>
+              <a:t>10</a:t>
+            </a:fld>
+            <a:endParaRPr/>
+          </a:p>
+        </p:txBody>
+      </p:sp>
+      <p:sp>
+        <p:nvSpPr>
+          <p:cNvPr id="692" name="Google Shape;692;g3daf0311381_0_114"/>
+          <p:cNvSpPr txBox="1">
+            <a:spLocks noGrp="1"/>
+          </p:cNvSpPr>
+          <p:nvPr>
+            <p:ph type="title"/>
+          </p:nvPr>
+        </p:nvSpPr>
+        <p:spPr>
+          <a:xfrm>
+            <a:off x="774923" y="687475"/>
+            <a:ext cx="10106100" cy="630000"/>
+          </a:xfrm>
+          <a:prstGeom prst="rect">
+            <a:avLst/>
+          </a:prstGeom>
+          <a:noFill/>
+          <a:ln>
+            <a:noFill/>
+          </a:ln>
+        </p:spPr>
+        <p:txBody>
+          <a:bodyPr spcFirstLastPara="1" wrap="square" lIns="91425" tIns="45700" rIns="91425" bIns="45700" anchor="b" anchorCtr="0">
+            <a:normAutofit/>
+          </a:bodyPr>
+          <a:lstStyle/>
+          <a:p>
+            <a:pPr marL="0" lvl="0" indent="0" algn="l" rtl="0">
+              <a:spcBef>
+                <a:spcPts val="0"/>
+              </a:spcBef>
+              <a:spcAft>
+                <a:spcPts val="0"/>
+              </a:spcAft>
+              <a:buClr>
+                <a:schemeClr val="lt1"/>
+              </a:buClr>
+              <a:buSzPts val="2800"/>
               <a:buFont typeface="Arial"/>
               <a:buNone/>
             </a:pPr>
             <a:r>
               <a:rPr lang="en-US"/>
-              <a:t>Hybrid topics</a:t>
+              <a:t>Tanner crab model sensitivity runs: estimated capture rates</a:t>
             </a:r>
             <a:endParaRPr/>
           </a:p>
@@ -23748,21 +23113,22 @@
       </p:sp>
       <p:pic>
         <p:nvPicPr>
-          <p:cNvPr id="353" name="Google Shape;353;p1"/>
+          <p:cNvPr id="693" name="Google Shape;693;g3daf0311381_0_114"/>
           <p:cNvPicPr preferRelativeResize="0"/>
           <p:nvPr/>
         </p:nvPicPr>
-        <p:blipFill rotWithShape="1">
+        <p:blipFill>
           <a:blip r:embed="rId3">
             <a:alphaModFix/>
           </a:blip>
-          <a:srcRect/>
-          <a:stretch/>
+          <a:stretch>
+            <a:fillRect/>
+          </a:stretch>
         </p:blipFill>
         <p:spPr>
           <a:xfrm>
-            <a:off x="7516935" y="809463"/>
-            <a:ext cx="2119476" cy="1785069"/>
+            <a:off x="1132114" y="1469875"/>
+            <a:ext cx="4337478" cy="5235725"/>
           </a:xfrm>
           <a:prstGeom prst="rect">
             <a:avLst/>
@@ -23773,16 +23139,24 @@
           </a:ln>
         </p:spPr>
       </p:pic>
-      <p:sp>
-        <p:nvSpPr>
-          <p:cNvPr id="354" name="Google Shape;354;p1"/>
-          <p:cNvSpPr txBox="1"/>
+      <p:pic>
+        <p:nvPicPr>
+          <p:cNvPr id="694" name="Google Shape;694;g3daf0311381_0_114"/>
+          <p:cNvPicPr preferRelativeResize="0"/>
           <p:nvPr/>
-        </p:nvSpPr>
+        </p:nvPicPr>
+        <p:blipFill>
+          <a:blip r:embed="rId4">
+            <a:alphaModFix/>
+          </a:blip>
+          <a:stretch>
+            <a:fillRect/>
+          </a:stretch>
+        </p:blipFill>
         <p:spPr>
           <a:xfrm>
-            <a:off x="596599" y="1505593"/>
-            <a:ext cx="5656589" cy="1923407"/>
+            <a:off x="5621989" y="1469875"/>
+            <a:ext cx="5265873" cy="5235724"/>
           </a:xfrm>
           <a:prstGeom prst="rect">
             <a:avLst/>
@@ -23792,112 +23166,7 @@
             <a:noFill/>
           </a:ln>
         </p:spPr>
-        <p:txBody>
-          <a:bodyPr spcFirstLastPara="1" wrap="square" lIns="91425" tIns="45700" rIns="91425" bIns="45700" anchor="t" anchorCtr="0">
-            <a:normAutofit/>
-          </a:bodyPr>
-          <a:lstStyle/>
-          <a:p>
-            <a:pPr marL="0" marR="0" lvl="0" indent="0" algn="l" rtl="0">
-              <a:spcBef>
-                <a:spcPts val="0"/>
-              </a:spcBef>
-              <a:spcAft>
-                <a:spcPts val="0"/>
-              </a:spcAft>
-              <a:buClr>
-                <a:schemeClr val="accent2"/>
-              </a:buClr>
-              <a:buSzPts val="2208"/>
-              <a:buFont typeface="Noto Sans Symbols"/>
-              <a:buNone/>
-            </a:pPr>
-            <a:r>
-              <a:rPr lang="en-US" sz="2400" cap="none">
-                <a:solidFill>
-                  <a:schemeClr val="accent2"/>
-                </a:solidFill>
-                <a:latin typeface="Calibri"/>
-                <a:ea typeface="Calibri"/>
-                <a:cs typeface="Calibri"/>
-                <a:sym typeface="Calibri"/>
-              </a:rPr>
-              <a:t>BSAI CRAB PLAN TEAM</a:t>
-            </a:r>
-            <a:endParaRPr/>
-          </a:p>
-          <a:p>
-            <a:pPr marL="0" marR="0" lvl="0" indent="0" algn="l" rtl="0">
-              <a:spcBef>
-                <a:spcPts val="1080"/>
-              </a:spcBef>
-              <a:spcAft>
-                <a:spcPts val="0"/>
-              </a:spcAft>
-              <a:buClr>
-                <a:schemeClr val="accent2"/>
-              </a:buClr>
-              <a:buSzPts val="2208"/>
-              <a:buFont typeface="Noto Sans Symbols"/>
-              <a:buNone/>
-            </a:pPr>
-            <a:r>
-              <a:rPr lang="en-US" sz="2400">
-                <a:solidFill>
-                  <a:schemeClr val="accent2"/>
-                </a:solidFill>
-                <a:latin typeface="Calibri"/>
-                <a:ea typeface="Calibri"/>
-                <a:cs typeface="Calibri"/>
-                <a:sym typeface="Calibri"/>
-              </a:rPr>
-              <a:t>May 13th</a:t>
-            </a:r>
-            <a:r>
-              <a:rPr lang="en-US" sz="2400" cap="none">
-                <a:solidFill>
-                  <a:schemeClr val="accent2"/>
-                </a:solidFill>
-                <a:latin typeface="Calibri"/>
-                <a:ea typeface="Calibri"/>
-                <a:cs typeface="Calibri"/>
-                <a:sym typeface="Calibri"/>
-              </a:rPr>
-              <a:t>, 2026</a:t>
-            </a:r>
-            <a:endParaRPr/>
-          </a:p>
-          <a:p>
-            <a:pPr marL="0" marR="0" lvl="0" indent="0" algn="l" rtl="0">
-              <a:spcBef>
-                <a:spcPts val="1080"/>
-              </a:spcBef>
-              <a:spcAft>
-                <a:spcPts val="0"/>
-              </a:spcAft>
-              <a:buClr>
-                <a:schemeClr val="accent2"/>
-              </a:buClr>
-              <a:buSzPts val="2208"/>
-              <a:buFont typeface="Noto Sans Symbols"/>
-              <a:buNone/>
-            </a:pPr>
-            <a:r>
-              <a:rPr lang="en-US" sz="2400">
-                <a:solidFill>
-                  <a:schemeClr val="accent2"/>
-                </a:solidFill>
-                <a:latin typeface="Calibri"/>
-                <a:ea typeface="Calibri"/>
-                <a:cs typeface="Calibri"/>
-                <a:sym typeface="Calibri"/>
-              </a:rPr>
-              <a:t>Group presentation</a:t>
-            </a:r>
-            <a:endParaRPr/>
-          </a:p>
-        </p:txBody>
-      </p:sp>
+      </p:pic>
     </p:spTree>
   </p:cSld>
   <p:clrMapOvr>
@@ -23906,7 +23175,7 @@
 </p:sld>
 </file>
 
-<file path=ppt/slides/slide10.xml><?xml version="1.0" encoding="utf-8"?>
+<file path=ppt/slides/slide11.xml><?xml version="1.0" encoding="utf-8"?>
 <p:sld xmlns:a="http://schemas.openxmlformats.org/drawingml/2006/main" xmlns:r="http://schemas.openxmlformats.org/officeDocument/2006/relationships" xmlns:p="http://schemas.openxmlformats.org/presentationml/2006/main">
   <p:cSld>
     <p:spTree>
@@ -23963,7 +23232,7 @@
             </a:pPr>
             <a:fld id="{00000000-1234-1234-1234-123412341234}" type="slidenum">
               <a:rPr lang="en-US"/>
-              <a:t>10</a:t>
+              <a:t>11</a:t>
             </a:fld>
             <a:endParaRPr/>
           </a:p>
@@ -24141,468 +23410,6 @@
   <p:cSld>
     <p:spTree>
       <p:nvGrpSpPr>
-        <p:cNvPr id="1" name="Shape 623"/>
-        <p:cNvGrpSpPr/>
-        <p:nvPr/>
-      </p:nvGrpSpPr>
-      <p:grpSpPr>
-        <a:xfrm>
-          <a:off x="0" y="0"/>
-          <a:ext cx="0" cy="0"/>
-          <a:chOff x="0" y="0"/>
-          <a:chExt cx="0" cy="0"/>
-        </a:xfrm>
-      </p:grpSpPr>
-      <p:sp>
-        <p:nvSpPr>
-          <p:cNvPr id="624" name="Google Shape;624;g3daf0311381_0_96"/>
-          <p:cNvSpPr txBox="1">
-            <a:spLocks noGrp="1"/>
-          </p:cNvSpPr>
-          <p:nvPr>
-            <p:ph type="sldNum" idx="12"/>
-          </p:nvPr>
-        </p:nvSpPr>
-        <p:spPr>
-          <a:xfrm>
-            <a:off x="10558300" y="5956137"/>
-            <a:ext cx="1052400" cy="365100"/>
-          </a:xfrm>
-          <a:prstGeom prst="rect">
-            <a:avLst/>
-          </a:prstGeom>
-          <a:noFill/>
-          <a:ln>
-            <a:noFill/>
-          </a:ln>
-        </p:spPr>
-        <p:txBody>
-          <a:bodyPr spcFirstLastPara="1" wrap="square" lIns="91425" tIns="45700" rIns="91425" bIns="45700" anchor="ctr" anchorCtr="0">
-            <a:noAutofit/>
-          </a:bodyPr>
-          <a:lstStyle/>
-          <a:p>
-            <a:pPr marL="0" lvl="0" indent="0" algn="r" rtl="0">
-              <a:spcBef>
-                <a:spcPts val="0"/>
-              </a:spcBef>
-              <a:spcAft>
-                <a:spcPts val="0"/>
-              </a:spcAft>
-              <a:buNone/>
-            </a:pPr>
-            <a:fld id="{00000000-1234-1234-1234-123412341234}" type="slidenum">
-              <a:rPr lang="en-US"/>
-              <a:t>2</a:t>
-            </a:fld>
-            <a:endParaRPr/>
-          </a:p>
-        </p:txBody>
-      </p:sp>
-      <p:sp>
-        <p:nvSpPr>
-          <p:cNvPr id="625" name="Google Shape;625;g3daf0311381_0_96"/>
-          <p:cNvSpPr txBox="1">
-            <a:spLocks noGrp="1"/>
-          </p:cNvSpPr>
-          <p:nvPr>
-            <p:ph type="title"/>
-          </p:nvPr>
-        </p:nvSpPr>
-        <p:spPr>
-          <a:xfrm>
-            <a:off x="774923" y="687475"/>
-            <a:ext cx="10106100" cy="630000"/>
-          </a:xfrm>
-          <a:prstGeom prst="rect">
-            <a:avLst/>
-          </a:prstGeom>
-          <a:noFill/>
-          <a:ln>
-            <a:noFill/>
-          </a:ln>
-        </p:spPr>
-        <p:txBody>
-          <a:bodyPr spcFirstLastPara="1" wrap="square" lIns="91425" tIns="45700" rIns="91425" bIns="45700" anchor="b" anchorCtr="0">
-            <a:normAutofit/>
-          </a:bodyPr>
-          <a:lstStyle/>
-          <a:p>
-            <a:pPr marL="0" lvl="0" indent="0" algn="l" rtl="0">
-              <a:spcBef>
-                <a:spcPts val="0"/>
-              </a:spcBef>
-              <a:spcAft>
-                <a:spcPts val="0"/>
-              </a:spcAft>
-              <a:buClr>
-                <a:schemeClr val="lt1"/>
-              </a:buClr>
-              <a:buSzPts val="2800"/>
-              <a:buFont typeface="Arial"/>
-              <a:buNone/>
-            </a:pPr>
-            <a:r>
-              <a:rPr lang="en-US"/>
-              <a:t>Tanner crab model sensitivity runs</a:t>
-            </a:r>
-            <a:endParaRPr/>
-          </a:p>
-        </p:txBody>
-      </p:sp>
-      <p:sp>
-        <p:nvSpPr>
-          <p:cNvPr id="626" name="Google Shape;626;g3daf0311381_0_96"/>
-          <p:cNvSpPr txBox="1"/>
-          <p:nvPr/>
-        </p:nvSpPr>
-        <p:spPr>
-          <a:xfrm>
-            <a:off x="226375" y="1782025"/>
-            <a:ext cx="11521800" cy="3972600"/>
-          </a:xfrm>
-          <a:prstGeom prst="rect">
-            <a:avLst/>
-          </a:prstGeom>
-          <a:noFill/>
-          <a:ln>
-            <a:noFill/>
-          </a:ln>
-        </p:spPr>
-        <p:txBody>
-          <a:bodyPr spcFirstLastPara="1" wrap="square" lIns="91425" tIns="45700" rIns="91425" bIns="45700" anchor="t" anchorCtr="0">
-            <a:normAutofit/>
-          </a:bodyPr>
-          <a:lstStyle/>
-          <a:p>
-            <a:pPr marL="914400" marR="0" lvl="1" indent="-349250" algn="l" rtl="0">
-              <a:lnSpc>
-                <a:spcPct val="150000"/>
-              </a:lnSpc>
-              <a:spcBef>
-                <a:spcPts val="0"/>
-              </a:spcBef>
-              <a:spcAft>
-                <a:spcPts val="0"/>
-              </a:spcAft>
-              <a:buSzPts val="1900"/>
-              <a:buFont typeface="Verdana"/>
-              <a:buChar char="▪"/>
-            </a:pPr>
-            <a:r>
-              <a:rPr lang="en-US" sz="1900">
-                <a:latin typeface="Verdana"/>
-                <a:ea typeface="Verdana"/>
-                <a:cs typeface="Verdana"/>
-                <a:sym typeface="Verdana"/>
-              </a:rPr>
-              <a:t>2025 assessment model</a:t>
-            </a:r>
-            <a:endParaRPr sz="1900">
-              <a:latin typeface="Verdana"/>
-              <a:ea typeface="Verdana"/>
-              <a:cs typeface="Verdana"/>
-              <a:sym typeface="Verdana"/>
-            </a:endParaRPr>
-          </a:p>
-          <a:p>
-            <a:pPr marL="914400" marR="0" lvl="1" indent="-349250" algn="l" rtl="0">
-              <a:lnSpc>
-                <a:spcPct val="150000"/>
-              </a:lnSpc>
-              <a:spcBef>
-                <a:spcPts val="0"/>
-              </a:spcBef>
-              <a:spcAft>
-                <a:spcPts val="0"/>
-              </a:spcAft>
-              <a:buSzPts val="1900"/>
-              <a:buFont typeface="Verdana"/>
-              <a:buChar char="▪"/>
-            </a:pPr>
-            <a:r>
-              <a:rPr lang="en-US" sz="1900">
-                <a:latin typeface="Verdana"/>
-                <a:ea typeface="Verdana"/>
-                <a:cs typeface="Verdana"/>
-                <a:sym typeface="Verdana"/>
-              </a:rPr>
-              <a:t>2025AM + (Hybrid+Tanner) survey data</a:t>
-            </a:r>
-            <a:endParaRPr sz="1900">
-              <a:latin typeface="Verdana"/>
-              <a:ea typeface="Verdana"/>
-              <a:cs typeface="Verdana"/>
-              <a:sym typeface="Verdana"/>
-            </a:endParaRPr>
-          </a:p>
-          <a:p>
-            <a:pPr marL="1371600" marR="0" lvl="2" indent="-349250" algn="l" rtl="0">
-              <a:lnSpc>
-                <a:spcPct val="150000"/>
-              </a:lnSpc>
-              <a:spcBef>
-                <a:spcPts val="0"/>
-              </a:spcBef>
-              <a:spcAft>
-                <a:spcPts val="0"/>
-              </a:spcAft>
-              <a:buSzPts val="1900"/>
-              <a:buFont typeface="Verdana"/>
-              <a:buChar char="■"/>
-            </a:pPr>
-            <a:r>
-              <a:rPr lang="en-US" sz="1900">
-                <a:latin typeface="Verdana"/>
-                <a:ea typeface="Verdana"/>
-                <a:cs typeface="Verdana"/>
-                <a:sym typeface="Verdana"/>
-              </a:rPr>
-              <a:t>all hybrids treated as Tanner crab</a:t>
-            </a:r>
-            <a:endParaRPr sz="1900">
-              <a:latin typeface="Verdana"/>
-              <a:ea typeface="Verdana"/>
-              <a:cs typeface="Verdana"/>
-              <a:sym typeface="Verdana"/>
-            </a:endParaRPr>
-          </a:p>
-          <a:p>
-            <a:pPr marL="914400" lvl="1" indent="-349250" algn="l" rtl="0">
-              <a:lnSpc>
-                <a:spcPct val="150000"/>
-              </a:lnSpc>
-              <a:spcBef>
-                <a:spcPts val="0"/>
-              </a:spcBef>
-              <a:spcAft>
-                <a:spcPts val="0"/>
-              </a:spcAft>
-              <a:buSzPts val="1900"/>
-              <a:buFont typeface="Verdana"/>
-              <a:buChar char="▪"/>
-            </a:pPr>
-            <a:r>
-              <a:rPr lang="en-US" sz="1900">
-                <a:solidFill>
-                  <a:schemeClr val="dk1"/>
-                </a:solidFill>
-                <a:latin typeface="Verdana"/>
-                <a:ea typeface="Verdana"/>
-                <a:cs typeface="Verdana"/>
-                <a:sym typeface="Verdana"/>
-              </a:rPr>
-              <a:t>2025AM + (Hybrid+Tanner) fishery data</a:t>
-            </a:r>
-            <a:endParaRPr sz="1900">
-              <a:solidFill>
-                <a:schemeClr val="dk1"/>
-              </a:solidFill>
-              <a:latin typeface="Verdana"/>
-              <a:ea typeface="Verdana"/>
-              <a:cs typeface="Verdana"/>
-              <a:sym typeface="Verdana"/>
-            </a:endParaRPr>
-          </a:p>
-          <a:p>
-            <a:pPr marL="1371600" lvl="2" indent="-349250" algn="l" rtl="0">
-              <a:lnSpc>
-                <a:spcPct val="150000"/>
-              </a:lnSpc>
-              <a:spcBef>
-                <a:spcPts val="0"/>
-              </a:spcBef>
-              <a:spcAft>
-                <a:spcPts val="0"/>
-              </a:spcAft>
-              <a:buClr>
-                <a:schemeClr val="dk1"/>
-              </a:buClr>
-              <a:buSzPts val="1900"/>
-              <a:buFont typeface="Verdana"/>
-              <a:buChar char="■"/>
-            </a:pPr>
-            <a:r>
-              <a:rPr lang="en-US" sz="1900">
-                <a:solidFill>
-                  <a:schemeClr val="dk1"/>
-                </a:solidFill>
-                <a:latin typeface="Verdana"/>
-                <a:ea typeface="Verdana"/>
-                <a:cs typeface="Verdana"/>
-                <a:sym typeface="Verdana"/>
-              </a:rPr>
-              <a:t>all hybrids in ADFG at-sea observer coverage treated as Tanner crab</a:t>
-            </a:r>
-            <a:endParaRPr sz="1900">
-              <a:solidFill>
-                <a:schemeClr val="dk1"/>
-              </a:solidFill>
-              <a:latin typeface="Verdana"/>
-              <a:ea typeface="Verdana"/>
-              <a:cs typeface="Verdana"/>
-              <a:sym typeface="Verdana"/>
-            </a:endParaRPr>
-          </a:p>
-          <a:p>
-            <a:pPr marL="1371600" lvl="2" indent="-349250" algn="l" rtl="0">
-              <a:lnSpc>
-                <a:spcPct val="150000"/>
-              </a:lnSpc>
-              <a:spcBef>
-                <a:spcPts val="0"/>
-              </a:spcBef>
-              <a:spcAft>
-                <a:spcPts val="0"/>
-              </a:spcAft>
-              <a:buClr>
-                <a:schemeClr val="dk1"/>
-              </a:buClr>
-              <a:buSzPts val="1900"/>
-              <a:buFont typeface="Verdana"/>
-              <a:buChar char="■"/>
-            </a:pPr>
-            <a:r>
-              <a:rPr lang="en-US" sz="1900">
-                <a:solidFill>
-                  <a:schemeClr val="dk1"/>
-                </a:solidFill>
-                <a:latin typeface="Verdana"/>
-                <a:ea typeface="Verdana"/>
-                <a:cs typeface="Verdana"/>
-                <a:sym typeface="Verdana"/>
-              </a:rPr>
-              <a:t>all hybrids in retained catch size comps treated as Tanner crab</a:t>
-            </a:r>
-            <a:endParaRPr sz="1900">
-              <a:solidFill>
-                <a:schemeClr val="dk1"/>
-              </a:solidFill>
-              <a:latin typeface="Verdana"/>
-              <a:ea typeface="Verdana"/>
-              <a:cs typeface="Verdana"/>
-              <a:sym typeface="Verdana"/>
-            </a:endParaRPr>
-          </a:p>
-          <a:p>
-            <a:pPr marL="1371600" lvl="2" indent="-349250" algn="l" rtl="0">
-              <a:lnSpc>
-                <a:spcPct val="150000"/>
-              </a:lnSpc>
-              <a:spcBef>
-                <a:spcPts val="0"/>
-              </a:spcBef>
-              <a:spcAft>
-                <a:spcPts val="0"/>
-              </a:spcAft>
-              <a:buClr>
-                <a:schemeClr val="dk1"/>
-              </a:buClr>
-              <a:buSzPts val="1900"/>
-              <a:buFont typeface="Verdana"/>
-              <a:buChar char="■"/>
-            </a:pPr>
-            <a:r>
-              <a:rPr lang="en-US" sz="1900">
-                <a:solidFill>
-                  <a:schemeClr val="dk1"/>
-                </a:solidFill>
-                <a:latin typeface="Verdana"/>
-                <a:ea typeface="Verdana"/>
-                <a:cs typeface="Verdana"/>
-                <a:sym typeface="Verdana"/>
-              </a:rPr>
-              <a:t>retained catch </a:t>
-            </a:r>
-            <a:r>
-              <a:rPr lang="en-US" sz="1900" b="1">
-                <a:solidFill>
-                  <a:schemeClr val="dk1"/>
-                </a:solidFill>
-                <a:latin typeface="Verdana"/>
-                <a:ea typeface="Verdana"/>
-                <a:cs typeface="Verdana"/>
-                <a:sym typeface="Verdana"/>
-              </a:rPr>
-              <a:t>not</a:t>
-            </a:r>
-            <a:r>
-              <a:rPr lang="en-US" sz="1900">
-                <a:solidFill>
-                  <a:schemeClr val="dk1"/>
-                </a:solidFill>
-                <a:latin typeface="Verdana"/>
-                <a:ea typeface="Verdana"/>
-                <a:cs typeface="Verdana"/>
-                <a:sym typeface="Verdana"/>
-              </a:rPr>
-              <a:t> apportioned between hybrids and species</a:t>
-            </a:r>
-            <a:endParaRPr sz="1900">
-              <a:solidFill>
-                <a:schemeClr val="dk1"/>
-              </a:solidFill>
-              <a:latin typeface="Verdana"/>
-              <a:ea typeface="Verdana"/>
-              <a:cs typeface="Verdana"/>
-              <a:sym typeface="Verdana"/>
-            </a:endParaRPr>
-          </a:p>
-          <a:p>
-            <a:pPr marL="914400" lvl="1" indent="-349250" algn="l" rtl="0">
-              <a:lnSpc>
-                <a:spcPct val="150000"/>
-              </a:lnSpc>
-              <a:spcBef>
-                <a:spcPts val="0"/>
-              </a:spcBef>
-              <a:spcAft>
-                <a:spcPts val="0"/>
-              </a:spcAft>
-              <a:buClr>
-                <a:schemeClr val="dk1"/>
-              </a:buClr>
-              <a:buSzPts val="1900"/>
-              <a:buFont typeface="Verdana"/>
-              <a:buChar char="▪"/>
-            </a:pPr>
-            <a:r>
-              <a:rPr lang="en-US" sz="1900">
-                <a:solidFill>
-                  <a:schemeClr val="dk1"/>
-                </a:solidFill>
-                <a:latin typeface="Verdana"/>
-                <a:ea typeface="Verdana"/>
-                <a:cs typeface="Verdana"/>
-                <a:sym typeface="Verdana"/>
-              </a:rPr>
-              <a:t>2025AM + (Hybrid+Tanner) survey + fishery data</a:t>
-            </a:r>
-            <a:endParaRPr sz="1900">
-              <a:solidFill>
-                <a:schemeClr val="dk1"/>
-              </a:solidFill>
-              <a:latin typeface="Verdana"/>
-              <a:ea typeface="Verdana"/>
-              <a:cs typeface="Verdana"/>
-              <a:sym typeface="Verdana"/>
-            </a:endParaRPr>
-          </a:p>
-        </p:txBody>
-      </p:sp>
-    </p:spTree>
-  </p:cSld>
-  <p:clrMapOvr>
-    <a:masterClrMapping/>
-  </p:clrMapOvr>
-</p:sld>
-</file>
-
-<file path=ppt/slides/slide3.xml><?xml version="1.0" encoding="utf-8"?>
-<p:sld xmlns:a="http://schemas.openxmlformats.org/drawingml/2006/main" xmlns:r="http://schemas.openxmlformats.org/officeDocument/2006/relationships" xmlns:p="http://schemas.openxmlformats.org/presentationml/2006/main">
-  <p:cSld>
-    <p:spTree>
-      <p:nvGrpSpPr>
         <p:cNvPr id="1" name="Shape 630"/>
         <p:cNvGrpSpPr/>
         <p:nvPr/>
@@ -24655,7 +23462,7 @@
             </a:pPr>
             <a:fld id="{00000000-1234-1234-1234-123412341234}" type="slidenum">
               <a:rPr lang="en-US"/>
-              <a:t>3</a:t>
+              <a:t>2</a:t>
             </a:fld>
             <a:endParaRPr/>
           </a:p>
@@ -24705,10 +23512,10 @@
               <a:buNone/>
             </a:pPr>
             <a:r>
-              <a:rPr lang="en-US"/>
-              <a:t>Tanner crab model sensitivity runs: hybrids survey data</a:t>
+              <a:rPr lang="en-US" dirty="0"/>
+              <a:t>Hybrids in survey data</a:t>
             </a:r>
-            <a:endParaRPr/>
+            <a:endParaRPr dirty="0"/>
           </a:p>
         </p:txBody>
       </p:sp>
@@ -24918,6 +23725,303 @@
 </p:sld>
 </file>
 
+<file path=ppt/slides/slide3.xml><?xml version="1.0" encoding="utf-8"?>
+<p:sld xmlns:a="http://schemas.openxmlformats.org/drawingml/2006/main" xmlns:r="http://schemas.openxmlformats.org/officeDocument/2006/relationships" xmlns:p="http://schemas.openxmlformats.org/presentationml/2006/main">
+  <p:cSld>
+    <p:spTree>
+      <p:nvGrpSpPr>
+        <p:cNvPr id="1" name="Shape 623">
+          <a:extLst>
+            <a:ext uri="{FF2B5EF4-FFF2-40B4-BE49-F238E27FC236}">
+              <a16:creationId xmlns:a16="http://schemas.microsoft.com/office/drawing/2014/main" id="{84870C06-2597-FCBC-5292-BD88CCD24E99}"/>
+            </a:ext>
+          </a:extLst>
+        </p:cNvPr>
+        <p:cNvGrpSpPr/>
+        <p:nvPr/>
+      </p:nvGrpSpPr>
+      <p:grpSpPr>
+        <a:xfrm>
+          <a:off x="0" y="0"/>
+          <a:ext cx="0" cy="0"/>
+          <a:chOff x="0" y="0"/>
+          <a:chExt cx="0" cy="0"/>
+        </a:xfrm>
+      </p:grpSpPr>
+      <p:sp>
+        <p:nvSpPr>
+          <p:cNvPr id="625" name="Google Shape;625;g3daf0311381_0_96">
+            <a:extLst>
+              <a:ext uri="{FF2B5EF4-FFF2-40B4-BE49-F238E27FC236}">
+                <a16:creationId xmlns:a16="http://schemas.microsoft.com/office/drawing/2014/main" id="{90DB539D-9031-04C8-4CF2-83BCB08C1887}"/>
+              </a:ext>
+            </a:extLst>
+          </p:cNvPr>
+          <p:cNvSpPr txBox="1">
+            <a:spLocks noGrp="1"/>
+          </p:cNvSpPr>
+          <p:nvPr>
+            <p:ph type="title"/>
+          </p:nvPr>
+        </p:nvSpPr>
+        <p:spPr>
+          <a:xfrm>
+            <a:off x="774923" y="687475"/>
+            <a:ext cx="10106100" cy="630000"/>
+          </a:xfrm>
+          <a:prstGeom prst="rect">
+            <a:avLst/>
+          </a:prstGeom>
+          <a:noFill/>
+          <a:ln>
+            <a:noFill/>
+          </a:ln>
+        </p:spPr>
+        <p:txBody>
+          <a:bodyPr spcFirstLastPara="1" wrap="square" lIns="91425" tIns="45700" rIns="91425" bIns="45700" anchor="b" anchorCtr="0">
+            <a:normAutofit/>
+          </a:bodyPr>
+          <a:lstStyle/>
+          <a:p>
+            <a:pPr marL="0" lvl="0" indent="0" algn="l" rtl="0">
+              <a:spcBef>
+                <a:spcPts val="0"/>
+              </a:spcBef>
+              <a:spcAft>
+                <a:spcPts val="0"/>
+              </a:spcAft>
+              <a:buClr>
+                <a:schemeClr val="lt1"/>
+              </a:buClr>
+              <a:buSzPts val="2800"/>
+              <a:buFont typeface="Arial"/>
+              <a:buNone/>
+            </a:pPr>
+            <a:r>
+              <a:rPr lang="en-US" i="1" dirty="0" err="1"/>
+              <a:t>Chionoecetes</a:t>
+            </a:r>
+            <a:r>
+              <a:rPr lang="en-US" i="1" dirty="0"/>
+              <a:t> spp.</a:t>
+            </a:r>
+            <a:r>
+              <a:rPr lang="en-US" dirty="0"/>
+              <a:t> hybrids</a:t>
+            </a:r>
+            <a:endParaRPr dirty="0"/>
+          </a:p>
+        </p:txBody>
+      </p:sp>
+      <p:sp>
+        <p:nvSpPr>
+          <p:cNvPr id="3" name="TextBox 2">
+            <a:extLst>
+              <a:ext uri="{FF2B5EF4-FFF2-40B4-BE49-F238E27FC236}">
+                <a16:creationId xmlns:a16="http://schemas.microsoft.com/office/drawing/2014/main" id="{F51D5B17-60E6-062A-C861-B67D6AF91D4F}"/>
+              </a:ext>
+            </a:extLst>
+          </p:cNvPr>
+          <p:cNvSpPr txBox="1"/>
+          <p:nvPr/>
+        </p:nvSpPr>
+        <p:spPr>
+          <a:xfrm>
+            <a:off x="850605" y="1658679"/>
+            <a:ext cx="10554681" cy="2585323"/>
+          </a:xfrm>
+          <a:prstGeom prst="rect">
+            <a:avLst/>
+          </a:prstGeom>
+          <a:noFill/>
+        </p:spPr>
+        <p:txBody>
+          <a:bodyPr wrap="square" rtlCol="0">
+            <a:spAutoFit/>
+          </a:bodyPr>
+          <a:lstStyle/>
+          <a:p>
+            <a:pPr marL="285750" indent="-285750">
+              <a:buFont typeface="Arial" panose="020B0604020202020204" pitchFamily="34" charset="0"/>
+              <a:buChar char="•"/>
+            </a:pPr>
+            <a:r>
+              <a:rPr lang="en-US" sz="1800" dirty="0">
+                <a:latin typeface="Calibri" panose="020F0502020204030204" pitchFamily="34" charset="0"/>
+                <a:cs typeface="Calibri" panose="020F0502020204030204" pitchFamily="34" charset="0"/>
+              </a:rPr>
+              <a:t>Tanner + snow crab cross-species mating produces hybrids</a:t>
+            </a:r>
+          </a:p>
+          <a:p>
+            <a:pPr marL="285750" indent="-285750">
+              <a:buFont typeface="Arial" panose="020B0604020202020204" pitchFamily="34" charset="0"/>
+              <a:buChar char="•"/>
+            </a:pPr>
+            <a:r>
+              <a:rPr lang="en-US" sz="1800" dirty="0">
+                <a:latin typeface="Calibri" panose="020F0502020204030204" pitchFamily="34" charset="0"/>
+                <a:cs typeface="Calibri" panose="020F0502020204030204" pitchFamily="34" charset="0"/>
+              </a:rPr>
+              <a:t>NMFS survey classifies all as “hybrids”</a:t>
+            </a:r>
+          </a:p>
+          <a:p>
+            <a:pPr marL="285750" indent="-285750">
+              <a:buFont typeface="Arial" panose="020B0604020202020204" pitchFamily="34" charset="0"/>
+              <a:buChar char="•"/>
+            </a:pPr>
+            <a:r>
+              <a:rPr lang="en-US" sz="1800" dirty="0">
+                <a:latin typeface="Calibri" panose="020F0502020204030204" pitchFamily="34" charset="0"/>
+                <a:cs typeface="Calibri" panose="020F0502020204030204" pitchFamily="34" charset="0"/>
+              </a:rPr>
+              <a:t>ADFG classifies</a:t>
+            </a:r>
+          </a:p>
+          <a:p>
+            <a:pPr marL="285750" lvl="8" indent="-285750">
+              <a:buFont typeface="Arial" panose="020B0604020202020204" pitchFamily="34" charset="0"/>
+              <a:buChar char="•"/>
+            </a:pPr>
+            <a:r>
+              <a:rPr lang="en-US" sz="1800" dirty="0">
+                <a:latin typeface="Calibri" panose="020F0502020204030204" pitchFamily="34" charset="0"/>
+                <a:cs typeface="Calibri" panose="020F0502020204030204" pitchFamily="34" charset="0"/>
+              </a:rPr>
+              <a:t>Tanner-like (minority): “M”-shaped </a:t>
+            </a:r>
+            <a:r>
+              <a:rPr lang="en-US" sz="1800" dirty="0" err="1">
+                <a:latin typeface="Calibri" panose="020F0502020204030204" pitchFamily="34" charset="0"/>
+                <a:cs typeface="Calibri" panose="020F0502020204030204" pitchFamily="34" charset="0"/>
+              </a:rPr>
+              <a:t>episotme</a:t>
+            </a:r>
+            <a:r>
+              <a:rPr lang="en-US" sz="1800" dirty="0">
+                <a:latin typeface="Calibri" panose="020F0502020204030204" pitchFamily="34" charset="0"/>
+                <a:cs typeface="Calibri" panose="020F0502020204030204" pitchFamily="34" charset="0"/>
+              </a:rPr>
+              <a:t>, red eyes, other snow crab-like features (carapace shape, </a:t>
+            </a:r>
+            <a:r>
+              <a:rPr lang="en-US" sz="1800" dirty="0" err="1">
+                <a:latin typeface="Calibri" panose="020F0502020204030204" pitchFamily="34" charset="0"/>
+                <a:cs typeface="Calibri" panose="020F0502020204030204" pitchFamily="34" charset="0"/>
+              </a:rPr>
+              <a:t>etc</a:t>
+            </a:r>
+            <a:r>
+              <a:rPr lang="en-US" sz="1800" dirty="0">
+                <a:latin typeface="Calibri" panose="020F0502020204030204" pitchFamily="34" charset="0"/>
+                <a:cs typeface="Calibri" panose="020F0502020204030204" pitchFamily="34" charset="0"/>
+              </a:rPr>
+              <a:t>)</a:t>
+            </a:r>
+          </a:p>
+          <a:p>
+            <a:pPr marL="285750" lvl="1" indent="-285750">
+              <a:buFont typeface="Arial" panose="020B0604020202020204" pitchFamily="34" charset="0"/>
+              <a:buChar char="•"/>
+            </a:pPr>
+            <a:r>
+              <a:rPr lang="en-US" sz="1800" dirty="0">
+                <a:latin typeface="Calibri" panose="020F0502020204030204" pitchFamily="34" charset="0"/>
+                <a:cs typeface="Calibri" panose="020F0502020204030204" pitchFamily="34" charset="0"/>
+              </a:rPr>
+              <a:t>snow-like (majority): Not Tanner-like, but with other Tanner features</a:t>
+            </a:r>
+          </a:p>
+          <a:p>
+            <a:pPr marL="285750" lvl="1" indent="-285750">
+              <a:buFont typeface="Arial" panose="020B0604020202020204" pitchFamily="34" charset="0"/>
+              <a:buChar char="•"/>
+            </a:pPr>
+            <a:r>
+              <a:rPr lang="en-US" sz="1800" dirty="0">
+                <a:latin typeface="Calibri" panose="020F0502020204030204" pitchFamily="34" charset="0"/>
+                <a:cs typeface="Calibri" panose="020F0502020204030204" pitchFamily="34" charset="0"/>
+              </a:rPr>
+              <a:t>Legally, hybrids do not exist</a:t>
+            </a:r>
+          </a:p>
+          <a:p>
+            <a:pPr marL="285750" lvl="2" indent="-285750">
+              <a:buFont typeface="Arial" panose="020B0604020202020204" pitchFamily="34" charset="0"/>
+              <a:buChar char="•"/>
+            </a:pPr>
+            <a:r>
+              <a:rPr lang="en-US" sz="1800" dirty="0">
+                <a:latin typeface="Calibri" panose="020F0502020204030204" pitchFamily="34" charset="0"/>
+                <a:cs typeface="Calibri" panose="020F0502020204030204" pitchFamily="34" charset="0"/>
+              </a:rPr>
+              <a:t> Tanner crab: “M”-shaped </a:t>
+            </a:r>
+            <a:r>
+              <a:rPr lang="en-US" sz="1800" dirty="0" err="1">
+                <a:latin typeface="Calibri" panose="020F0502020204030204" pitchFamily="34" charset="0"/>
+                <a:cs typeface="Calibri" panose="020F0502020204030204" pitchFamily="34" charset="0"/>
+              </a:rPr>
+              <a:t>episotme</a:t>
+            </a:r>
+            <a:r>
+              <a:rPr lang="en-US" sz="1800" dirty="0">
+                <a:latin typeface="Calibri" panose="020F0502020204030204" pitchFamily="34" charset="0"/>
+                <a:cs typeface="Calibri" panose="020F0502020204030204" pitchFamily="34" charset="0"/>
+              </a:rPr>
+              <a:t>, red eyes</a:t>
+            </a:r>
+          </a:p>
+          <a:p>
+            <a:pPr marL="285750" lvl="2" indent="-285750">
+              <a:buFont typeface="Arial" panose="020B0604020202020204" pitchFamily="34" charset="0"/>
+              <a:buChar char="•"/>
+            </a:pPr>
+            <a:r>
+              <a:rPr lang="en-US" sz="1800" dirty="0">
+                <a:latin typeface="Calibri" panose="020F0502020204030204" pitchFamily="34" charset="0"/>
+                <a:cs typeface="Calibri" panose="020F0502020204030204" pitchFamily="34" charset="0"/>
+              </a:rPr>
+              <a:t>snow crab: all other </a:t>
+            </a:r>
+            <a:r>
+              <a:rPr lang="en-US" sz="1800" i="1" dirty="0" err="1">
+                <a:latin typeface="Calibri" panose="020F0502020204030204" pitchFamily="34" charset="0"/>
+                <a:cs typeface="Calibri" panose="020F0502020204030204" pitchFamily="34" charset="0"/>
+              </a:rPr>
+              <a:t>Chionoecetes</a:t>
+            </a:r>
+            <a:endParaRPr lang="en-US" sz="1800" i="1" dirty="0">
+              <a:latin typeface="Calibri" panose="020F0502020204030204" pitchFamily="34" charset="0"/>
+              <a:cs typeface="Calibri" panose="020F0502020204030204" pitchFamily="34" charset="0"/>
+            </a:endParaRPr>
+          </a:p>
+          <a:p>
+            <a:pPr marL="285750" lvl="4" indent="-285750">
+              <a:buFont typeface="Arial" panose="020B0604020202020204" pitchFamily="34" charset="0"/>
+              <a:buChar char="•"/>
+            </a:pPr>
+            <a:endParaRPr lang="en-US" sz="1800" dirty="0">
+              <a:latin typeface="Calibri" panose="020F0502020204030204" pitchFamily="34" charset="0"/>
+              <a:cs typeface="Calibri" panose="020F0502020204030204" pitchFamily="34" charset="0"/>
+            </a:endParaRPr>
+          </a:p>
+        </p:txBody>
+      </p:sp>
+    </p:spTree>
+    <p:extLst>
+      <p:ext uri="{BB962C8B-B14F-4D97-AF65-F5344CB8AC3E}">
+        <p14:creationId xmlns:p14="http://schemas.microsoft.com/office/powerpoint/2010/main" val="296329987"/>
+      </p:ext>
+    </p:extLst>
+  </p:cSld>
+  <p:clrMapOvr>
+    <a:masterClrMapping/>
+  </p:clrMapOvr>
+</p:sld>
+</file>
+
 <file path=ppt/slides/slide4.xml><?xml version="1.0" encoding="utf-8"?>
 <p:sld xmlns:a="http://schemas.openxmlformats.org/drawingml/2006/main" xmlns:r="http://schemas.openxmlformats.org/officeDocument/2006/relationships" xmlns:p="http://schemas.openxmlformats.org/presentationml/2006/main">
   <p:cSld>
@@ -25025,10 +24129,10 @@
               <a:buNone/>
             </a:pPr>
             <a:r>
-              <a:rPr lang="en-US"/>
-              <a:t>Tanner crab model sensitivity runs: hybrids fishery data</a:t>
+              <a:rPr lang="en-US" dirty="0"/>
+              <a:t>Hybrids in fishery data</a:t>
             </a:r>
-            <a:endParaRPr/>
+            <a:endParaRPr dirty="0"/>
           </a:p>
         </p:txBody>
       </p:sp>
@@ -25175,10 +24279,10 @@
               <a:buNone/>
             </a:pPr>
             <a:r>
-              <a:rPr lang="en-US"/>
-              <a:t>Tanner crab model sensitivity runs: hybrids total catch data</a:t>
+              <a:rPr lang="en-US" dirty="0"/>
+              <a:t>Hybrids: total catch data</a:t>
             </a:r>
-            <a:endParaRPr/>
+            <a:endParaRPr dirty="0"/>
           </a:p>
         </p:txBody>
       </p:sp>
@@ -25325,10 +24429,10 @@
               <a:buNone/>
             </a:pPr>
             <a:r>
-              <a:rPr lang="en-US"/>
-              <a:t>Tanner crab model sensitivity runs: hybrids retained catch data</a:t>
+              <a:rPr lang="en-US" dirty="0"/>
+              <a:t>Hybrids: retained catch data</a:t>
             </a:r>
-            <a:endParaRPr/>
+            <a:endParaRPr dirty="0"/>
           </a:p>
         </p:txBody>
       </p:sp>
@@ -25475,10 +24579,10 @@
               <a:buNone/>
             </a:pPr>
             <a:r>
-              <a:rPr lang="en-US"/>
-              <a:t>Tanner crab model sensitivity runs: hybrids total catch data</a:t>
+              <a:rPr lang="en-US" dirty="0"/>
+              <a:t>Hybrids: total catch data</a:t>
             </a:r>
-            <a:endParaRPr/>
+            <a:endParaRPr dirty="0"/>
           </a:p>
         </p:txBody>
       </p:sp>
@@ -25956,10 +25060,10 @@
               <a:buNone/>
             </a:pPr>
             <a:r>
-              <a:rPr lang="en-US"/>
-              <a:t>Tanner crab model sensitivity runs: hybrids retained catch data</a:t>
+              <a:rPr lang="en-US" dirty="0"/>
+              <a:t>Hybrids: retained catch data</a:t>
             </a:r>
-            <a:endParaRPr/>
+            <a:endParaRPr dirty="0"/>
           </a:p>
         </p:txBody>
       </p:sp>
@@ -26337,7 +25441,13 @@
   <p:cSld>
     <p:spTree>
       <p:nvGrpSpPr>
-        <p:cNvPr id="1" name="Shape 690"/>
+        <p:cNvPr id="1" name="Shape 623">
+          <a:extLst>
+            <a:ext uri="{FF2B5EF4-FFF2-40B4-BE49-F238E27FC236}">
+              <a16:creationId xmlns:a16="http://schemas.microsoft.com/office/drawing/2014/main" id="{11AE52BD-A21A-4D53-F463-002D399264B7}"/>
+            </a:ext>
+          </a:extLst>
+        </p:cNvPr>
         <p:cNvGrpSpPr/>
         <p:nvPr/>
       </p:nvGrpSpPr>
@@ -26351,7 +25461,13 @@
       </p:grpSpPr>
       <p:sp>
         <p:nvSpPr>
-          <p:cNvPr id="691" name="Google Shape;691;g3daf0311381_0_114"/>
+          <p:cNvPr id="624" name="Google Shape;624;g3daf0311381_0_96">
+            <a:extLst>
+              <a:ext uri="{FF2B5EF4-FFF2-40B4-BE49-F238E27FC236}">
+                <a16:creationId xmlns:a16="http://schemas.microsoft.com/office/drawing/2014/main" id="{3578BD7B-9FA0-12D1-9443-84A4D6F3B4CE}"/>
+              </a:ext>
+            </a:extLst>
+          </p:cNvPr>
           <p:cNvSpPr txBox="1">
             <a:spLocks noGrp="1"/>
           </p:cNvSpPr>
@@ -26397,7 +25513,13 @@
       </p:sp>
       <p:sp>
         <p:nvSpPr>
-          <p:cNvPr id="692" name="Google Shape;692;g3daf0311381_0_114"/>
+          <p:cNvPr id="625" name="Google Shape;625;g3daf0311381_0_96">
+            <a:extLst>
+              <a:ext uri="{FF2B5EF4-FFF2-40B4-BE49-F238E27FC236}">
+                <a16:creationId xmlns:a16="http://schemas.microsoft.com/office/drawing/2014/main" id="{20F428DF-AD53-0126-0B49-97761AD32BB1}"/>
+              </a:ext>
+            </a:extLst>
+          </p:cNvPr>
           <p:cNvSpPr txBox="1">
             <a:spLocks noGrp="1"/>
           </p:cNvSpPr>
@@ -26440,30 +25562,28 @@
             </a:pPr>
             <a:r>
               <a:rPr lang="en-US"/>
-              <a:t>Tanner crab model sensitivity runs: estimated capture rates</a:t>
+              <a:t>Tanner crab model sensitivity runs</a:t>
             </a:r>
             <a:endParaRPr/>
           </a:p>
         </p:txBody>
       </p:sp>
-      <p:pic>
-        <p:nvPicPr>
-          <p:cNvPr id="693" name="Google Shape;693;g3daf0311381_0_114"/>
-          <p:cNvPicPr preferRelativeResize="0"/>
+      <p:sp>
+        <p:nvSpPr>
+          <p:cNvPr id="626" name="Google Shape;626;g3daf0311381_0_96">
+            <a:extLst>
+              <a:ext uri="{FF2B5EF4-FFF2-40B4-BE49-F238E27FC236}">
+                <a16:creationId xmlns:a16="http://schemas.microsoft.com/office/drawing/2014/main" id="{5EE6006D-856B-A7A6-9D8D-CF7C8B678CFD}"/>
+              </a:ext>
+            </a:extLst>
+          </p:cNvPr>
+          <p:cNvSpPr txBox="1"/>
           <p:nvPr/>
-        </p:nvPicPr>
-        <p:blipFill>
-          <a:blip r:embed="rId3">
-            <a:alphaModFix/>
-          </a:blip>
-          <a:stretch>
-            <a:fillRect/>
-          </a:stretch>
-        </p:blipFill>
+        </p:nvSpPr>
         <p:spPr>
           <a:xfrm>
-            <a:off x="1132114" y="1469875"/>
-            <a:ext cx="4337478" cy="5235725"/>
+            <a:off x="226375" y="1782025"/>
+            <a:ext cx="11521800" cy="3972600"/>
           </a:xfrm>
           <a:prstGeom prst="rect">
             <a:avLst/>
@@ -26473,36 +25593,333 @@
             <a:noFill/>
           </a:ln>
         </p:spPr>
-      </p:pic>
-      <p:pic>
-        <p:nvPicPr>
-          <p:cNvPr id="694" name="Google Shape;694;g3daf0311381_0_114"/>
-          <p:cNvPicPr preferRelativeResize="0"/>
-          <p:nvPr/>
-        </p:nvPicPr>
-        <p:blipFill>
-          <a:blip r:embed="rId4">
-            <a:alphaModFix/>
-          </a:blip>
-          <a:stretch>
-            <a:fillRect/>
-          </a:stretch>
-        </p:blipFill>
-        <p:spPr>
-          <a:xfrm>
-            <a:off x="5621989" y="1469875"/>
-            <a:ext cx="5265873" cy="5235724"/>
-          </a:xfrm>
-          <a:prstGeom prst="rect">
-            <a:avLst/>
-          </a:prstGeom>
-          <a:noFill/>
-          <a:ln>
-            <a:noFill/>
-          </a:ln>
-        </p:spPr>
-      </p:pic>
+        <p:txBody>
+          <a:bodyPr spcFirstLastPara="1" wrap="square" lIns="91425" tIns="45700" rIns="91425" bIns="45700" anchor="t" anchorCtr="0">
+            <a:normAutofit/>
+          </a:bodyPr>
+          <a:lstStyle/>
+          <a:p>
+            <a:pPr marL="914400" marR="0" lvl="1" indent="-349250" algn="l" rtl="0">
+              <a:lnSpc>
+                <a:spcPct val="150000"/>
+              </a:lnSpc>
+              <a:spcBef>
+                <a:spcPts val="0"/>
+              </a:spcBef>
+              <a:spcAft>
+                <a:spcPts val="0"/>
+              </a:spcAft>
+              <a:buSzPts val="1900"/>
+              <a:buFont typeface="Verdana"/>
+              <a:buChar char="▪"/>
+            </a:pPr>
+            <a:r>
+              <a:rPr lang="en-US" sz="1900">
+                <a:latin typeface="Verdana"/>
+                <a:ea typeface="Verdana"/>
+                <a:cs typeface="Verdana"/>
+                <a:sym typeface="Verdana"/>
+              </a:rPr>
+              <a:t>2025 assessment model</a:t>
+            </a:r>
+            <a:endParaRPr sz="1900">
+              <a:latin typeface="Verdana"/>
+              <a:ea typeface="Verdana"/>
+              <a:cs typeface="Verdana"/>
+              <a:sym typeface="Verdana"/>
+            </a:endParaRPr>
+          </a:p>
+          <a:p>
+            <a:pPr marL="914400" marR="0" lvl="1" indent="-349250" algn="l" rtl="0">
+              <a:lnSpc>
+                <a:spcPct val="150000"/>
+              </a:lnSpc>
+              <a:spcBef>
+                <a:spcPts val="0"/>
+              </a:spcBef>
+              <a:spcAft>
+                <a:spcPts val="0"/>
+              </a:spcAft>
+              <a:buSzPts val="1900"/>
+              <a:buFont typeface="Verdana"/>
+              <a:buChar char="▪"/>
+            </a:pPr>
+            <a:r>
+              <a:rPr lang="en-US" sz="1900">
+                <a:latin typeface="Verdana"/>
+                <a:ea typeface="Verdana"/>
+                <a:cs typeface="Verdana"/>
+                <a:sym typeface="Verdana"/>
+              </a:rPr>
+              <a:t>2025AM + (Hybrid+Tanner) survey data</a:t>
+            </a:r>
+            <a:endParaRPr sz="1900">
+              <a:latin typeface="Verdana"/>
+              <a:ea typeface="Verdana"/>
+              <a:cs typeface="Verdana"/>
+              <a:sym typeface="Verdana"/>
+            </a:endParaRPr>
+          </a:p>
+          <a:p>
+            <a:pPr marL="1371600" marR="0" lvl="2" indent="-349250" algn="l" rtl="0">
+              <a:lnSpc>
+                <a:spcPct val="150000"/>
+              </a:lnSpc>
+              <a:spcBef>
+                <a:spcPts val="0"/>
+              </a:spcBef>
+              <a:spcAft>
+                <a:spcPts val="0"/>
+              </a:spcAft>
+              <a:buSzPts val="1900"/>
+              <a:buFont typeface="Verdana"/>
+              <a:buChar char="■"/>
+            </a:pPr>
+            <a:r>
+              <a:rPr lang="en-US" sz="1900">
+                <a:latin typeface="Verdana"/>
+                <a:ea typeface="Verdana"/>
+                <a:cs typeface="Verdana"/>
+                <a:sym typeface="Verdana"/>
+              </a:rPr>
+              <a:t>all hybrids treated as Tanner crab</a:t>
+            </a:r>
+            <a:endParaRPr sz="1900">
+              <a:latin typeface="Verdana"/>
+              <a:ea typeface="Verdana"/>
+              <a:cs typeface="Verdana"/>
+              <a:sym typeface="Verdana"/>
+            </a:endParaRPr>
+          </a:p>
+          <a:p>
+            <a:pPr marL="914400" lvl="1" indent="-349250" algn="l" rtl="0">
+              <a:lnSpc>
+                <a:spcPct val="150000"/>
+              </a:lnSpc>
+              <a:spcBef>
+                <a:spcPts val="0"/>
+              </a:spcBef>
+              <a:spcAft>
+                <a:spcPts val="0"/>
+              </a:spcAft>
+              <a:buSzPts val="1900"/>
+              <a:buFont typeface="Verdana"/>
+              <a:buChar char="▪"/>
+            </a:pPr>
+            <a:r>
+              <a:rPr lang="en-US" sz="1900">
+                <a:solidFill>
+                  <a:schemeClr val="dk1"/>
+                </a:solidFill>
+                <a:latin typeface="Verdana"/>
+                <a:ea typeface="Verdana"/>
+                <a:cs typeface="Verdana"/>
+                <a:sym typeface="Verdana"/>
+              </a:rPr>
+              <a:t>2025AM + (Hybrid+Tanner) fishery data</a:t>
+            </a:r>
+            <a:endParaRPr sz="1900">
+              <a:solidFill>
+                <a:schemeClr val="dk1"/>
+              </a:solidFill>
+              <a:latin typeface="Verdana"/>
+              <a:ea typeface="Verdana"/>
+              <a:cs typeface="Verdana"/>
+              <a:sym typeface="Verdana"/>
+            </a:endParaRPr>
+          </a:p>
+          <a:p>
+            <a:pPr marL="1371600" lvl="2" indent="-349250" algn="l" rtl="0">
+              <a:lnSpc>
+                <a:spcPct val="150000"/>
+              </a:lnSpc>
+              <a:spcBef>
+                <a:spcPts val="0"/>
+              </a:spcBef>
+              <a:spcAft>
+                <a:spcPts val="0"/>
+              </a:spcAft>
+              <a:buClr>
+                <a:schemeClr val="dk1"/>
+              </a:buClr>
+              <a:buSzPts val="1900"/>
+              <a:buFont typeface="Verdana"/>
+              <a:buChar char="■"/>
+            </a:pPr>
+            <a:r>
+              <a:rPr lang="en-US" sz="1900">
+                <a:solidFill>
+                  <a:schemeClr val="dk1"/>
+                </a:solidFill>
+                <a:latin typeface="Verdana"/>
+                <a:ea typeface="Verdana"/>
+                <a:cs typeface="Verdana"/>
+                <a:sym typeface="Verdana"/>
+              </a:rPr>
+              <a:t>all hybrids in ADFG at-sea observer coverage treated as Tanner crab</a:t>
+            </a:r>
+            <a:endParaRPr sz="1900">
+              <a:solidFill>
+                <a:schemeClr val="dk1"/>
+              </a:solidFill>
+              <a:latin typeface="Verdana"/>
+              <a:ea typeface="Verdana"/>
+              <a:cs typeface="Verdana"/>
+              <a:sym typeface="Verdana"/>
+            </a:endParaRPr>
+          </a:p>
+          <a:p>
+            <a:pPr marL="1371600" lvl="2" indent="-349250" algn="l" rtl="0">
+              <a:lnSpc>
+                <a:spcPct val="150000"/>
+              </a:lnSpc>
+              <a:spcBef>
+                <a:spcPts val="0"/>
+              </a:spcBef>
+              <a:spcAft>
+                <a:spcPts val="0"/>
+              </a:spcAft>
+              <a:buClr>
+                <a:schemeClr val="dk1"/>
+              </a:buClr>
+              <a:buSzPts val="1900"/>
+              <a:buFont typeface="Verdana"/>
+              <a:buChar char="■"/>
+            </a:pPr>
+            <a:r>
+              <a:rPr lang="en-US" sz="1900">
+                <a:solidFill>
+                  <a:schemeClr val="dk1"/>
+                </a:solidFill>
+                <a:latin typeface="Verdana"/>
+                <a:ea typeface="Verdana"/>
+                <a:cs typeface="Verdana"/>
+                <a:sym typeface="Verdana"/>
+              </a:rPr>
+              <a:t>all hybrids in retained catch size comps treated as Tanner crab</a:t>
+            </a:r>
+            <a:endParaRPr sz="1900">
+              <a:solidFill>
+                <a:schemeClr val="dk1"/>
+              </a:solidFill>
+              <a:latin typeface="Verdana"/>
+              <a:ea typeface="Verdana"/>
+              <a:cs typeface="Verdana"/>
+              <a:sym typeface="Verdana"/>
+            </a:endParaRPr>
+          </a:p>
+          <a:p>
+            <a:pPr marL="1371600" lvl="2" indent="-349250" algn="l" rtl="0">
+              <a:lnSpc>
+                <a:spcPct val="150000"/>
+              </a:lnSpc>
+              <a:spcBef>
+                <a:spcPts val="0"/>
+              </a:spcBef>
+              <a:spcAft>
+                <a:spcPts val="0"/>
+              </a:spcAft>
+              <a:buClr>
+                <a:schemeClr val="dk1"/>
+              </a:buClr>
+              <a:buSzPts val="1900"/>
+              <a:buFont typeface="Verdana"/>
+              <a:buChar char="■"/>
+            </a:pPr>
+            <a:r>
+              <a:rPr lang="en-US" sz="1900">
+                <a:solidFill>
+                  <a:schemeClr val="dk1"/>
+                </a:solidFill>
+                <a:latin typeface="Verdana"/>
+                <a:ea typeface="Verdana"/>
+                <a:cs typeface="Verdana"/>
+                <a:sym typeface="Verdana"/>
+              </a:rPr>
+              <a:t>retained catch </a:t>
+            </a:r>
+            <a:r>
+              <a:rPr lang="en-US" sz="1900" b="1">
+                <a:solidFill>
+                  <a:schemeClr val="dk1"/>
+                </a:solidFill>
+                <a:latin typeface="Verdana"/>
+                <a:ea typeface="Verdana"/>
+                <a:cs typeface="Verdana"/>
+                <a:sym typeface="Verdana"/>
+              </a:rPr>
+              <a:t>not</a:t>
+            </a:r>
+            <a:r>
+              <a:rPr lang="en-US" sz="1900">
+                <a:solidFill>
+                  <a:schemeClr val="dk1"/>
+                </a:solidFill>
+                <a:latin typeface="Verdana"/>
+                <a:ea typeface="Verdana"/>
+                <a:cs typeface="Verdana"/>
+                <a:sym typeface="Verdana"/>
+              </a:rPr>
+              <a:t> apportioned between hybrids and species</a:t>
+            </a:r>
+            <a:endParaRPr sz="1900">
+              <a:solidFill>
+                <a:schemeClr val="dk1"/>
+              </a:solidFill>
+              <a:latin typeface="Verdana"/>
+              <a:ea typeface="Verdana"/>
+              <a:cs typeface="Verdana"/>
+              <a:sym typeface="Verdana"/>
+            </a:endParaRPr>
+          </a:p>
+          <a:p>
+            <a:pPr marL="914400" lvl="1" indent="-349250" algn="l" rtl="0">
+              <a:lnSpc>
+                <a:spcPct val="150000"/>
+              </a:lnSpc>
+              <a:spcBef>
+                <a:spcPts val="0"/>
+              </a:spcBef>
+              <a:spcAft>
+                <a:spcPts val="0"/>
+              </a:spcAft>
+              <a:buClr>
+                <a:schemeClr val="dk1"/>
+              </a:buClr>
+              <a:buSzPts val="1900"/>
+              <a:buFont typeface="Verdana"/>
+              <a:buChar char="▪"/>
+            </a:pPr>
+            <a:r>
+              <a:rPr lang="en-US" sz="1900">
+                <a:solidFill>
+                  <a:schemeClr val="dk1"/>
+                </a:solidFill>
+                <a:latin typeface="Verdana"/>
+                <a:ea typeface="Verdana"/>
+                <a:cs typeface="Verdana"/>
+                <a:sym typeface="Verdana"/>
+              </a:rPr>
+              <a:t>2025AM + (Hybrid+Tanner) survey + fishery data</a:t>
+            </a:r>
+            <a:endParaRPr sz="1900">
+              <a:solidFill>
+                <a:schemeClr val="dk1"/>
+              </a:solidFill>
+              <a:latin typeface="Verdana"/>
+              <a:ea typeface="Verdana"/>
+              <a:cs typeface="Verdana"/>
+              <a:sym typeface="Verdana"/>
+            </a:endParaRPr>
+          </a:p>
+        </p:txBody>
+      </p:sp>
     </p:spTree>
+    <p:extLst>
+      <p:ext uri="{BB962C8B-B14F-4D97-AF65-F5344CB8AC3E}">
+        <p14:creationId xmlns:p14="http://schemas.microsoft.com/office/powerpoint/2010/main" val="218464013"/>
+      </p:ext>
+    </p:extLst>
   </p:cSld>
   <p:clrMapOvr>
     <a:masterClrMapping/>
